--- a/figures/Supplemental_Figures/Supp_Figure2_case2.pptx
+++ b/figures/Supplemental_Figures/Supp_Figure2_case2.pptx
@@ -2,12 +2,12 @@
 <file path=ppt/presentation.xml><?xml version="1.0" encoding="utf-8"?>
 <p:presentation xmlns:a="http://schemas.openxmlformats.org/drawingml/2006/main" xmlns:r="http://schemas.openxmlformats.org/officeDocument/2006/relationships" xmlns:p="http://schemas.openxmlformats.org/presentationml/2006/main" saveSubsetFonts="1" autoCompressPictures="0">
   <p:sldMasterIdLst>
-    <p:sldMasterId id="2147483708" r:id="rId1"/>
+    <p:sldMasterId id="2147483720" r:id="rId1"/>
   </p:sldMasterIdLst>
   <p:sldIdLst>
     <p:sldId id="256" r:id="rId2"/>
   </p:sldIdLst>
-  <p:sldSz cx="8999538" cy="8640763"/>
+  <p:sldSz cx="12960350" cy="8640763"/>
   <p:notesSz cx="6858000" cy="9144000"/>
   <p:defaultTextStyle>
     <a:defPPr>
@@ -104,6 +104,11 @@
       </a:defRPr>
     </a:lvl9pPr>
   </p:defaultTextStyle>
+  <p:extLst>
+    <p:ext uri="{EFAFB233-063F-42B5-8137-9DF3F51BA10A}">
+      <p15:sldGuideLst xmlns:p15="http://schemas.microsoft.com/office/powerpoint/2012/main"/>
+    </p:ext>
+  </p:extLst>
 </p:presentation>
 </file>
 
@@ -136,15 +141,15 @@
         </p:nvSpPr>
         <p:spPr>
           <a:xfrm>
-            <a:off x="674966" y="1414125"/>
-            <a:ext cx="7649607" cy="3008266"/>
+            <a:off x="972026" y="1414125"/>
+            <a:ext cx="11016298" cy="3008266"/>
           </a:xfrm>
         </p:spPr>
         <p:txBody>
           <a:bodyPr anchor="b"/>
           <a:lstStyle>
             <a:lvl1pPr algn="ctr">
-              <a:defRPr sz="5905"/>
+              <a:defRPr sz="7560"/>
             </a:lvl1pPr>
           </a:lstStyle>
           <a:p>
@@ -168,8 +173,8 @@
         </p:nvSpPr>
         <p:spPr>
           <a:xfrm>
-            <a:off x="1124942" y="4538401"/>
-            <a:ext cx="6749654" cy="2086184"/>
+            <a:off x="1620044" y="4538401"/>
+            <a:ext cx="9720263" cy="2086184"/>
           </a:xfrm>
         </p:spPr>
         <p:txBody>
@@ -177,39 +182,39 @@
           <a:lstStyle>
             <a:lvl1pPr marL="0" indent="0" algn="ctr">
               <a:buNone/>
-              <a:defRPr sz="2362"/>
+              <a:defRPr sz="3024"/>
             </a:lvl1pPr>
-            <a:lvl2pPr marL="449976" indent="0" algn="ctr">
-              <a:buNone/>
-              <a:defRPr sz="1968"/>
+            <a:lvl2pPr marL="576072" indent="0" algn="ctr">
+              <a:buNone/>
+              <a:defRPr sz="2520"/>
             </a:lvl2pPr>
-            <a:lvl3pPr marL="899952" indent="0" algn="ctr">
-              <a:buNone/>
-              <a:defRPr sz="1772"/>
+            <a:lvl3pPr marL="1152144" indent="0" algn="ctr">
+              <a:buNone/>
+              <a:defRPr sz="2268"/>
             </a:lvl3pPr>
-            <a:lvl4pPr marL="1349929" indent="0" algn="ctr">
-              <a:buNone/>
-              <a:defRPr sz="1575"/>
+            <a:lvl4pPr marL="1728216" indent="0" algn="ctr">
+              <a:buNone/>
+              <a:defRPr sz="2016"/>
             </a:lvl4pPr>
-            <a:lvl5pPr marL="1799905" indent="0" algn="ctr">
-              <a:buNone/>
-              <a:defRPr sz="1575"/>
+            <a:lvl5pPr marL="2304288" indent="0" algn="ctr">
+              <a:buNone/>
+              <a:defRPr sz="2016"/>
             </a:lvl5pPr>
-            <a:lvl6pPr marL="2249881" indent="0" algn="ctr">
-              <a:buNone/>
-              <a:defRPr sz="1575"/>
+            <a:lvl6pPr marL="2880360" indent="0" algn="ctr">
+              <a:buNone/>
+              <a:defRPr sz="2016"/>
             </a:lvl6pPr>
-            <a:lvl7pPr marL="2699857" indent="0" algn="ctr">
-              <a:buNone/>
-              <a:defRPr sz="1575"/>
+            <a:lvl7pPr marL="3456432" indent="0" algn="ctr">
+              <a:buNone/>
+              <a:defRPr sz="2016"/>
             </a:lvl7pPr>
-            <a:lvl8pPr marL="3149834" indent="0" algn="ctr">
-              <a:buNone/>
-              <a:defRPr sz="1575"/>
+            <a:lvl8pPr marL="4032504" indent="0" algn="ctr">
+              <a:buNone/>
+              <a:defRPr sz="2016"/>
             </a:lvl8pPr>
-            <a:lvl9pPr marL="3599810" indent="0" algn="ctr">
-              <a:buNone/>
-              <a:defRPr sz="1575"/>
+            <a:lvl9pPr marL="4608576" indent="0" algn="ctr">
+              <a:buNone/>
+              <a:defRPr sz="2016"/>
             </a:lvl9pPr>
           </a:lstStyle>
           <a:p>
@@ -238,7 +243,7 @@
           <a:p>
             <a:fld id="{0234921A-2271-F649-B94C-D9F2E69CC631}" type="datetimeFigureOut">
               <a:rPr lang="en-US" smtClean="0"/>
-              <a:t>7/29/26</a:t>
+              <a:t>8/7/26</a:t>
             </a:fld>
             <a:endParaRPr lang="en-US"/>
           </a:p>
@@ -289,7 +294,7 @@
     </p:spTree>
     <p:extLst>
       <p:ext uri="{BB962C8B-B14F-4D97-AF65-F5344CB8AC3E}">
-        <p14:creationId xmlns:p14="http://schemas.microsoft.com/office/powerpoint/2010/main" val="3203815568"/>
+        <p14:creationId xmlns:p14="http://schemas.microsoft.com/office/powerpoint/2010/main" val="2578101621"/>
       </p:ext>
     </p:extLst>
   </p:cSld>
@@ -408,7 +413,7 @@
           <a:p>
             <a:fld id="{0234921A-2271-F649-B94C-D9F2E69CC631}" type="datetimeFigureOut">
               <a:rPr lang="en-US" smtClean="0"/>
-              <a:t>7/29/26</a:t>
+              <a:t>8/7/26</a:t>
             </a:fld>
             <a:endParaRPr lang="en-US"/>
           </a:p>
@@ -459,7 +464,7 @@
     </p:spTree>
     <p:extLst>
       <p:ext uri="{BB962C8B-B14F-4D97-AF65-F5344CB8AC3E}">
-        <p14:creationId xmlns:p14="http://schemas.microsoft.com/office/powerpoint/2010/main" val="2160792389"/>
+        <p14:creationId xmlns:p14="http://schemas.microsoft.com/office/powerpoint/2010/main" val="885568840"/>
       </p:ext>
     </p:extLst>
   </p:cSld>
@@ -498,8 +503,8 @@
         </p:nvSpPr>
         <p:spPr>
           <a:xfrm>
-            <a:off x="6440295" y="460041"/>
-            <a:ext cx="1940525" cy="7322647"/>
+            <a:off x="9274751" y="460041"/>
+            <a:ext cx="2794575" cy="7322647"/>
           </a:xfrm>
         </p:spPr>
         <p:txBody>
@@ -526,8 +531,8 @@
         </p:nvSpPr>
         <p:spPr>
           <a:xfrm>
-            <a:off x="618719" y="460041"/>
-            <a:ext cx="5709082" cy="7322647"/>
+            <a:off x="891025" y="460041"/>
+            <a:ext cx="8221722" cy="7322647"/>
           </a:xfrm>
         </p:spPr>
         <p:txBody>
@@ -588,7 +593,7 @@
           <a:p>
             <a:fld id="{0234921A-2271-F649-B94C-D9F2E69CC631}" type="datetimeFigureOut">
               <a:rPr lang="en-US" smtClean="0"/>
-              <a:t>7/29/26</a:t>
+              <a:t>8/7/26</a:t>
             </a:fld>
             <a:endParaRPr lang="en-US"/>
           </a:p>
@@ -639,7 +644,7 @@
     </p:spTree>
     <p:extLst>
       <p:ext uri="{BB962C8B-B14F-4D97-AF65-F5344CB8AC3E}">
-        <p14:creationId xmlns:p14="http://schemas.microsoft.com/office/powerpoint/2010/main" val="2546918204"/>
+        <p14:creationId xmlns:p14="http://schemas.microsoft.com/office/powerpoint/2010/main" val="1966168665"/>
       </p:ext>
     </p:extLst>
   </p:cSld>
@@ -758,7 +763,7 @@
           <a:p>
             <a:fld id="{0234921A-2271-F649-B94C-D9F2E69CC631}" type="datetimeFigureOut">
               <a:rPr lang="en-US" smtClean="0"/>
-              <a:t>7/29/26</a:t>
+              <a:t>8/7/26</a:t>
             </a:fld>
             <a:endParaRPr lang="en-US"/>
           </a:p>
@@ -809,7 +814,7 @@
     </p:spTree>
     <p:extLst>
       <p:ext uri="{BB962C8B-B14F-4D97-AF65-F5344CB8AC3E}">
-        <p14:creationId xmlns:p14="http://schemas.microsoft.com/office/powerpoint/2010/main" val="1948778936"/>
+        <p14:creationId xmlns:p14="http://schemas.microsoft.com/office/powerpoint/2010/main" val="1328374543"/>
       </p:ext>
     </p:extLst>
   </p:cSld>
@@ -848,15 +853,15 @@
         </p:nvSpPr>
         <p:spPr>
           <a:xfrm>
-            <a:off x="614031" y="2154193"/>
-            <a:ext cx="7762102" cy="3594317"/>
+            <a:off x="884275" y="2154193"/>
+            <a:ext cx="11178302" cy="3594317"/>
           </a:xfrm>
         </p:spPr>
         <p:txBody>
           <a:bodyPr anchor="b"/>
           <a:lstStyle>
             <a:lvl1pPr>
-              <a:defRPr sz="5905"/>
+              <a:defRPr sz="7560"/>
             </a:lvl1pPr>
           </a:lstStyle>
           <a:p>
@@ -880,8 +885,8 @@
         </p:nvSpPr>
         <p:spPr>
           <a:xfrm>
-            <a:off x="614031" y="5782513"/>
-            <a:ext cx="7762102" cy="1890166"/>
+            <a:off x="884275" y="5782513"/>
+            <a:ext cx="11178302" cy="1890166"/>
           </a:xfrm>
         </p:spPr>
         <p:txBody>
@@ -889,7 +894,7 @@
           <a:lstStyle>
             <a:lvl1pPr marL="0" indent="0">
               <a:buNone/>
-              <a:defRPr sz="2362">
+              <a:defRPr sz="3024">
                 <a:solidFill>
                   <a:schemeClr val="tx1">
                     <a:tint val="82000"/>
@@ -897,9 +902,9 @@
                 </a:solidFill>
               </a:defRPr>
             </a:lvl1pPr>
-            <a:lvl2pPr marL="449976" indent="0">
-              <a:buNone/>
-              <a:defRPr sz="1968">
+            <a:lvl2pPr marL="576072" indent="0">
+              <a:buNone/>
+              <a:defRPr sz="2520">
                 <a:solidFill>
                   <a:schemeClr val="tx1">
                     <a:tint val="82000"/>
@@ -907,9 +912,9 @@
                 </a:solidFill>
               </a:defRPr>
             </a:lvl2pPr>
-            <a:lvl3pPr marL="899952" indent="0">
-              <a:buNone/>
-              <a:defRPr sz="1772">
+            <a:lvl3pPr marL="1152144" indent="0">
+              <a:buNone/>
+              <a:defRPr sz="2268">
                 <a:solidFill>
                   <a:schemeClr val="tx1">
                     <a:tint val="82000"/>
@@ -917,9 +922,9 @@
                 </a:solidFill>
               </a:defRPr>
             </a:lvl3pPr>
-            <a:lvl4pPr marL="1349929" indent="0">
-              <a:buNone/>
-              <a:defRPr sz="1575">
+            <a:lvl4pPr marL="1728216" indent="0">
+              <a:buNone/>
+              <a:defRPr sz="2016">
                 <a:solidFill>
                   <a:schemeClr val="tx1">
                     <a:tint val="82000"/>
@@ -927,9 +932,9 @@
                 </a:solidFill>
               </a:defRPr>
             </a:lvl4pPr>
-            <a:lvl5pPr marL="1799905" indent="0">
-              <a:buNone/>
-              <a:defRPr sz="1575">
+            <a:lvl5pPr marL="2304288" indent="0">
+              <a:buNone/>
+              <a:defRPr sz="2016">
                 <a:solidFill>
                   <a:schemeClr val="tx1">
                     <a:tint val="82000"/>
@@ -937,9 +942,9 @@
                 </a:solidFill>
               </a:defRPr>
             </a:lvl5pPr>
-            <a:lvl6pPr marL="2249881" indent="0">
-              <a:buNone/>
-              <a:defRPr sz="1575">
+            <a:lvl6pPr marL="2880360" indent="0">
+              <a:buNone/>
+              <a:defRPr sz="2016">
                 <a:solidFill>
                   <a:schemeClr val="tx1">
                     <a:tint val="82000"/>
@@ -947,9 +952,9 @@
                 </a:solidFill>
               </a:defRPr>
             </a:lvl6pPr>
-            <a:lvl7pPr marL="2699857" indent="0">
-              <a:buNone/>
-              <a:defRPr sz="1575">
+            <a:lvl7pPr marL="3456432" indent="0">
+              <a:buNone/>
+              <a:defRPr sz="2016">
                 <a:solidFill>
                   <a:schemeClr val="tx1">
                     <a:tint val="82000"/>
@@ -957,9 +962,9 @@
                 </a:solidFill>
               </a:defRPr>
             </a:lvl7pPr>
-            <a:lvl8pPr marL="3149834" indent="0">
-              <a:buNone/>
-              <a:defRPr sz="1575">
+            <a:lvl8pPr marL="4032504" indent="0">
+              <a:buNone/>
+              <a:defRPr sz="2016">
                 <a:solidFill>
                   <a:schemeClr val="tx1">
                     <a:tint val="82000"/>
@@ -967,9 +972,9 @@
                 </a:solidFill>
               </a:defRPr>
             </a:lvl8pPr>
-            <a:lvl9pPr marL="3599810" indent="0">
-              <a:buNone/>
-              <a:defRPr sz="1575">
+            <a:lvl9pPr marL="4608576" indent="0">
+              <a:buNone/>
+              <a:defRPr sz="2016">
                 <a:solidFill>
                   <a:schemeClr val="tx1">
                     <a:tint val="82000"/>
@@ -1004,7 +1009,7 @@
           <a:p>
             <a:fld id="{0234921A-2271-F649-B94C-D9F2E69CC631}" type="datetimeFigureOut">
               <a:rPr lang="en-US" smtClean="0"/>
-              <a:t>7/29/26</a:t>
+              <a:t>8/7/26</a:t>
             </a:fld>
             <a:endParaRPr lang="en-US"/>
           </a:p>
@@ -1055,7 +1060,7 @@
     </p:spTree>
     <p:extLst>
       <p:ext uri="{BB962C8B-B14F-4D97-AF65-F5344CB8AC3E}">
-        <p14:creationId xmlns:p14="http://schemas.microsoft.com/office/powerpoint/2010/main" val="78186382"/>
+        <p14:creationId xmlns:p14="http://schemas.microsoft.com/office/powerpoint/2010/main" val="3961332843"/>
       </p:ext>
     </p:extLst>
   </p:cSld>
@@ -1117,8 +1122,8 @@
         </p:nvSpPr>
         <p:spPr>
           <a:xfrm>
-            <a:off x="618718" y="2300203"/>
-            <a:ext cx="3824804" cy="5482485"/>
+            <a:off x="891024" y="2300203"/>
+            <a:ext cx="5508149" cy="5482485"/>
           </a:xfrm>
         </p:spPr>
         <p:txBody>
@@ -1174,8 +1179,8 @@
         </p:nvSpPr>
         <p:spPr>
           <a:xfrm>
-            <a:off x="4556016" y="2300203"/>
-            <a:ext cx="3824804" cy="5482485"/>
+            <a:off x="6561177" y="2300203"/>
+            <a:ext cx="5508149" cy="5482485"/>
           </a:xfrm>
         </p:spPr>
         <p:txBody>
@@ -1236,7 +1241,7 @@
           <a:p>
             <a:fld id="{0234921A-2271-F649-B94C-D9F2E69CC631}" type="datetimeFigureOut">
               <a:rPr lang="en-US" smtClean="0"/>
-              <a:t>7/29/26</a:t>
+              <a:t>8/7/26</a:t>
             </a:fld>
             <a:endParaRPr lang="en-US"/>
           </a:p>
@@ -1287,7 +1292,7 @@
     </p:spTree>
     <p:extLst>
       <p:ext uri="{BB962C8B-B14F-4D97-AF65-F5344CB8AC3E}">
-        <p14:creationId xmlns:p14="http://schemas.microsoft.com/office/powerpoint/2010/main" val="3454222828"/>
+        <p14:creationId xmlns:p14="http://schemas.microsoft.com/office/powerpoint/2010/main" val="1758678672"/>
       </p:ext>
     </p:extLst>
   </p:cSld>
@@ -1326,8 +1331,8 @@
         </p:nvSpPr>
         <p:spPr>
           <a:xfrm>
-            <a:off x="619890" y="460043"/>
-            <a:ext cx="7762102" cy="1670148"/>
+            <a:off x="892712" y="460043"/>
+            <a:ext cx="11178302" cy="1670148"/>
           </a:xfrm>
         </p:spPr>
         <p:txBody>
@@ -1354,8 +1359,8 @@
         </p:nvSpPr>
         <p:spPr>
           <a:xfrm>
-            <a:off x="619891" y="2118188"/>
-            <a:ext cx="3807226" cy="1038091"/>
+            <a:off x="892713" y="2118188"/>
+            <a:ext cx="5482835" cy="1038091"/>
           </a:xfrm>
         </p:spPr>
         <p:txBody>
@@ -1363,39 +1368,39 @@
           <a:lstStyle>
             <a:lvl1pPr marL="0" indent="0">
               <a:buNone/>
-              <a:defRPr sz="2362" b="1"/>
+              <a:defRPr sz="3024" b="1"/>
             </a:lvl1pPr>
-            <a:lvl2pPr marL="449976" indent="0">
-              <a:buNone/>
-              <a:defRPr sz="1968" b="1"/>
+            <a:lvl2pPr marL="576072" indent="0">
+              <a:buNone/>
+              <a:defRPr sz="2520" b="1"/>
             </a:lvl2pPr>
-            <a:lvl3pPr marL="899952" indent="0">
-              <a:buNone/>
-              <a:defRPr sz="1772" b="1"/>
+            <a:lvl3pPr marL="1152144" indent="0">
+              <a:buNone/>
+              <a:defRPr sz="2268" b="1"/>
             </a:lvl3pPr>
-            <a:lvl4pPr marL="1349929" indent="0">
-              <a:buNone/>
-              <a:defRPr sz="1575" b="1"/>
+            <a:lvl4pPr marL="1728216" indent="0">
+              <a:buNone/>
+              <a:defRPr sz="2016" b="1"/>
             </a:lvl4pPr>
-            <a:lvl5pPr marL="1799905" indent="0">
-              <a:buNone/>
-              <a:defRPr sz="1575" b="1"/>
+            <a:lvl5pPr marL="2304288" indent="0">
+              <a:buNone/>
+              <a:defRPr sz="2016" b="1"/>
             </a:lvl5pPr>
-            <a:lvl6pPr marL="2249881" indent="0">
-              <a:buNone/>
-              <a:defRPr sz="1575" b="1"/>
+            <a:lvl6pPr marL="2880360" indent="0">
+              <a:buNone/>
+              <a:defRPr sz="2016" b="1"/>
             </a:lvl6pPr>
-            <a:lvl7pPr marL="2699857" indent="0">
-              <a:buNone/>
-              <a:defRPr sz="1575" b="1"/>
+            <a:lvl7pPr marL="3456432" indent="0">
+              <a:buNone/>
+              <a:defRPr sz="2016" b="1"/>
             </a:lvl7pPr>
-            <a:lvl8pPr marL="3149834" indent="0">
-              <a:buNone/>
-              <a:defRPr sz="1575" b="1"/>
+            <a:lvl8pPr marL="4032504" indent="0">
+              <a:buNone/>
+              <a:defRPr sz="2016" b="1"/>
             </a:lvl8pPr>
-            <a:lvl9pPr marL="3599810" indent="0">
-              <a:buNone/>
-              <a:defRPr sz="1575" b="1"/>
+            <a:lvl9pPr marL="4608576" indent="0">
+              <a:buNone/>
+              <a:defRPr sz="2016" b="1"/>
             </a:lvl9pPr>
           </a:lstStyle>
           <a:p>
@@ -1419,8 +1424,8 @@
         </p:nvSpPr>
         <p:spPr>
           <a:xfrm>
-            <a:off x="619891" y="3156278"/>
-            <a:ext cx="3807226" cy="4642411"/>
+            <a:off x="892713" y="3156278"/>
+            <a:ext cx="5482835" cy="4642411"/>
           </a:xfrm>
         </p:spPr>
         <p:txBody>
@@ -1476,8 +1481,8 @@
         </p:nvSpPr>
         <p:spPr>
           <a:xfrm>
-            <a:off x="4556017" y="2118188"/>
-            <a:ext cx="3825976" cy="1038091"/>
+            <a:off x="6561178" y="2118188"/>
+            <a:ext cx="5509837" cy="1038091"/>
           </a:xfrm>
         </p:spPr>
         <p:txBody>
@@ -1485,39 +1490,39 @@
           <a:lstStyle>
             <a:lvl1pPr marL="0" indent="0">
               <a:buNone/>
-              <a:defRPr sz="2362" b="1"/>
+              <a:defRPr sz="3024" b="1"/>
             </a:lvl1pPr>
-            <a:lvl2pPr marL="449976" indent="0">
-              <a:buNone/>
-              <a:defRPr sz="1968" b="1"/>
+            <a:lvl2pPr marL="576072" indent="0">
+              <a:buNone/>
+              <a:defRPr sz="2520" b="1"/>
             </a:lvl2pPr>
-            <a:lvl3pPr marL="899952" indent="0">
-              <a:buNone/>
-              <a:defRPr sz="1772" b="1"/>
+            <a:lvl3pPr marL="1152144" indent="0">
+              <a:buNone/>
+              <a:defRPr sz="2268" b="1"/>
             </a:lvl3pPr>
-            <a:lvl4pPr marL="1349929" indent="0">
-              <a:buNone/>
-              <a:defRPr sz="1575" b="1"/>
+            <a:lvl4pPr marL="1728216" indent="0">
+              <a:buNone/>
+              <a:defRPr sz="2016" b="1"/>
             </a:lvl4pPr>
-            <a:lvl5pPr marL="1799905" indent="0">
-              <a:buNone/>
-              <a:defRPr sz="1575" b="1"/>
+            <a:lvl5pPr marL="2304288" indent="0">
+              <a:buNone/>
+              <a:defRPr sz="2016" b="1"/>
             </a:lvl5pPr>
-            <a:lvl6pPr marL="2249881" indent="0">
-              <a:buNone/>
-              <a:defRPr sz="1575" b="1"/>
+            <a:lvl6pPr marL="2880360" indent="0">
+              <a:buNone/>
+              <a:defRPr sz="2016" b="1"/>
             </a:lvl6pPr>
-            <a:lvl7pPr marL="2699857" indent="0">
-              <a:buNone/>
-              <a:defRPr sz="1575" b="1"/>
+            <a:lvl7pPr marL="3456432" indent="0">
+              <a:buNone/>
+              <a:defRPr sz="2016" b="1"/>
             </a:lvl7pPr>
-            <a:lvl8pPr marL="3149834" indent="0">
-              <a:buNone/>
-              <a:defRPr sz="1575" b="1"/>
+            <a:lvl8pPr marL="4032504" indent="0">
+              <a:buNone/>
+              <a:defRPr sz="2016" b="1"/>
             </a:lvl8pPr>
-            <a:lvl9pPr marL="3599810" indent="0">
-              <a:buNone/>
-              <a:defRPr sz="1575" b="1"/>
+            <a:lvl9pPr marL="4608576" indent="0">
+              <a:buNone/>
+              <a:defRPr sz="2016" b="1"/>
             </a:lvl9pPr>
           </a:lstStyle>
           <a:p>
@@ -1541,8 +1546,8 @@
         </p:nvSpPr>
         <p:spPr>
           <a:xfrm>
-            <a:off x="4556017" y="3156278"/>
-            <a:ext cx="3825976" cy="4642411"/>
+            <a:off x="6561178" y="3156278"/>
+            <a:ext cx="5509837" cy="4642411"/>
           </a:xfrm>
         </p:spPr>
         <p:txBody>
@@ -1603,7 +1608,7 @@
           <a:p>
             <a:fld id="{0234921A-2271-F649-B94C-D9F2E69CC631}" type="datetimeFigureOut">
               <a:rPr lang="en-US" smtClean="0"/>
-              <a:t>7/29/26</a:t>
+              <a:t>8/7/26</a:t>
             </a:fld>
             <a:endParaRPr lang="en-US"/>
           </a:p>
@@ -1654,7 +1659,7 @@
     </p:spTree>
     <p:extLst>
       <p:ext uri="{BB962C8B-B14F-4D97-AF65-F5344CB8AC3E}">
-        <p14:creationId xmlns:p14="http://schemas.microsoft.com/office/powerpoint/2010/main" val="3895059644"/>
+        <p14:creationId xmlns:p14="http://schemas.microsoft.com/office/powerpoint/2010/main" val="3530831745"/>
       </p:ext>
     </p:extLst>
   </p:cSld>
@@ -1721,7 +1726,7 @@
           <a:p>
             <a:fld id="{0234921A-2271-F649-B94C-D9F2E69CC631}" type="datetimeFigureOut">
               <a:rPr lang="en-US" smtClean="0"/>
-              <a:t>7/29/26</a:t>
+              <a:t>8/7/26</a:t>
             </a:fld>
             <a:endParaRPr lang="en-US"/>
           </a:p>
@@ -1772,7 +1777,7 @@
     </p:spTree>
     <p:extLst>
       <p:ext uri="{BB962C8B-B14F-4D97-AF65-F5344CB8AC3E}">
-        <p14:creationId xmlns:p14="http://schemas.microsoft.com/office/powerpoint/2010/main" val="802871680"/>
+        <p14:creationId xmlns:p14="http://schemas.microsoft.com/office/powerpoint/2010/main" val="1631356897"/>
       </p:ext>
     </p:extLst>
   </p:cSld>
@@ -1816,7 +1821,7 @@
           <a:p>
             <a:fld id="{0234921A-2271-F649-B94C-D9F2E69CC631}" type="datetimeFigureOut">
               <a:rPr lang="en-US" smtClean="0"/>
-              <a:t>7/29/26</a:t>
+              <a:t>8/7/26</a:t>
             </a:fld>
             <a:endParaRPr lang="en-US"/>
           </a:p>
@@ -1867,7 +1872,7 @@
     </p:spTree>
     <p:extLst>
       <p:ext uri="{BB962C8B-B14F-4D97-AF65-F5344CB8AC3E}">
-        <p14:creationId xmlns:p14="http://schemas.microsoft.com/office/powerpoint/2010/main" val="1517839034"/>
+        <p14:creationId xmlns:p14="http://schemas.microsoft.com/office/powerpoint/2010/main" val="384678101"/>
       </p:ext>
     </p:extLst>
   </p:cSld>
@@ -1906,15 +1911,15 @@
         </p:nvSpPr>
         <p:spPr>
           <a:xfrm>
-            <a:off x="619891" y="576051"/>
-            <a:ext cx="2902585" cy="2016178"/>
+            <a:off x="892712" y="576051"/>
+            <a:ext cx="4180050" cy="2016178"/>
           </a:xfrm>
         </p:spPr>
         <p:txBody>
           <a:bodyPr anchor="b"/>
           <a:lstStyle>
             <a:lvl1pPr>
-              <a:defRPr sz="3149"/>
+              <a:defRPr sz="4032"/>
             </a:lvl1pPr>
           </a:lstStyle>
           <a:p>
@@ -1938,39 +1943,39 @@
         </p:nvSpPr>
         <p:spPr>
           <a:xfrm>
-            <a:off x="3825976" y="1244112"/>
-            <a:ext cx="4556016" cy="6140542"/>
+            <a:off x="5509837" y="1244112"/>
+            <a:ext cx="6561177" cy="6140542"/>
           </a:xfrm>
         </p:spPr>
         <p:txBody>
           <a:bodyPr/>
           <a:lstStyle>
             <a:lvl1pPr>
-              <a:defRPr sz="3149"/>
+              <a:defRPr sz="4032"/>
             </a:lvl1pPr>
             <a:lvl2pPr>
-              <a:defRPr sz="2756"/>
+              <a:defRPr sz="3528"/>
             </a:lvl2pPr>
             <a:lvl3pPr>
-              <a:defRPr sz="2362"/>
+              <a:defRPr sz="3024"/>
             </a:lvl3pPr>
             <a:lvl4pPr>
-              <a:defRPr sz="1968"/>
+              <a:defRPr sz="2520"/>
             </a:lvl4pPr>
             <a:lvl5pPr>
-              <a:defRPr sz="1968"/>
+              <a:defRPr sz="2520"/>
             </a:lvl5pPr>
             <a:lvl6pPr>
-              <a:defRPr sz="1968"/>
+              <a:defRPr sz="2520"/>
             </a:lvl6pPr>
             <a:lvl7pPr>
-              <a:defRPr sz="1968"/>
+              <a:defRPr sz="2520"/>
             </a:lvl7pPr>
             <a:lvl8pPr>
-              <a:defRPr sz="1968"/>
+              <a:defRPr sz="2520"/>
             </a:lvl8pPr>
             <a:lvl9pPr>
-              <a:defRPr sz="1968"/>
+              <a:defRPr sz="2520"/>
             </a:lvl9pPr>
           </a:lstStyle>
           <a:p>
@@ -2023,8 +2028,8 @@
         </p:nvSpPr>
         <p:spPr>
           <a:xfrm>
-            <a:off x="619891" y="2592229"/>
-            <a:ext cx="2902585" cy="4802425"/>
+            <a:off x="892712" y="2592229"/>
+            <a:ext cx="4180050" cy="4802425"/>
           </a:xfrm>
         </p:spPr>
         <p:txBody>
@@ -2032,39 +2037,39 @@
           <a:lstStyle>
             <a:lvl1pPr marL="0" indent="0">
               <a:buNone/>
-              <a:defRPr sz="1575"/>
+              <a:defRPr sz="2016"/>
             </a:lvl1pPr>
-            <a:lvl2pPr marL="449976" indent="0">
-              <a:buNone/>
-              <a:defRPr sz="1378"/>
+            <a:lvl2pPr marL="576072" indent="0">
+              <a:buNone/>
+              <a:defRPr sz="1764"/>
             </a:lvl2pPr>
-            <a:lvl3pPr marL="899952" indent="0">
-              <a:buNone/>
-              <a:defRPr sz="1181"/>
+            <a:lvl3pPr marL="1152144" indent="0">
+              <a:buNone/>
+              <a:defRPr sz="1512"/>
             </a:lvl3pPr>
-            <a:lvl4pPr marL="1349929" indent="0">
-              <a:buNone/>
-              <a:defRPr sz="984"/>
+            <a:lvl4pPr marL="1728216" indent="0">
+              <a:buNone/>
+              <a:defRPr sz="1260"/>
             </a:lvl4pPr>
-            <a:lvl5pPr marL="1799905" indent="0">
-              <a:buNone/>
-              <a:defRPr sz="984"/>
+            <a:lvl5pPr marL="2304288" indent="0">
+              <a:buNone/>
+              <a:defRPr sz="1260"/>
             </a:lvl5pPr>
-            <a:lvl6pPr marL="2249881" indent="0">
-              <a:buNone/>
-              <a:defRPr sz="984"/>
+            <a:lvl6pPr marL="2880360" indent="0">
+              <a:buNone/>
+              <a:defRPr sz="1260"/>
             </a:lvl6pPr>
-            <a:lvl7pPr marL="2699857" indent="0">
-              <a:buNone/>
-              <a:defRPr sz="984"/>
+            <a:lvl7pPr marL="3456432" indent="0">
+              <a:buNone/>
+              <a:defRPr sz="1260"/>
             </a:lvl7pPr>
-            <a:lvl8pPr marL="3149834" indent="0">
-              <a:buNone/>
-              <a:defRPr sz="984"/>
+            <a:lvl8pPr marL="4032504" indent="0">
+              <a:buNone/>
+              <a:defRPr sz="1260"/>
             </a:lvl8pPr>
-            <a:lvl9pPr marL="3599810" indent="0">
-              <a:buNone/>
-              <a:defRPr sz="984"/>
+            <a:lvl9pPr marL="4608576" indent="0">
+              <a:buNone/>
+              <a:defRPr sz="1260"/>
             </a:lvl9pPr>
           </a:lstStyle>
           <a:p>
@@ -2093,7 +2098,7 @@
           <a:p>
             <a:fld id="{0234921A-2271-F649-B94C-D9F2E69CC631}" type="datetimeFigureOut">
               <a:rPr lang="en-US" smtClean="0"/>
-              <a:t>7/29/26</a:t>
+              <a:t>8/7/26</a:t>
             </a:fld>
             <a:endParaRPr lang="en-US"/>
           </a:p>
@@ -2144,7 +2149,7 @@
     </p:spTree>
     <p:extLst>
       <p:ext uri="{BB962C8B-B14F-4D97-AF65-F5344CB8AC3E}">
-        <p14:creationId xmlns:p14="http://schemas.microsoft.com/office/powerpoint/2010/main" val="2174862990"/>
+        <p14:creationId xmlns:p14="http://schemas.microsoft.com/office/powerpoint/2010/main" val="1845146963"/>
       </p:ext>
     </p:extLst>
   </p:cSld>
@@ -2183,15 +2188,15 @@
         </p:nvSpPr>
         <p:spPr>
           <a:xfrm>
-            <a:off x="619891" y="576051"/>
-            <a:ext cx="2902585" cy="2016178"/>
+            <a:off x="892712" y="576051"/>
+            <a:ext cx="4180050" cy="2016178"/>
           </a:xfrm>
         </p:spPr>
         <p:txBody>
           <a:bodyPr anchor="b"/>
           <a:lstStyle>
             <a:lvl1pPr>
-              <a:defRPr sz="3149"/>
+              <a:defRPr sz="4032"/>
             </a:lvl1pPr>
           </a:lstStyle>
           <a:p>
@@ -2215,8 +2220,8 @@
         </p:nvSpPr>
         <p:spPr>
           <a:xfrm>
-            <a:off x="3825976" y="1244112"/>
-            <a:ext cx="4556016" cy="6140542"/>
+            <a:off x="5509837" y="1244112"/>
+            <a:ext cx="6561177" cy="6140542"/>
           </a:xfrm>
         </p:spPr>
         <p:txBody>
@@ -2224,39 +2229,39 @@
           <a:lstStyle>
             <a:lvl1pPr marL="0" indent="0">
               <a:buNone/>
-              <a:defRPr sz="3149"/>
+              <a:defRPr sz="4032"/>
             </a:lvl1pPr>
-            <a:lvl2pPr marL="449976" indent="0">
-              <a:buNone/>
-              <a:defRPr sz="2756"/>
+            <a:lvl2pPr marL="576072" indent="0">
+              <a:buNone/>
+              <a:defRPr sz="3528"/>
             </a:lvl2pPr>
-            <a:lvl3pPr marL="899952" indent="0">
-              <a:buNone/>
-              <a:defRPr sz="2362"/>
+            <a:lvl3pPr marL="1152144" indent="0">
+              <a:buNone/>
+              <a:defRPr sz="3024"/>
             </a:lvl3pPr>
-            <a:lvl4pPr marL="1349929" indent="0">
-              <a:buNone/>
-              <a:defRPr sz="1968"/>
+            <a:lvl4pPr marL="1728216" indent="0">
+              <a:buNone/>
+              <a:defRPr sz="2520"/>
             </a:lvl4pPr>
-            <a:lvl5pPr marL="1799905" indent="0">
-              <a:buNone/>
-              <a:defRPr sz="1968"/>
+            <a:lvl5pPr marL="2304288" indent="0">
+              <a:buNone/>
+              <a:defRPr sz="2520"/>
             </a:lvl5pPr>
-            <a:lvl6pPr marL="2249881" indent="0">
-              <a:buNone/>
-              <a:defRPr sz="1968"/>
+            <a:lvl6pPr marL="2880360" indent="0">
+              <a:buNone/>
+              <a:defRPr sz="2520"/>
             </a:lvl6pPr>
-            <a:lvl7pPr marL="2699857" indent="0">
-              <a:buNone/>
-              <a:defRPr sz="1968"/>
+            <a:lvl7pPr marL="3456432" indent="0">
+              <a:buNone/>
+              <a:defRPr sz="2520"/>
             </a:lvl7pPr>
-            <a:lvl8pPr marL="3149834" indent="0">
-              <a:buNone/>
-              <a:defRPr sz="1968"/>
+            <a:lvl8pPr marL="4032504" indent="0">
+              <a:buNone/>
+              <a:defRPr sz="2520"/>
             </a:lvl8pPr>
-            <a:lvl9pPr marL="3599810" indent="0">
-              <a:buNone/>
-              <a:defRPr sz="1968"/>
+            <a:lvl9pPr marL="4608576" indent="0">
+              <a:buNone/>
+              <a:defRPr sz="2520"/>
             </a:lvl9pPr>
           </a:lstStyle>
           <a:p>
@@ -2280,8 +2285,8 @@
         </p:nvSpPr>
         <p:spPr>
           <a:xfrm>
-            <a:off x="619891" y="2592229"/>
-            <a:ext cx="2902585" cy="4802425"/>
+            <a:off x="892712" y="2592229"/>
+            <a:ext cx="4180050" cy="4802425"/>
           </a:xfrm>
         </p:spPr>
         <p:txBody>
@@ -2289,39 +2294,39 @@
           <a:lstStyle>
             <a:lvl1pPr marL="0" indent="0">
               <a:buNone/>
-              <a:defRPr sz="1575"/>
+              <a:defRPr sz="2016"/>
             </a:lvl1pPr>
-            <a:lvl2pPr marL="449976" indent="0">
-              <a:buNone/>
-              <a:defRPr sz="1378"/>
+            <a:lvl2pPr marL="576072" indent="0">
+              <a:buNone/>
+              <a:defRPr sz="1764"/>
             </a:lvl2pPr>
-            <a:lvl3pPr marL="899952" indent="0">
-              <a:buNone/>
-              <a:defRPr sz="1181"/>
+            <a:lvl3pPr marL="1152144" indent="0">
+              <a:buNone/>
+              <a:defRPr sz="1512"/>
             </a:lvl3pPr>
-            <a:lvl4pPr marL="1349929" indent="0">
-              <a:buNone/>
-              <a:defRPr sz="984"/>
+            <a:lvl4pPr marL="1728216" indent="0">
+              <a:buNone/>
+              <a:defRPr sz="1260"/>
             </a:lvl4pPr>
-            <a:lvl5pPr marL="1799905" indent="0">
-              <a:buNone/>
-              <a:defRPr sz="984"/>
+            <a:lvl5pPr marL="2304288" indent="0">
+              <a:buNone/>
+              <a:defRPr sz="1260"/>
             </a:lvl5pPr>
-            <a:lvl6pPr marL="2249881" indent="0">
-              <a:buNone/>
-              <a:defRPr sz="984"/>
+            <a:lvl6pPr marL="2880360" indent="0">
+              <a:buNone/>
+              <a:defRPr sz="1260"/>
             </a:lvl6pPr>
-            <a:lvl7pPr marL="2699857" indent="0">
-              <a:buNone/>
-              <a:defRPr sz="984"/>
+            <a:lvl7pPr marL="3456432" indent="0">
+              <a:buNone/>
+              <a:defRPr sz="1260"/>
             </a:lvl7pPr>
-            <a:lvl8pPr marL="3149834" indent="0">
-              <a:buNone/>
-              <a:defRPr sz="984"/>
+            <a:lvl8pPr marL="4032504" indent="0">
+              <a:buNone/>
+              <a:defRPr sz="1260"/>
             </a:lvl8pPr>
-            <a:lvl9pPr marL="3599810" indent="0">
-              <a:buNone/>
-              <a:defRPr sz="984"/>
+            <a:lvl9pPr marL="4608576" indent="0">
+              <a:buNone/>
+              <a:defRPr sz="1260"/>
             </a:lvl9pPr>
           </a:lstStyle>
           <a:p>
@@ -2350,7 +2355,7 @@
           <a:p>
             <a:fld id="{0234921A-2271-F649-B94C-D9F2E69CC631}" type="datetimeFigureOut">
               <a:rPr lang="en-US" smtClean="0"/>
-              <a:t>7/29/26</a:t>
+              <a:t>8/7/26</a:t>
             </a:fld>
             <a:endParaRPr lang="en-US"/>
           </a:p>
@@ -2401,7 +2406,7 @@
     </p:spTree>
     <p:extLst>
       <p:ext uri="{BB962C8B-B14F-4D97-AF65-F5344CB8AC3E}">
-        <p14:creationId xmlns:p14="http://schemas.microsoft.com/office/powerpoint/2010/main" val="1179698909"/>
+        <p14:creationId xmlns:p14="http://schemas.microsoft.com/office/powerpoint/2010/main" val="2394910052"/>
       </p:ext>
     </p:extLst>
   </p:cSld>
@@ -2445,8 +2450,8 @@
         </p:nvSpPr>
         <p:spPr>
           <a:xfrm>
-            <a:off x="618718" y="460043"/>
-            <a:ext cx="7762102" cy="1670148"/>
+            <a:off x="891024" y="460043"/>
+            <a:ext cx="11178302" cy="1670148"/>
           </a:xfrm>
           <a:prstGeom prst="rect">
             <a:avLst/>
@@ -2478,8 +2483,8 @@
         </p:nvSpPr>
         <p:spPr>
           <a:xfrm>
-            <a:off x="618718" y="2300203"/>
-            <a:ext cx="7762102" cy="5482485"/>
+            <a:off x="891024" y="2300203"/>
+            <a:ext cx="11178302" cy="5482485"/>
           </a:xfrm>
           <a:prstGeom prst="rect">
             <a:avLst/>
@@ -2540,8 +2545,8 @@
         </p:nvSpPr>
         <p:spPr>
           <a:xfrm>
-            <a:off x="618718" y="8008709"/>
-            <a:ext cx="2024896" cy="460041"/>
+            <a:off x="891024" y="8008709"/>
+            <a:ext cx="2916079" cy="460041"/>
           </a:xfrm>
           <a:prstGeom prst="rect">
             <a:avLst/>
@@ -2551,7 +2556,7 @@
           <a:bodyPr vert="horz" lIns="91440" tIns="45720" rIns="91440" bIns="45720" rtlCol="0" anchor="ctr"/>
           <a:lstStyle>
             <a:lvl1pPr algn="l">
-              <a:defRPr sz="1181">
+              <a:defRPr sz="1512">
                 <a:solidFill>
                   <a:schemeClr val="tx1">
                     <a:tint val="82000"/>
@@ -2563,7 +2568,7 @@
           <a:p>
             <a:fld id="{0234921A-2271-F649-B94C-D9F2E69CC631}" type="datetimeFigureOut">
               <a:rPr lang="en-US" smtClean="0"/>
-              <a:t>7/29/26</a:t>
+              <a:t>8/7/26</a:t>
             </a:fld>
             <a:endParaRPr lang="en-US"/>
           </a:p>
@@ -2581,8 +2586,8 @@
         </p:nvSpPr>
         <p:spPr>
           <a:xfrm>
-            <a:off x="2981097" y="8008709"/>
-            <a:ext cx="3037344" cy="460041"/>
+            <a:off x="4293116" y="8008709"/>
+            <a:ext cx="4374118" cy="460041"/>
           </a:xfrm>
           <a:prstGeom prst="rect">
             <a:avLst/>
@@ -2592,7 +2597,7 @@
           <a:bodyPr vert="horz" lIns="91440" tIns="45720" rIns="91440" bIns="45720" rtlCol="0" anchor="ctr"/>
           <a:lstStyle>
             <a:lvl1pPr algn="ctr">
-              <a:defRPr sz="1181">
+              <a:defRPr sz="1512">
                 <a:solidFill>
                   <a:schemeClr val="tx1">
                     <a:tint val="82000"/>
@@ -2618,8 +2623,8 @@
         </p:nvSpPr>
         <p:spPr>
           <a:xfrm>
-            <a:off x="6355924" y="8008709"/>
-            <a:ext cx="2024896" cy="460041"/>
+            <a:off x="9153247" y="8008709"/>
+            <a:ext cx="2916079" cy="460041"/>
           </a:xfrm>
           <a:prstGeom prst="rect">
             <a:avLst/>
@@ -2629,7 +2634,7 @@
           <a:bodyPr vert="horz" lIns="91440" tIns="45720" rIns="91440" bIns="45720" rtlCol="0" anchor="ctr"/>
           <a:lstStyle>
             <a:lvl1pPr algn="r">
-              <a:defRPr sz="1181">
+              <a:defRPr sz="1512">
                 <a:solidFill>
                   <a:schemeClr val="tx1">
                     <a:tint val="82000"/>
@@ -2650,27 +2655,27 @@
     </p:spTree>
     <p:extLst>
       <p:ext uri="{BB962C8B-B14F-4D97-AF65-F5344CB8AC3E}">
-        <p14:creationId xmlns:p14="http://schemas.microsoft.com/office/powerpoint/2010/main" val="1586213542"/>
+        <p14:creationId xmlns:p14="http://schemas.microsoft.com/office/powerpoint/2010/main" val="706348731"/>
       </p:ext>
     </p:extLst>
   </p:cSld>
   <p:clrMap bg1="lt1" tx1="dk1" bg2="lt2" tx2="dk2" accent1="accent1" accent2="accent2" accent3="accent3" accent4="accent4" accent5="accent5" accent6="accent6" hlink="hlink" folHlink="folHlink"/>
   <p:sldLayoutIdLst>
-    <p:sldLayoutId id="2147483709" r:id="rId1"/>
-    <p:sldLayoutId id="2147483710" r:id="rId2"/>
-    <p:sldLayoutId id="2147483711" r:id="rId3"/>
-    <p:sldLayoutId id="2147483712" r:id="rId4"/>
-    <p:sldLayoutId id="2147483713" r:id="rId5"/>
-    <p:sldLayoutId id="2147483714" r:id="rId6"/>
-    <p:sldLayoutId id="2147483715" r:id="rId7"/>
-    <p:sldLayoutId id="2147483716" r:id="rId8"/>
-    <p:sldLayoutId id="2147483717" r:id="rId9"/>
-    <p:sldLayoutId id="2147483718" r:id="rId10"/>
-    <p:sldLayoutId id="2147483719" r:id="rId11"/>
+    <p:sldLayoutId id="2147483721" r:id="rId1"/>
+    <p:sldLayoutId id="2147483722" r:id="rId2"/>
+    <p:sldLayoutId id="2147483723" r:id="rId3"/>
+    <p:sldLayoutId id="2147483724" r:id="rId4"/>
+    <p:sldLayoutId id="2147483725" r:id="rId5"/>
+    <p:sldLayoutId id="2147483726" r:id="rId6"/>
+    <p:sldLayoutId id="2147483727" r:id="rId7"/>
+    <p:sldLayoutId id="2147483728" r:id="rId8"/>
+    <p:sldLayoutId id="2147483729" r:id="rId9"/>
+    <p:sldLayoutId id="2147483730" r:id="rId10"/>
+    <p:sldLayoutId id="2147483731" r:id="rId11"/>
   </p:sldLayoutIdLst>
   <p:txStyles>
     <p:titleStyle>
-      <a:lvl1pPr algn="l" defTabSz="899952" rtl="0" eaLnBrk="1" latinLnBrk="0" hangingPunct="1">
+      <a:lvl1pPr algn="l" defTabSz="1152144" rtl="0" eaLnBrk="1" latinLnBrk="0" hangingPunct="1">
         <a:lnSpc>
           <a:spcPct val="90000"/>
         </a:lnSpc>
@@ -2678,7 +2683,7 @@
           <a:spcPct val="0"/>
         </a:spcBef>
         <a:buNone/>
-        <a:defRPr sz="4330" kern="1200">
+        <a:defRPr sz="5544" kern="1200">
           <a:solidFill>
             <a:schemeClr val="tx1"/>
           </a:solidFill>
@@ -2689,16 +2694,16 @@
       </a:lvl1pPr>
     </p:titleStyle>
     <p:bodyStyle>
-      <a:lvl1pPr marL="224988" indent="-224988" algn="l" defTabSz="899952" rtl="0" eaLnBrk="1" latinLnBrk="0" hangingPunct="1">
+      <a:lvl1pPr marL="288036" indent="-288036" algn="l" defTabSz="1152144" rtl="0" eaLnBrk="1" latinLnBrk="0" hangingPunct="1">
         <a:lnSpc>
           <a:spcPct val="90000"/>
         </a:lnSpc>
         <a:spcBef>
-          <a:spcPts val="984"/>
+          <a:spcPts val="1260"/>
         </a:spcBef>
         <a:buFont typeface="Arial" panose="020B0604020202020204" pitchFamily="34" charset="0"/>
         <a:buChar char="•"/>
-        <a:defRPr sz="2756" kern="1200">
+        <a:defRPr sz="3528" kern="1200">
           <a:solidFill>
             <a:schemeClr val="tx1"/>
           </a:solidFill>
@@ -2707,16 +2712,16 @@
           <a:cs typeface="+mn-cs"/>
         </a:defRPr>
       </a:lvl1pPr>
-      <a:lvl2pPr marL="674964" indent="-224988" algn="l" defTabSz="899952" rtl="0" eaLnBrk="1" latinLnBrk="0" hangingPunct="1">
+      <a:lvl2pPr marL="864108" indent="-288036" algn="l" defTabSz="1152144" rtl="0" eaLnBrk="1" latinLnBrk="0" hangingPunct="1">
         <a:lnSpc>
           <a:spcPct val="90000"/>
         </a:lnSpc>
         <a:spcBef>
-          <a:spcPts val="492"/>
+          <a:spcPts val="630"/>
         </a:spcBef>
         <a:buFont typeface="Arial" panose="020B0604020202020204" pitchFamily="34" charset="0"/>
         <a:buChar char="•"/>
-        <a:defRPr sz="2362" kern="1200">
+        <a:defRPr sz="3024" kern="1200">
           <a:solidFill>
             <a:schemeClr val="tx1"/>
           </a:solidFill>
@@ -2725,16 +2730,16 @@
           <a:cs typeface="+mn-cs"/>
         </a:defRPr>
       </a:lvl2pPr>
-      <a:lvl3pPr marL="1124941" indent="-224988" algn="l" defTabSz="899952" rtl="0" eaLnBrk="1" latinLnBrk="0" hangingPunct="1">
+      <a:lvl3pPr marL="1440180" indent="-288036" algn="l" defTabSz="1152144" rtl="0" eaLnBrk="1" latinLnBrk="0" hangingPunct="1">
         <a:lnSpc>
           <a:spcPct val="90000"/>
         </a:lnSpc>
         <a:spcBef>
-          <a:spcPts val="492"/>
+          <a:spcPts val="630"/>
         </a:spcBef>
         <a:buFont typeface="Arial" panose="020B0604020202020204" pitchFamily="34" charset="0"/>
         <a:buChar char="•"/>
-        <a:defRPr sz="1968" kern="1200">
+        <a:defRPr sz="2520" kern="1200">
           <a:solidFill>
             <a:schemeClr val="tx1"/>
           </a:solidFill>
@@ -2743,16 +2748,16 @@
           <a:cs typeface="+mn-cs"/>
         </a:defRPr>
       </a:lvl3pPr>
-      <a:lvl4pPr marL="1574917" indent="-224988" algn="l" defTabSz="899952" rtl="0" eaLnBrk="1" latinLnBrk="0" hangingPunct="1">
+      <a:lvl4pPr marL="2016252" indent="-288036" algn="l" defTabSz="1152144" rtl="0" eaLnBrk="1" latinLnBrk="0" hangingPunct="1">
         <a:lnSpc>
           <a:spcPct val="90000"/>
         </a:lnSpc>
         <a:spcBef>
-          <a:spcPts val="492"/>
+          <a:spcPts val="630"/>
         </a:spcBef>
         <a:buFont typeface="Arial" panose="020B0604020202020204" pitchFamily="34" charset="0"/>
         <a:buChar char="•"/>
-        <a:defRPr sz="1772" kern="1200">
+        <a:defRPr sz="2268" kern="1200">
           <a:solidFill>
             <a:schemeClr val="tx1"/>
           </a:solidFill>
@@ -2761,16 +2766,16 @@
           <a:cs typeface="+mn-cs"/>
         </a:defRPr>
       </a:lvl4pPr>
-      <a:lvl5pPr marL="2024893" indent="-224988" algn="l" defTabSz="899952" rtl="0" eaLnBrk="1" latinLnBrk="0" hangingPunct="1">
+      <a:lvl5pPr marL="2592324" indent="-288036" algn="l" defTabSz="1152144" rtl="0" eaLnBrk="1" latinLnBrk="0" hangingPunct="1">
         <a:lnSpc>
           <a:spcPct val="90000"/>
         </a:lnSpc>
         <a:spcBef>
-          <a:spcPts val="492"/>
+          <a:spcPts val="630"/>
         </a:spcBef>
         <a:buFont typeface="Arial" panose="020B0604020202020204" pitchFamily="34" charset="0"/>
         <a:buChar char="•"/>
-        <a:defRPr sz="1772" kern="1200">
+        <a:defRPr sz="2268" kern="1200">
           <a:solidFill>
             <a:schemeClr val="tx1"/>
           </a:solidFill>
@@ -2779,16 +2784,16 @@
           <a:cs typeface="+mn-cs"/>
         </a:defRPr>
       </a:lvl5pPr>
-      <a:lvl6pPr marL="2474869" indent="-224988" algn="l" defTabSz="899952" rtl="0" eaLnBrk="1" latinLnBrk="0" hangingPunct="1">
+      <a:lvl6pPr marL="3168396" indent="-288036" algn="l" defTabSz="1152144" rtl="0" eaLnBrk="1" latinLnBrk="0" hangingPunct="1">
         <a:lnSpc>
           <a:spcPct val="90000"/>
         </a:lnSpc>
         <a:spcBef>
-          <a:spcPts val="492"/>
+          <a:spcPts val="630"/>
         </a:spcBef>
         <a:buFont typeface="Arial" panose="020B0604020202020204" pitchFamily="34" charset="0"/>
         <a:buChar char="•"/>
-        <a:defRPr sz="1772" kern="1200">
+        <a:defRPr sz="2268" kern="1200">
           <a:solidFill>
             <a:schemeClr val="tx1"/>
           </a:solidFill>
@@ -2797,16 +2802,16 @@
           <a:cs typeface="+mn-cs"/>
         </a:defRPr>
       </a:lvl6pPr>
-      <a:lvl7pPr marL="2924846" indent="-224988" algn="l" defTabSz="899952" rtl="0" eaLnBrk="1" latinLnBrk="0" hangingPunct="1">
+      <a:lvl7pPr marL="3744468" indent="-288036" algn="l" defTabSz="1152144" rtl="0" eaLnBrk="1" latinLnBrk="0" hangingPunct="1">
         <a:lnSpc>
           <a:spcPct val="90000"/>
         </a:lnSpc>
         <a:spcBef>
-          <a:spcPts val="492"/>
+          <a:spcPts val="630"/>
         </a:spcBef>
         <a:buFont typeface="Arial" panose="020B0604020202020204" pitchFamily="34" charset="0"/>
         <a:buChar char="•"/>
-        <a:defRPr sz="1772" kern="1200">
+        <a:defRPr sz="2268" kern="1200">
           <a:solidFill>
             <a:schemeClr val="tx1"/>
           </a:solidFill>
@@ -2815,16 +2820,16 @@
           <a:cs typeface="+mn-cs"/>
         </a:defRPr>
       </a:lvl7pPr>
-      <a:lvl8pPr marL="3374822" indent="-224988" algn="l" defTabSz="899952" rtl="0" eaLnBrk="1" latinLnBrk="0" hangingPunct="1">
+      <a:lvl8pPr marL="4320540" indent="-288036" algn="l" defTabSz="1152144" rtl="0" eaLnBrk="1" latinLnBrk="0" hangingPunct="1">
         <a:lnSpc>
           <a:spcPct val="90000"/>
         </a:lnSpc>
         <a:spcBef>
-          <a:spcPts val="492"/>
+          <a:spcPts val="630"/>
         </a:spcBef>
         <a:buFont typeface="Arial" panose="020B0604020202020204" pitchFamily="34" charset="0"/>
         <a:buChar char="•"/>
-        <a:defRPr sz="1772" kern="1200">
+        <a:defRPr sz="2268" kern="1200">
           <a:solidFill>
             <a:schemeClr val="tx1"/>
           </a:solidFill>
@@ -2833,16 +2838,16 @@
           <a:cs typeface="+mn-cs"/>
         </a:defRPr>
       </a:lvl8pPr>
-      <a:lvl9pPr marL="3824798" indent="-224988" algn="l" defTabSz="899952" rtl="0" eaLnBrk="1" latinLnBrk="0" hangingPunct="1">
+      <a:lvl9pPr marL="4896612" indent="-288036" algn="l" defTabSz="1152144" rtl="0" eaLnBrk="1" latinLnBrk="0" hangingPunct="1">
         <a:lnSpc>
           <a:spcPct val="90000"/>
         </a:lnSpc>
         <a:spcBef>
-          <a:spcPts val="492"/>
+          <a:spcPts val="630"/>
         </a:spcBef>
         <a:buFont typeface="Arial" panose="020B0604020202020204" pitchFamily="34" charset="0"/>
         <a:buChar char="•"/>
-        <a:defRPr sz="1772" kern="1200">
+        <a:defRPr sz="2268" kern="1200">
           <a:solidFill>
             <a:schemeClr val="tx1"/>
           </a:solidFill>
@@ -2856,8 +2861,8 @@
       <a:defPPr>
         <a:defRPr lang="en-US"/>
       </a:defPPr>
-      <a:lvl1pPr marL="0" algn="l" defTabSz="899952" rtl="0" eaLnBrk="1" latinLnBrk="0" hangingPunct="1">
-        <a:defRPr sz="1772" kern="1200">
+      <a:lvl1pPr marL="0" algn="l" defTabSz="1152144" rtl="0" eaLnBrk="1" latinLnBrk="0" hangingPunct="1">
+        <a:defRPr sz="2268" kern="1200">
           <a:solidFill>
             <a:schemeClr val="tx1"/>
           </a:solidFill>
@@ -2866,8 +2871,8 @@
           <a:cs typeface="+mn-cs"/>
         </a:defRPr>
       </a:lvl1pPr>
-      <a:lvl2pPr marL="449976" algn="l" defTabSz="899952" rtl="0" eaLnBrk="1" latinLnBrk="0" hangingPunct="1">
-        <a:defRPr sz="1772" kern="1200">
+      <a:lvl2pPr marL="576072" algn="l" defTabSz="1152144" rtl="0" eaLnBrk="1" latinLnBrk="0" hangingPunct="1">
+        <a:defRPr sz="2268" kern="1200">
           <a:solidFill>
             <a:schemeClr val="tx1"/>
           </a:solidFill>
@@ -2876,8 +2881,8 @@
           <a:cs typeface="+mn-cs"/>
         </a:defRPr>
       </a:lvl2pPr>
-      <a:lvl3pPr marL="899952" algn="l" defTabSz="899952" rtl="0" eaLnBrk="1" latinLnBrk="0" hangingPunct="1">
-        <a:defRPr sz="1772" kern="1200">
+      <a:lvl3pPr marL="1152144" algn="l" defTabSz="1152144" rtl="0" eaLnBrk="1" latinLnBrk="0" hangingPunct="1">
+        <a:defRPr sz="2268" kern="1200">
           <a:solidFill>
             <a:schemeClr val="tx1"/>
           </a:solidFill>
@@ -2886,8 +2891,8 @@
           <a:cs typeface="+mn-cs"/>
         </a:defRPr>
       </a:lvl3pPr>
-      <a:lvl4pPr marL="1349929" algn="l" defTabSz="899952" rtl="0" eaLnBrk="1" latinLnBrk="0" hangingPunct="1">
-        <a:defRPr sz="1772" kern="1200">
+      <a:lvl4pPr marL="1728216" algn="l" defTabSz="1152144" rtl="0" eaLnBrk="1" latinLnBrk="0" hangingPunct="1">
+        <a:defRPr sz="2268" kern="1200">
           <a:solidFill>
             <a:schemeClr val="tx1"/>
           </a:solidFill>
@@ -2896,8 +2901,8 @@
           <a:cs typeface="+mn-cs"/>
         </a:defRPr>
       </a:lvl4pPr>
-      <a:lvl5pPr marL="1799905" algn="l" defTabSz="899952" rtl="0" eaLnBrk="1" latinLnBrk="0" hangingPunct="1">
-        <a:defRPr sz="1772" kern="1200">
+      <a:lvl5pPr marL="2304288" algn="l" defTabSz="1152144" rtl="0" eaLnBrk="1" latinLnBrk="0" hangingPunct="1">
+        <a:defRPr sz="2268" kern="1200">
           <a:solidFill>
             <a:schemeClr val="tx1"/>
           </a:solidFill>
@@ -2906,8 +2911,8 @@
           <a:cs typeface="+mn-cs"/>
         </a:defRPr>
       </a:lvl5pPr>
-      <a:lvl6pPr marL="2249881" algn="l" defTabSz="899952" rtl="0" eaLnBrk="1" latinLnBrk="0" hangingPunct="1">
-        <a:defRPr sz="1772" kern="1200">
+      <a:lvl6pPr marL="2880360" algn="l" defTabSz="1152144" rtl="0" eaLnBrk="1" latinLnBrk="0" hangingPunct="1">
+        <a:defRPr sz="2268" kern="1200">
           <a:solidFill>
             <a:schemeClr val="tx1"/>
           </a:solidFill>
@@ -2916,8 +2921,8 @@
           <a:cs typeface="+mn-cs"/>
         </a:defRPr>
       </a:lvl6pPr>
-      <a:lvl7pPr marL="2699857" algn="l" defTabSz="899952" rtl="0" eaLnBrk="1" latinLnBrk="0" hangingPunct="1">
-        <a:defRPr sz="1772" kern="1200">
+      <a:lvl7pPr marL="3456432" algn="l" defTabSz="1152144" rtl="0" eaLnBrk="1" latinLnBrk="0" hangingPunct="1">
+        <a:defRPr sz="2268" kern="1200">
           <a:solidFill>
             <a:schemeClr val="tx1"/>
           </a:solidFill>
@@ -2926,8 +2931,8 @@
           <a:cs typeface="+mn-cs"/>
         </a:defRPr>
       </a:lvl7pPr>
-      <a:lvl8pPr marL="3149834" algn="l" defTabSz="899952" rtl="0" eaLnBrk="1" latinLnBrk="0" hangingPunct="1">
-        <a:defRPr sz="1772" kern="1200">
+      <a:lvl8pPr marL="4032504" algn="l" defTabSz="1152144" rtl="0" eaLnBrk="1" latinLnBrk="0" hangingPunct="1">
+        <a:defRPr sz="2268" kern="1200">
           <a:solidFill>
             <a:schemeClr val="tx1"/>
           </a:solidFill>
@@ -2936,8 +2941,8 @@
           <a:cs typeface="+mn-cs"/>
         </a:defRPr>
       </a:lvl8pPr>
-      <a:lvl9pPr marL="3599810" algn="l" defTabSz="899952" rtl="0" eaLnBrk="1" latinLnBrk="0" hangingPunct="1">
-        <a:defRPr sz="1772" kern="1200">
+      <a:lvl9pPr marL="4608576" algn="l" defTabSz="1152144" rtl="0" eaLnBrk="1" latinLnBrk="0" hangingPunct="1">
+        <a:defRPr sz="2268" kern="1200">
           <a:solidFill>
             <a:schemeClr val="tx1"/>
           </a:solidFill>
@@ -2968,12 +2973,61 @@
           <a:chExt cx="0" cy="0"/>
         </a:xfrm>
       </p:grpSpPr>
+      <p:sp>
+        <p:nvSpPr>
+          <p:cNvPr id="14" name="Rectangle 13">
+            <a:extLst>
+              <a:ext uri="{FF2B5EF4-FFF2-40B4-BE49-F238E27FC236}">
+                <a16:creationId xmlns:a16="http://schemas.microsoft.com/office/drawing/2014/main" id="{49301E68-2658-FC28-9ED9-D6061D4528E1}"/>
+              </a:ext>
+            </a:extLst>
+          </p:cNvPr>
+          <p:cNvSpPr/>
+          <p:nvPr/>
+        </p:nvSpPr>
+        <p:spPr>
+          <a:xfrm>
+            <a:off x="645459" y="472738"/>
+            <a:ext cx="11833412" cy="2337697"/>
+          </a:xfrm>
+          <a:prstGeom prst="rect">
+            <a:avLst/>
+          </a:prstGeom>
+          <a:solidFill>
+            <a:schemeClr val="bg1"/>
+          </a:solidFill>
+        </p:spPr>
+        <p:style>
+          <a:lnRef idx="2">
+            <a:schemeClr val="accent1">
+              <a:shade val="15000"/>
+            </a:schemeClr>
+          </a:lnRef>
+          <a:fillRef idx="1">
+            <a:schemeClr val="accent1"/>
+          </a:fillRef>
+          <a:effectRef idx="0">
+            <a:schemeClr val="accent1"/>
+          </a:effectRef>
+          <a:fontRef idx="minor">
+            <a:schemeClr val="lt1"/>
+          </a:fontRef>
+        </p:style>
+        <p:txBody>
+          <a:bodyPr rtlCol="0" anchor="ctr"/>
+          <a:lstStyle/>
+          <a:p>
+            <a:pPr algn="ctr"/>
+            <a:endParaRPr lang="en-US"/>
+          </a:p>
+        </p:txBody>
+      </p:sp>
       <p:pic>
         <p:nvPicPr>
-          <p:cNvPr id="27" name="Picture 26">
+          <p:cNvPr id="2" name="Picture 1">
             <a:extLst>
               <a:ext uri="{FF2B5EF4-FFF2-40B4-BE49-F238E27FC236}">
-                <a16:creationId xmlns:a16="http://schemas.microsoft.com/office/drawing/2014/main" id="{8771815F-6A10-F511-1657-1C23738A1401}"/>
+                <a16:creationId xmlns:a16="http://schemas.microsoft.com/office/drawing/2014/main" id="{106D20F2-029E-DCFC-22C3-D28BB1D03C9D}"/>
               </a:ext>
             </a:extLst>
           </p:cNvPr>
@@ -2990,7 +3044,7 @@
         </p:blipFill>
         <p:spPr>
           <a:xfrm>
-            <a:off x="312204" y="29817"/>
+            <a:off x="283714" y="3088114"/>
             <a:ext cx="4244546" cy="2829697"/>
           </a:xfrm>
           <a:prstGeom prst="rect">
@@ -3000,10 +3054,10 @@
       </p:pic>
       <p:pic>
         <p:nvPicPr>
-          <p:cNvPr id="28" name="Picture 27">
+          <p:cNvPr id="3" name="Picture 2">
             <a:extLst>
               <a:ext uri="{FF2B5EF4-FFF2-40B4-BE49-F238E27FC236}">
-                <a16:creationId xmlns:a16="http://schemas.microsoft.com/office/drawing/2014/main" id="{A5FF01BD-BD02-5E40-297D-A5BFA1475F9B}"/>
+                <a16:creationId xmlns:a16="http://schemas.microsoft.com/office/drawing/2014/main" id="{520AB600-93FB-DCD6-2AD8-6FFF6C580DDA}"/>
               </a:ext>
             </a:extLst>
           </p:cNvPr>
@@ -3020,7 +3074,7 @@
         </p:blipFill>
         <p:spPr>
           <a:xfrm>
-            <a:off x="4556751" y="29817"/>
+            <a:off x="4613731" y="3032531"/>
             <a:ext cx="4244546" cy="2829697"/>
           </a:xfrm>
           <a:prstGeom prst="rect">
@@ -3030,10 +3084,10 @@
       </p:pic>
       <p:pic>
         <p:nvPicPr>
-          <p:cNvPr id="29" name="Picture 28">
+          <p:cNvPr id="4" name="Picture 3">
             <a:extLst>
               <a:ext uri="{FF2B5EF4-FFF2-40B4-BE49-F238E27FC236}">
-                <a16:creationId xmlns:a16="http://schemas.microsoft.com/office/drawing/2014/main" id="{3E72F069-27A7-EF88-AC72-C5E4B2D8C053}"/>
+                <a16:creationId xmlns:a16="http://schemas.microsoft.com/office/drawing/2014/main" id="{58282DE1-B4F2-5BA8-4C69-9CA0E7916BDF}"/>
               </a:ext>
             </a:extLst>
           </p:cNvPr>
@@ -3050,7 +3104,7 @@
         </p:blipFill>
         <p:spPr>
           <a:xfrm>
-            <a:off x="312204" y="2859514"/>
+            <a:off x="8801296" y="3088114"/>
             <a:ext cx="4244546" cy="2829697"/>
           </a:xfrm>
           <a:prstGeom prst="rect">
@@ -3060,10 +3114,10 @@
       </p:pic>
       <p:pic>
         <p:nvPicPr>
-          <p:cNvPr id="30" name="Picture 29">
+          <p:cNvPr id="5" name="Picture 4">
             <a:extLst>
               <a:ext uri="{FF2B5EF4-FFF2-40B4-BE49-F238E27FC236}">
-                <a16:creationId xmlns:a16="http://schemas.microsoft.com/office/drawing/2014/main" id="{54F8FEAC-953B-EF98-FAF6-F839C74EBD64}"/>
+                <a16:creationId xmlns:a16="http://schemas.microsoft.com/office/drawing/2014/main" id="{A9A55AB3-D076-2483-B832-4A77F7CAB00C}"/>
               </a:ext>
             </a:extLst>
           </p:cNvPr>
@@ -3080,7 +3134,7 @@
         </p:blipFill>
         <p:spPr>
           <a:xfrm>
-            <a:off x="4499769" y="2920441"/>
+            <a:off x="312204" y="5811066"/>
             <a:ext cx="4244546" cy="2829697"/>
           </a:xfrm>
           <a:prstGeom prst="rect">
@@ -3090,10 +3144,10 @@
       </p:pic>
       <p:pic>
         <p:nvPicPr>
-          <p:cNvPr id="31" name="Picture 30">
+          <p:cNvPr id="6" name="Picture 5">
             <a:extLst>
               <a:ext uri="{FF2B5EF4-FFF2-40B4-BE49-F238E27FC236}">
-                <a16:creationId xmlns:a16="http://schemas.microsoft.com/office/drawing/2014/main" id="{31B42E51-A32D-F1C4-0995-58B4049217C7}"/>
+                <a16:creationId xmlns:a16="http://schemas.microsoft.com/office/drawing/2014/main" id="{322755DE-40EC-46E2-6F43-00D4DAF66F29}"/>
               </a:ext>
             </a:extLst>
           </p:cNvPr>
@@ -3110,7 +3164,7 @@
         </p:blipFill>
         <p:spPr>
           <a:xfrm>
-            <a:off x="312204" y="5811066"/>
+            <a:off x="4613731" y="5811065"/>
             <a:ext cx="4244546" cy="2829697"/>
           </a:xfrm>
           <a:prstGeom prst="rect">
@@ -3118,6 +3172,445 @@
           </a:prstGeom>
         </p:spPr>
       </p:pic>
+      <p:pic>
+        <p:nvPicPr>
+          <p:cNvPr id="7" name="Picture 6" descr="A diagram of a line and a line&#10;&#10;AI-generated content may be incorrect.">
+            <a:extLst>
+              <a:ext uri="{FF2B5EF4-FFF2-40B4-BE49-F238E27FC236}">
+                <a16:creationId xmlns:a16="http://schemas.microsoft.com/office/drawing/2014/main" id="{8C3ED990-5567-7F3C-6167-016C1DA1BF6D}"/>
+              </a:ext>
+            </a:extLst>
+          </p:cNvPr>
+          <p:cNvPicPr>
+            <a:picLocks noChangeAspect="1"/>
+          </p:cNvPicPr>
+          <p:nvPr/>
+        </p:nvPicPr>
+        <p:blipFill>
+          <a:blip r:embed="rId7"/>
+          <a:stretch>
+            <a:fillRect/>
+          </a:stretch>
+        </p:blipFill>
+        <p:spPr>
+          <a:xfrm>
+            <a:off x="1315144" y="503035"/>
+            <a:ext cx="1079500" cy="1079500"/>
+          </a:xfrm>
+          <a:prstGeom prst="rect">
+            <a:avLst/>
+          </a:prstGeom>
+        </p:spPr>
+      </p:pic>
+      <p:pic>
+        <p:nvPicPr>
+          <p:cNvPr id="8" name="Picture 7" descr="A diagram of a line with arrows&#10;&#10;AI-generated content may be incorrect.">
+            <a:extLst>
+              <a:ext uri="{FF2B5EF4-FFF2-40B4-BE49-F238E27FC236}">
+                <a16:creationId xmlns:a16="http://schemas.microsoft.com/office/drawing/2014/main" id="{D099AF8A-124C-4A43-5966-BF4CEBE4EECA}"/>
+              </a:ext>
+            </a:extLst>
+          </p:cNvPr>
+          <p:cNvPicPr>
+            <a:picLocks noChangeAspect="1"/>
+          </p:cNvPicPr>
+          <p:nvPr/>
+        </p:nvPicPr>
+        <p:blipFill>
+          <a:blip r:embed="rId8"/>
+          <a:stretch>
+            <a:fillRect/>
+          </a:stretch>
+        </p:blipFill>
+        <p:spPr>
+          <a:xfrm>
+            <a:off x="2835190" y="499076"/>
+            <a:ext cx="1079500" cy="1079500"/>
+          </a:xfrm>
+          <a:prstGeom prst="rect">
+            <a:avLst/>
+          </a:prstGeom>
+        </p:spPr>
+      </p:pic>
+      <p:pic>
+        <p:nvPicPr>
+          <p:cNvPr id="9" name="Picture 8" descr="A diagram of a line with arrows&#10;&#10;AI-generated content may be incorrect.">
+            <a:extLst>
+              <a:ext uri="{FF2B5EF4-FFF2-40B4-BE49-F238E27FC236}">
+                <a16:creationId xmlns:a16="http://schemas.microsoft.com/office/drawing/2014/main" id="{8355A04D-36E1-D59D-C042-1EEB57D5B306}"/>
+              </a:ext>
+            </a:extLst>
+          </p:cNvPr>
+          <p:cNvPicPr>
+            <a:picLocks noChangeAspect="1"/>
+          </p:cNvPicPr>
+          <p:nvPr/>
+        </p:nvPicPr>
+        <p:blipFill>
+          <a:blip r:embed="rId9"/>
+          <a:stretch>
+            <a:fillRect/>
+          </a:stretch>
+        </p:blipFill>
+        <p:spPr>
+          <a:xfrm>
+            <a:off x="4641824" y="499076"/>
+            <a:ext cx="1079500" cy="1079500"/>
+          </a:xfrm>
+          <a:prstGeom prst="rect">
+            <a:avLst/>
+          </a:prstGeom>
+        </p:spPr>
+      </p:pic>
+      <p:pic>
+        <p:nvPicPr>
+          <p:cNvPr id="10" name="Picture 9" descr="A diagram of a square with arrows&#10;&#10;AI-generated content may be incorrect.">
+            <a:extLst>
+              <a:ext uri="{FF2B5EF4-FFF2-40B4-BE49-F238E27FC236}">
+                <a16:creationId xmlns:a16="http://schemas.microsoft.com/office/drawing/2014/main" id="{E243F042-E1F9-8571-3369-C2788C5EFBAE}"/>
+              </a:ext>
+            </a:extLst>
+          </p:cNvPr>
+          <p:cNvPicPr>
+            <a:picLocks noChangeAspect="1"/>
+          </p:cNvPicPr>
+          <p:nvPr/>
+        </p:nvPicPr>
+        <p:blipFill>
+          <a:blip r:embed="rId10"/>
+          <a:stretch>
+            <a:fillRect/>
+          </a:stretch>
+        </p:blipFill>
+        <p:spPr>
+          <a:xfrm>
+            <a:off x="6448458" y="499076"/>
+            <a:ext cx="1079500" cy="1079500"/>
+          </a:xfrm>
+          <a:prstGeom prst="rect">
+            <a:avLst/>
+          </a:prstGeom>
+        </p:spPr>
+      </p:pic>
+      <p:pic>
+        <p:nvPicPr>
+          <p:cNvPr id="11" name="Picture 10" descr="A diagram of a line with arrows&#10;&#10;AI-generated content may be incorrect.">
+            <a:extLst>
+              <a:ext uri="{FF2B5EF4-FFF2-40B4-BE49-F238E27FC236}">
+                <a16:creationId xmlns:a16="http://schemas.microsoft.com/office/drawing/2014/main" id="{F0220976-C054-57B3-B203-A33D55E7E2DE}"/>
+              </a:ext>
+            </a:extLst>
+          </p:cNvPr>
+          <p:cNvPicPr>
+            <a:picLocks noChangeAspect="1"/>
+          </p:cNvPicPr>
+          <p:nvPr/>
+        </p:nvPicPr>
+        <p:blipFill>
+          <a:blip r:embed="rId11"/>
+          <a:stretch>
+            <a:fillRect/>
+          </a:stretch>
+        </p:blipFill>
+        <p:spPr>
+          <a:xfrm>
+            <a:off x="8255092" y="499076"/>
+            <a:ext cx="1079500" cy="1079500"/>
+          </a:xfrm>
+          <a:prstGeom prst="rect">
+            <a:avLst/>
+          </a:prstGeom>
+        </p:spPr>
+      </p:pic>
+      <p:sp>
+        <p:nvSpPr>
+          <p:cNvPr id="13" name="TextBox 12">
+            <a:extLst>
+              <a:ext uri="{FF2B5EF4-FFF2-40B4-BE49-F238E27FC236}">
+                <a16:creationId xmlns:a16="http://schemas.microsoft.com/office/drawing/2014/main" id="{6E411B07-FD69-DE7E-6D2B-5375FD1890EB}"/>
+              </a:ext>
+            </a:extLst>
+          </p:cNvPr>
+          <p:cNvSpPr txBox="1"/>
+          <p:nvPr/>
+        </p:nvSpPr>
+        <p:spPr>
+          <a:xfrm>
+            <a:off x="874597" y="1592023"/>
+            <a:ext cx="11232302" cy="1384995"/>
+          </a:xfrm>
+          <a:prstGeom prst="rect">
+            <a:avLst/>
+          </a:prstGeom>
+          <a:noFill/>
+        </p:spPr>
+        <p:txBody>
+          <a:bodyPr wrap="square">
+            <a:spAutoFit/>
+          </a:bodyPr>
+          <a:lstStyle/>
+          <a:p>
+            <a:pPr marL="285750" lvl="2" indent="-285750">
+              <a:buFont typeface="Arial" panose="020B0604020202020204" pitchFamily="34" charset="0"/>
+              <a:buChar char="•"/>
+            </a:pPr>
+            <a:r>
+              <a:rPr lang="en-CA" sz="1400" b="1" dirty="0"/>
+              <a:t>Category 1</a:t>
+            </a:r>
+            <a:r>
+              <a:rPr lang="en-CA" sz="1400" dirty="0"/>
+              <a:t>: tumour growth </a:t>
+            </a:r>
+            <a:r>
+              <a:rPr lang="en-CA" sz="1400" b="1" dirty="0"/>
+              <a:t>similar to control</a:t>
+            </a:r>
+            <a:r>
+              <a:rPr lang="en-CA" sz="1400" dirty="0"/>
+              <a:t>.</a:t>
+            </a:r>
+          </a:p>
+          <a:p>
+            <a:pPr marL="285750" lvl="2" indent="-285750">
+              <a:buFont typeface="Arial" panose="020B0604020202020204" pitchFamily="34" charset="0"/>
+              <a:buChar char="•"/>
+            </a:pPr>
+            <a:r>
+              <a:rPr lang="en-CA" sz="1400" b="1" dirty="0"/>
+              <a:t>Category 2</a:t>
+            </a:r>
+            <a:r>
+              <a:rPr lang="en-CA" sz="1400" dirty="0"/>
+              <a:t>: tumour growth is </a:t>
+            </a:r>
+            <a:r>
+              <a:rPr lang="en-CA" sz="1400" b="1" dirty="0"/>
+              <a:t>inhibited compared to control</a:t>
+            </a:r>
+            <a:r>
+              <a:rPr lang="en-CA" sz="1400" dirty="0"/>
+              <a:t>, but tumour is still </a:t>
+            </a:r>
+            <a:r>
+              <a:rPr lang="en-CA" sz="1400" b="1" dirty="0"/>
+              <a:t>enlarging</a:t>
+            </a:r>
+            <a:r>
+              <a:rPr lang="en-CA" sz="1400" dirty="0"/>
+              <a:t> compared to time 0.</a:t>
+            </a:r>
+          </a:p>
+          <a:p>
+            <a:pPr marL="285750" lvl="2" indent="-285750">
+              <a:buFont typeface="Arial" panose="020B0604020202020204" pitchFamily="34" charset="0"/>
+              <a:buChar char="•"/>
+            </a:pPr>
+            <a:r>
+              <a:rPr lang="en-CA" sz="1400" b="1" dirty="0"/>
+              <a:t>Category 3</a:t>
+            </a:r>
+            <a:r>
+              <a:rPr lang="en-CA" sz="1400" dirty="0"/>
+              <a:t>: tumour growth is </a:t>
+            </a:r>
+            <a:r>
+              <a:rPr lang="en-CA" sz="1400" b="1" dirty="0"/>
+              <a:t>inhibited compared to control</a:t>
+            </a:r>
+            <a:r>
+              <a:rPr lang="en-CA" sz="1400" dirty="0"/>
+              <a:t>, and tumour volume stays </a:t>
+            </a:r>
+            <a:r>
+              <a:rPr lang="en-CA" sz="1400" b="1" dirty="0"/>
+              <a:t>stable</a:t>
+            </a:r>
+            <a:r>
+              <a:rPr lang="en-CA" sz="1400" dirty="0"/>
+              <a:t>.</a:t>
+            </a:r>
+          </a:p>
+          <a:p>
+            <a:pPr marL="285750" lvl="2" indent="-285750">
+              <a:buFont typeface="Arial" panose="020B0604020202020204" pitchFamily="34" charset="0"/>
+              <a:buChar char="•"/>
+            </a:pPr>
+            <a:r>
+              <a:rPr lang="en-CA" sz="1400" b="1" dirty="0"/>
+              <a:t>Category 4</a:t>
+            </a:r>
+            <a:r>
+              <a:rPr lang="en-CA" sz="1400" dirty="0"/>
+              <a:t>: tumour growth is </a:t>
+            </a:r>
+            <a:r>
+              <a:rPr lang="en-CA" sz="1400" b="1" dirty="0"/>
+              <a:t>inhibited compared to control</a:t>
+            </a:r>
+            <a:r>
+              <a:rPr lang="en-CA" sz="1400" dirty="0"/>
+              <a:t>, and tumour volume is </a:t>
+            </a:r>
+            <a:r>
+              <a:rPr lang="en-CA" sz="1400" b="1" dirty="0"/>
+              <a:t>shrinking</a:t>
+            </a:r>
+            <a:r>
+              <a:rPr lang="en-CA" sz="1400" dirty="0"/>
+              <a:t>.</a:t>
+            </a:r>
+          </a:p>
+          <a:p>
+            <a:pPr marL="285750" lvl="2" indent="-285750">
+              <a:buFont typeface="Arial" panose="020B0604020202020204" pitchFamily="34" charset="0"/>
+              <a:buChar char="•"/>
+            </a:pPr>
+            <a:r>
+              <a:rPr lang="en-CA" sz="1400" b="1" dirty="0"/>
+              <a:t>Category 5</a:t>
+            </a:r>
+            <a:r>
+              <a:rPr lang="en-CA" sz="1400" dirty="0"/>
+              <a:t>: tumour growth is </a:t>
+            </a:r>
+            <a:r>
+              <a:rPr lang="en-CA" sz="1400" b="1" dirty="0"/>
+              <a:t>inhibited compared to control</a:t>
+            </a:r>
+            <a:r>
+              <a:rPr lang="en-CA" sz="1400" dirty="0"/>
+              <a:t>, and tumour </a:t>
+            </a:r>
+            <a:r>
+              <a:rPr lang="en-CA" sz="1400" b="1" dirty="0"/>
+              <a:t>disappeared</a:t>
+            </a:r>
+            <a:r>
+              <a:rPr lang="en-CA" sz="1400" dirty="0"/>
+              <a:t> during treatment.</a:t>
+            </a:r>
+            <a:br>
+              <a:rPr lang="en-CA" sz="1400" dirty="0"/>
+            </a:br>
+            <a:endParaRPr lang="en-US" sz="1400" dirty="0"/>
+          </a:p>
+        </p:txBody>
+      </p:sp>
+      <p:sp>
+        <p:nvSpPr>
+          <p:cNvPr id="15" name="TextBox 14">
+            <a:extLst>
+              <a:ext uri="{FF2B5EF4-FFF2-40B4-BE49-F238E27FC236}">
+                <a16:creationId xmlns:a16="http://schemas.microsoft.com/office/drawing/2014/main" id="{B5381927-DCEA-91BA-B0D1-9518DE6D9AC6}"/>
+              </a:ext>
+            </a:extLst>
+          </p:cNvPr>
+          <p:cNvSpPr txBox="1"/>
+          <p:nvPr/>
+        </p:nvSpPr>
+        <p:spPr>
+          <a:xfrm>
+            <a:off x="103436" y="3031498"/>
+            <a:ext cx="645459" cy="369332"/>
+          </a:xfrm>
+          <a:prstGeom prst="rect">
+            <a:avLst/>
+          </a:prstGeom>
+          <a:noFill/>
+        </p:spPr>
+        <p:txBody>
+          <a:bodyPr wrap="square" rtlCol="0">
+            <a:spAutoFit/>
+          </a:bodyPr>
+          <a:lstStyle/>
+          <a:p>
+            <a:r>
+              <a:rPr lang="en-US" dirty="0"/>
+              <a:t>b</a:t>
+            </a:r>
+          </a:p>
+        </p:txBody>
+      </p:sp>
+      <p:sp>
+        <p:nvSpPr>
+          <p:cNvPr id="16" name="TextBox 15">
+            <a:extLst>
+              <a:ext uri="{FF2B5EF4-FFF2-40B4-BE49-F238E27FC236}">
+                <a16:creationId xmlns:a16="http://schemas.microsoft.com/office/drawing/2014/main" id="{6C4B2921-2C22-BC2E-39D8-F901E91E7B0A}"/>
+              </a:ext>
+            </a:extLst>
+          </p:cNvPr>
+          <p:cNvSpPr txBox="1"/>
+          <p:nvPr/>
+        </p:nvSpPr>
+        <p:spPr>
+          <a:xfrm>
+            <a:off x="51718" y="-7125"/>
+            <a:ext cx="645459" cy="369332"/>
+          </a:xfrm>
+          <a:prstGeom prst="rect">
+            <a:avLst/>
+          </a:prstGeom>
+          <a:noFill/>
+        </p:spPr>
+        <p:txBody>
+          <a:bodyPr wrap="square" rtlCol="0">
+            <a:spAutoFit/>
+          </a:bodyPr>
+          <a:lstStyle/>
+          <a:p>
+            <a:r>
+              <a:rPr lang="en-US" dirty="0"/>
+              <a:t>a</a:t>
+            </a:r>
+          </a:p>
+        </p:txBody>
+      </p:sp>
+      <p:sp>
+        <p:nvSpPr>
+          <p:cNvPr id="17" name="TextBox 16">
+            <a:extLst>
+              <a:ext uri="{FF2B5EF4-FFF2-40B4-BE49-F238E27FC236}">
+                <a16:creationId xmlns:a16="http://schemas.microsoft.com/office/drawing/2014/main" id="{7A9C7928-EA86-7768-97ED-E355E65B01FE}"/>
+              </a:ext>
+            </a:extLst>
+          </p:cNvPr>
+          <p:cNvSpPr txBox="1"/>
+          <p:nvPr/>
+        </p:nvSpPr>
+        <p:spPr>
+          <a:xfrm>
+            <a:off x="748895" y="107576"/>
+            <a:ext cx="9134693" cy="369332"/>
+          </a:xfrm>
+          <a:prstGeom prst="rect">
+            <a:avLst/>
+          </a:prstGeom>
+          <a:noFill/>
+        </p:spPr>
+        <p:txBody>
+          <a:bodyPr wrap="square" rtlCol="0">
+            <a:spAutoFit/>
+          </a:bodyPr>
+          <a:lstStyle/>
+          <a:p>
+            <a:r>
+              <a:rPr lang="en-US"/>
+              <a:t>Drug sensitivity categorization criteria </a:t>
+            </a:r>
+            <a:r>
+              <a:rPr lang="en-US" dirty="0"/>
+              <a:t>p</a:t>
+            </a:r>
+            <a:r>
+              <a:rPr lang="en-US"/>
+              <a:t>rovided to panel of experts </a:t>
+            </a:r>
+            <a:endParaRPr lang="en-US" dirty="0"/>
+          </a:p>
+        </p:txBody>
+      </p:sp>
     </p:spTree>
     <p:extLst>
       <p:ext uri="{BB962C8B-B14F-4D97-AF65-F5344CB8AC3E}">

--- a/figures/Supplemental_Figures/Supp_Figure2_case2.pptx
+++ b/figures/Supplemental_Figures/Supp_Figure2_case2.pptx
@@ -2,12 +2,12 @@
 <file path=ppt/presentation.xml><?xml version="1.0" encoding="utf-8"?>
 <p:presentation xmlns:a="http://schemas.openxmlformats.org/drawingml/2006/main" xmlns:r="http://schemas.openxmlformats.org/officeDocument/2006/relationships" xmlns:p="http://schemas.openxmlformats.org/presentationml/2006/main" saveSubsetFonts="1" autoCompressPictures="0">
   <p:sldMasterIdLst>
-    <p:sldMasterId id="2147483720" r:id="rId1"/>
+    <p:sldMasterId id="2147483732" r:id="rId1"/>
   </p:sldMasterIdLst>
   <p:sldIdLst>
     <p:sldId id="256" r:id="rId2"/>
   </p:sldIdLst>
-  <p:sldSz cx="12960350" cy="8640763"/>
+  <p:sldSz cx="6858000" cy="9144000" type="letter"/>
   <p:notesSz cx="6858000" cy="9144000"/>
   <p:defaultTextStyle>
     <a:defPPr>
@@ -141,15 +141,15 @@
         </p:nvSpPr>
         <p:spPr>
           <a:xfrm>
-            <a:off x="972026" y="1414125"/>
-            <a:ext cx="11016298" cy="3008266"/>
+            <a:off x="514350" y="1496484"/>
+            <a:ext cx="5829300" cy="3183467"/>
           </a:xfrm>
         </p:spPr>
         <p:txBody>
           <a:bodyPr anchor="b"/>
           <a:lstStyle>
             <a:lvl1pPr algn="ctr">
-              <a:defRPr sz="7560"/>
+              <a:defRPr sz="4500"/>
             </a:lvl1pPr>
           </a:lstStyle>
           <a:p>
@@ -173,8 +173,8 @@
         </p:nvSpPr>
         <p:spPr>
           <a:xfrm>
-            <a:off x="1620044" y="4538401"/>
-            <a:ext cx="9720263" cy="2086184"/>
+            <a:off x="857250" y="4802717"/>
+            <a:ext cx="5143500" cy="2207683"/>
           </a:xfrm>
         </p:spPr>
         <p:txBody>
@@ -182,39 +182,39 @@
           <a:lstStyle>
             <a:lvl1pPr marL="0" indent="0" algn="ctr">
               <a:buNone/>
-              <a:defRPr sz="3024"/>
+              <a:defRPr sz="1800"/>
             </a:lvl1pPr>
-            <a:lvl2pPr marL="576072" indent="0" algn="ctr">
-              <a:buNone/>
-              <a:defRPr sz="2520"/>
+            <a:lvl2pPr marL="342900" indent="0" algn="ctr">
+              <a:buNone/>
+              <a:defRPr sz="1500"/>
             </a:lvl2pPr>
-            <a:lvl3pPr marL="1152144" indent="0" algn="ctr">
-              <a:buNone/>
-              <a:defRPr sz="2268"/>
+            <a:lvl3pPr marL="685800" indent="0" algn="ctr">
+              <a:buNone/>
+              <a:defRPr sz="1350"/>
             </a:lvl3pPr>
-            <a:lvl4pPr marL="1728216" indent="0" algn="ctr">
-              <a:buNone/>
-              <a:defRPr sz="2016"/>
+            <a:lvl4pPr marL="1028700" indent="0" algn="ctr">
+              <a:buNone/>
+              <a:defRPr sz="1200"/>
             </a:lvl4pPr>
-            <a:lvl5pPr marL="2304288" indent="0" algn="ctr">
-              <a:buNone/>
-              <a:defRPr sz="2016"/>
+            <a:lvl5pPr marL="1371600" indent="0" algn="ctr">
+              <a:buNone/>
+              <a:defRPr sz="1200"/>
             </a:lvl5pPr>
-            <a:lvl6pPr marL="2880360" indent="0" algn="ctr">
-              <a:buNone/>
-              <a:defRPr sz="2016"/>
+            <a:lvl6pPr marL="1714500" indent="0" algn="ctr">
+              <a:buNone/>
+              <a:defRPr sz="1200"/>
             </a:lvl6pPr>
-            <a:lvl7pPr marL="3456432" indent="0" algn="ctr">
-              <a:buNone/>
-              <a:defRPr sz="2016"/>
+            <a:lvl7pPr marL="2057400" indent="0" algn="ctr">
+              <a:buNone/>
+              <a:defRPr sz="1200"/>
             </a:lvl7pPr>
-            <a:lvl8pPr marL="4032504" indent="0" algn="ctr">
-              <a:buNone/>
-              <a:defRPr sz="2016"/>
+            <a:lvl8pPr marL="2400300" indent="0" algn="ctr">
+              <a:buNone/>
+              <a:defRPr sz="1200"/>
             </a:lvl8pPr>
-            <a:lvl9pPr marL="4608576" indent="0" algn="ctr">
-              <a:buNone/>
-              <a:defRPr sz="2016"/>
+            <a:lvl9pPr marL="2743200" indent="0" algn="ctr">
+              <a:buNone/>
+              <a:defRPr sz="1200"/>
             </a:lvl9pPr>
           </a:lstStyle>
           <a:p>
@@ -243,7 +243,7 @@
           <a:p>
             <a:fld id="{0234921A-2271-F649-B94C-D9F2E69CC631}" type="datetimeFigureOut">
               <a:rPr lang="en-US" smtClean="0"/>
-              <a:t>8/7/26</a:t>
+              <a:t>9/8/26</a:t>
             </a:fld>
             <a:endParaRPr lang="en-US"/>
           </a:p>
@@ -294,7 +294,7 @@
     </p:spTree>
     <p:extLst>
       <p:ext uri="{BB962C8B-B14F-4D97-AF65-F5344CB8AC3E}">
-        <p14:creationId xmlns:p14="http://schemas.microsoft.com/office/powerpoint/2010/main" val="2578101621"/>
+        <p14:creationId xmlns:p14="http://schemas.microsoft.com/office/powerpoint/2010/main" val="4064457994"/>
       </p:ext>
     </p:extLst>
   </p:cSld>
@@ -413,7 +413,7 @@
           <a:p>
             <a:fld id="{0234921A-2271-F649-B94C-D9F2E69CC631}" type="datetimeFigureOut">
               <a:rPr lang="en-US" smtClean="0"/>
-              <a:t>8/7/26</a:t>
+              <a:t>9/8/26</a:t>
             </a:fld>
             <a:endParaRPr lang="en-US"/>
           </a:p>
@@ -464,7 +464,7 @@
     </p:spTree>
     <p:extLst>
       <p:ext uri="{BB962C8B-B14F-4D97-AF65-F5344CB8AC3E}">
-        <p14:creationId xmlns:p14="http://schemas.microsoft.com/office/powerpoint/2010/main" val="885568840"/>
+        <p14:creationId xmlns:p14="http://schemas.microsoft.com/office/powerpoint/2010/main" val="34764690"/>
       </p:ext>
     </p:extLst>
   </p:cSld>
@@ -503,8 +503,8 @@
         </p:nvSpPr>
         <p:spPr>
           <a:xfrm>
-            <a:off x="9274751" y="460041"/>
-            <a:ext cx="2794575" cy="7322647"/>
+            <a:off x="4907757" y="486833"/>
+            <a:ext cx="1478756" cy="7749117"/>
           </a:xfrm>
         </p:spPr>
         <p:txBody>
@@ -531,8 +531,8 @@
         </p:nvSpPr>
         <p:spPr>
           <a:xfrm>
-            <a:off x="891025" y="460041"/>
-            <a:ext cx="8221722" cy="7322647"/>
+            <a:off x="471488" y="486833"/>
+            <a:ext cx="4350544" cy="7749117"/>
           </a:xfrm>
         </p:spPr>
         <p:txBody>
@@ -593,7 +593,7 @@
           <a:p>
             <a:fld id="{0234921A-2271-F649-B94C-D9F2E69CC631}" type="datetimeFigureOut">
               <a:rPr lang="en-US" smtClean="0"/>
-              <a:t>8/7/26</a:t>
+              <a:t>9/8/26</a:t>
             </a:fld>
             <a:endParaRPr lang="en-US"/>
           </a:p>
@@ -644,7 +644,7 @@
     </p:spTree>
     <p:extLst>
       <p:ext uri="{BB962C8B-B14F-4D97-AF65-F5344CB8AC3E}">
-        <p14:creationId xmlns:p14="http://schemas.microsoft.com/office/powerpoint/2010/main" val="1966168665"/>
+        <p14:creationId xmlns:p14="http://schemas.microsoft.com/office/powerpoint/2010/main" val="3674893278"/>
       </p:ext>
     </p:extLst>
   </p:cSld>
@@ -763,7 +763,7 @@
           <a:p>
             <a:fld id="{0234921A-2271-F649-B94C-D9F2E69CC631}" type="datetimeFigureOut">
               <a:rPr lang="en-US" smtClean="0"/>
-              <a:t>8/7/26</a:t>
+              <a:t>9/8/26</a:t>
             </a:fld>
             <a:endParaRPr lang="en-US"/>
           </a:p>
@@ -814,7 +814,7 @@
     </p:spTree>
     <p:extLst>
       <p:ext uri="{BB962C8B-B14F-4D97-AF65-F5344CB8AC3E}">
-        <p14:creationId xmlns:p14="http://schemas.microsoft.com/office/powerpoint/2010/main" val="1328374543"/>
+        <p14:creationId xmlns:p14="http://schemas.microsoft.com/office/powerpoint/2010/main" val="938776177"/>
       </p:ext>
     </p:extLst>
   </p:cSld>
@@ -853,15 +853,15 @@
         </p:nvSpPr>
         <p:spPr>
           <a:xfrm>
-            <a:off x="884275" y="2154193"/>
-            <a:ext cx="11178302" cy="3594317"/>
+            <a:off x="467916" y="2279653"/>
+            <a:ext cx="5915025" cy="3803649"/>
           </a:xfrm>
         </p:spPr>
         <p:txBody>
           <a:bodyPr anchor="b"/>
           <a:lstStyle>
             <a:lvl1pPr>
-              <a:defRPr sz="7560"/>
+              <a:defRPr sz="4500"/>
             </a:lvl1pPr>
           </a:lstStyle>
           <a:p>
@@ -885,8 +885,8 @@
         </p:nvSpPr>
         <p:spPr>
           <a:xfrm>
-            <a:off x="884275" y="5782513"/>
-            <a:ext cx="11178302" cy="1890166"/>
+            <a:off x="467916" y="6119286"/>
+            <a:ext cx="5915025" cy="2000249"/>
           </a:xfrm>
         </p:spPr>
         <p:txBody>
@@ -894,7 +894,7 @@
           <a:lstStyle>
             <a:lvl1pPr marL="0" indent="0">
               <a:buNone/>
-              <a:defRPr sz="3024">
+              <a:defRPr sz="1800">
                 <a:solidFill>
                   <a:schemeClr val="tx1">
                     <a:tint val="82000"/>
@@ -902,9 +902,9 @@
                 </a:solidFill>
               </a:defRPr>
             </a:lvl1pPr>
-            <a:lvl2pPr marL="576072" indent="0">
-              <a:buNone/>
-              <a:defRPr sz="2520">
+            <a:lvl2pPr marL="342900" indent="0">
+              <a:buNone/>
+              <a:defRPr sz="1500">
                 <a:solidFill>
                   <a:schemeClr val="tx1">
                     <a:tint val="82000"/>
@@ -912,9 +912,9 @@
                 </a:solidFill>
               </a:defRPr>
             </a:lvl2pPr>
-            <a:lvl3pPr marL="1152144" indent="0">
-              <a:buNone/>
-              <a:defRPr sz="2268">
+            <a:lvl3pPr marL="685800" indent="0">
+              <a:buNone/>
+              <a:defRPr sz="1350">
                 <a:solidFill>
                   <a:schemeClr val="tx1">
                     <a:tint val="82000"/>
@@ -922,9 +922,9 @@
                 </a:solidFill>
               </a:defRPr>
             </a:lvl3pPr>
-            <a:lvl4pPr marL="1728216" indent="0">
-              <a:buNone/>
-              <a:defRPr sz="2016">
+            <a:lvl4pPr marL="1028700" indent="0">
+              <a:buNone/>
+              <a:defRPr sz="1200">
                 <a:solidFill>
                   <a:schemeClr val="tx1">
                     <a:tint val="82000"/>
@@ -932,9 +932,9 @@
                 </a:solidFill>
               </a:defRPr>
             </a:lvl4pPr>
-            <a:lvl5pPr marL="2304288" indent="0">
-              <a:buNone/>
-              <a:defRPr sz="2016">
+            <a:lvl5pPr marL="1371600" indent="0">
+              <a:buNone/>
+              <a:defRPr sz="1200">
                 <a:solidFill>
                   <a:schemeClr val="tx1">
                     <a:tint val="82000"/>
@@ -942,9 +942,9 @@
                 </a:solidFill>
               </a:defRPr>
             </a:lvl5pPr>
-            <a:lvl6pPr marL="2880360" indent="0">
-              <a:buNone/>
-              <a:defRPr sz="2016">
+            <a:lvl6pPr marL="1714500" indent="0">
+              <a:buNone/>
+              <a:defRPr sz="1200">
                 <a:solidFill>
                   <a:schemeClr val="tx1">
                     <a:tint val="82000"/>
@@ -952,9 +952,9 @@
                 </a:solidFill>
               </a:defRPr>
             </a:lvl6pPr>
-            <a:lvl7pPr marL="3456432" indent="0">
-              <a:buNone/>
-              <a:defRPr sz="2016">
+            <a:lvl7pPr marL="2057400" indent="0">
+              <a:buNone/>
+              <a:defRPr sz="1200">
                 <a:solidFill>
                   <a:schemeClr val="tx1">
                     <a:tint val="82000"/>
@@ -962,9 +962,9 @@
                 </a:solidFill>
               </a:defRPr>
             </a:lvl7pPr>
-            <a:lvl8pPr marL="4032504" indent="0">
-              <a:buNone/>
-              <a:defRPr sz="2016">
+            <a:lvl8pPr marL="2400300" indent="0">
+              <a:buNone/>
+              <a:defRPr sz="1200">
                 <a:solidFill>
                   <a:schemeClr val="tx1">
                     <a:tint val="82000"/>
@@ -972,9 +972,9 @@
                 </a:solidFill>
               </a:defRPr>
             </a:lvl8pPr>
-            <a:lvl9pPr marL="4608576" indent="0">
-              <a:buNone/>
-              <a:defRPr sz="2016">
+            <a:lvl9pPr marL="2743200" indent="0">
+              <a:buNone/>
+              <a:defRPr sz="1200">
                 <a:solidFill>
                   <a:schemeClr val="tx1">
                     <a:tint val="82000"/>
@@ -1009,7 +1009,7 @@
           <a:p>
             <a:fld id="{0234921A-2271-F649-B94C-D9F2E69CC631}" type="datetimeFigureOut">
               <a:rPr lang="en-US" smtClean="0"/>
-              <a:t>8/7/26</a:t>
+              <a:t>9/8/26</a:t>
             </a:fld>
             <a:endParaRPr lang="en-US"/>
           </a:p>
@@ -1060,7 +1060,7 @@
     </p:spTree>
     <p:extLst>
       <p:ext uri="{BB962C8B-B14F-4D97-AF65-F5344CB8AC3E}">
-        <p14:creationId xmlns:p14="http://schemas.microsoft.com/office/powerpoint/2010/main" val="3961332843"/>
+        <p14:creationId xmlns:p14="http://schemas.microsoft.com/office/powerpoint/2010/main" val="2867491586"/>
       </p:ext>
     </p:extLst>
   </p:cSld>
@@ -1122,8 +1122,8 @@
         </p:nvSpPr>
         <p:spPr>
           <a:xfrm>
-            <a:off x="891024" y="2300203"/>
-            <a:ext cx="5508149" cy="5482485"/>
+            <a:off x="471488" y="2434167"/>
+            <a:ext cx="2914650" cy="5801784"/>
           </a:xfrm>
         </p:spPr>
         <p:txBody>
@@ -1179,8 +1179,8 @@
         </p:nvSpPr>
         <p:spPr>
           <a:xfrm>
-            <a:off x="6561177" y="2300203"/>
-            <a:ext cx="5508149" cy="5482485"/>
+            <a:off x="3471863" y="2434167"/>
+            <a:ext cx="2914650" cy="5801784"/>
           </a:xfrm>
         </p:spPr>
         <p:txBody>
@@ -1241,7 +1241,7 @@
           <a:p>
             <a:fld id="{0234921A-2271-F649-B94C-D9F2E69CC631}" type="datetimeFigureOut">
               <a:rPr lang="en-US" smtClean="0"/>
-              <a:t>8/7/26</a:t>
+              <a:t>9/8/26</a:t>
             </a:fld>
             <a:endParaRPr lang="en-US"/>
           </a:p>
@@ -1292,7 +1292,7 @@
     </p:spTree>
     <p:extLst>
       <p:ext uri="{BB962C8B-B14F-4D97-AF65-F5344CB8AC3E}">
-        <p14:creationId xmlns:p14="http://schemas.microsoft.com/office/powerpoint/2010/main" val="1758678672"/>
+        <p14:creationId xmlns:p14="http://schemas.microsoft.com/office/powerpoint/2010/main" val="4138833046"/>
       </p:ext>
     </p:extLst>
   </p:cSld>
@@ -1331,8 +1331,8 @@
         </p:nvSpPr>
         <p:spPr>
           <a:xfrm>
-            <a:off x="892712" y="460043"/>
-            <a:ext cx="11178302" cy="1670148"/>
+            <a:off x="472381" y="486835"/>
+            <a:ext cx="5915025" cy="1767417"/>
           </a:xfrm>
         </p:spPr>
         <p:txBody>
@@ -1359,8 +1359,8 @@
         </p:nvSpPr>
         <p:spPr>
           <a:xfrm>
-            <a:off x="892713" y="2118188"/>
-            <a:ext cx="5482835" cy="1038091"/>
+            <a:off x="472381" y="2241551"/>
+            <a:ext cx="2901255" cy="1098549"/>
           </a:xfrm>
         </p:spPr>
         <p:txBody>
@@ -1368,39 +1368,39 @@
           <a:lstStyle>
             <a:lvl1pPr marL="0" indent="0">
               <a:buNone/>
-              <a:defRPr sz="3024" b="1"/>
+              <a:defRPr sz="1800" b="1"/>
             </a:lvl1pPr>
-            <a:lvl2pPr marL="576072" indent="0">
-              <a:buNone/>
-              <a:defRPr sz="2520" b="1"/>
+            <a:lvl2pPr marL="342900" indent="0">
+              <a:buNone/>
+              <a:defRPr sz="1500" b="1"/>
             </a:lvl2pPr>
-            <a:lvl3pPr marL="1152144" indent="0">
-              <a:buNone/>
-              <a:defRPr sz="2268" b="1"/>
+            <a:lvl3pPr marL="685800" indent="0">
+              <a:buNone/>
+              <a:defRPr sz="1350" b="1"/>
             </a:lvl3pPr>
-            <a:lvl4pPr marL="1728216" indent="0">
-              <a:buNone/>
-              <a:defRPr sz="2016" b="1"/>
+            <a:lvl4pPr marL="1028700" indent="0">
+              <a:buNone/>
+              <a:defRPr sz="1200" b="1"/>
             </a:lvl4pPr>
-            <a:lvl5pPr marL="2304288" indent="0">
-              <a:buNone/>
-              <a:defRPr sz="2016" b="1"/>
+            <a:lvl5pPr marL="1371600" indent="0">
+              <a:buNone/>
+              <a:defRPr sz="1200" b="1"/>
             </a:lvl5pPr>
-            <a:lvl6pPr marL="2880360" indent="0">
-              <a:buNone/>
-              <a:defRPr sz="2016" b="1"/>
+            <a:lvl6pPr marL="1714500" indent="0">
+              <a:buNone/>
+              <a:defRPr sz="1200" b="1"/>
             </a:lvl6pPr>
-            <a:lvl7pPr marL="3456432" indent="0">
-              <a:buNone/>
-              <a:defRPr sz="2016" b="1"/>
+            <a:lvl7pPr marL="2057400" indent="0">
+              <a:buNone/>
+              <a:defRPr sz="1200" b="1"/>
             </a:lvl7pPr>
-            <a:lvl8pPr marL="4032504" indent="0">
-              <a:buNone/>
-              <a:defRPr sz="2016" b="1"/>
+            <a:lvl8pPr marL="2400300" indent="0">
+              <a:buNone/>
+              <a:defRPr sz="1200" b="1"/>
             </a:lvl8pPr>
-            <a:lvl9pPr marL="4608576" indent="0">
-              <a:buNone/>
-              <a:defRPr sz="2016" b="1"/>
+            <a:lvl9pPr marL="2743200" indent="0">
+              <a:buNone/>
+              <a:defRPr sz="1200" b="1"/>
             </a:lvl9pPr>
           </a:lstStyle>
           <a:p>
@@ -1424,8 +1424,8 @@
         </p:nvSpPr>
         <p:spPr>
           <a:xfrm>
-            <a:off x="892713" y="3156278"/>
-            <a:ext cx="5482835" cy="4642411"/>
+            <a:off x="472381" y="3340100"/>
+            <a:ext cx="2901255" cy="4912784"/>
           </a:xfrm>
         </p:spPr>
         <p:txBody>
@@ -1481,8 +1481,8 @@
         </p:nvSpPr>
         <p:spPr>
           <a:xfrm>
-            <a:off x="6561178" y="2118188"/>
-            <a:ext cx="5509837" cy="1038091"/>
+            <a:off x="3471863" y="2241551"/>
+            <a:ext cx="2915543" cy="1098549"/>
           </a:xfrm>
         </p:spPr>
         <p:txBody>
@@ -1490,39 +1490,39 @@
           <a:lstStyle>
             <a:lvl1pPr marL="0" indent="0">
               <a:buNone/>
-              <a:defRPr sz="3024" b="1"/>
+              <a:defRPr sz="1800" b="1"/>
             </a:lvl1pPr>
-            <a:lvl2pPr marL="576072" indent="0">
-              <a:buNone/>
-              <a:defRPr sz="2520" b="1"/>
+            <a:lvl2pPr marL="342900" indent="0">
+              <a:buNone/>
+              <a:defRPr sz="1500" b="1"/>
             </a:lvl2pPr>
-            <a:lvl3pPr marL="1152144" indent="0">
-              <a:buNone/>
-              <a:defRPr sz="2268" b="1"/>
+            <a:lvl3pPr marL="685800" indent="0">
+              <a:buNone/>
+              <a:defRPr sz="1350" b="1"/>
             </a:lvl3pPr>
-            <a:lvl4pPr marL="1728216" indent="0">
-              <a:buNone/>
-              <a:defRPr sz="2016" b="1"/>
+            <a:lvl4pPr marL="1028700" indent="0">
+              <a:buNone/>
+              <a:defRPr sz="1200" b="1"/>
             </a:lvl4pPr>
-            <a:lvl5pPr marL="2304288" indent="0">
-              <a:buNone/>
-              <a:defRPr sz="2016" b="1"/>
+            <a:lvl5pPr marL="1371600" indent="0">
+              <a:buNone/>
+              <a:defRPr sz="1200" b="1"/>
             </a:lvl5pPr>
-            <a:lvl6pPr marL="2880360" indent="0">
-              <a:buNone/>
-              <a:defRPr sz="2016" b="1"/>
+            <a:lvl6pPr marL="1714500" indent="0">
+              <a:buNone/>
+              <a:defRPr sz="1200" b="1"/>
             </a:lvl6pPr>
-            <a:lvl7pPr marL="3456432" indent="0">
-              <a:buNone/>
-              <a:defRPr sz="2016" b="1"/>
+            <a:lvl7pPr marL="2057400" indent="0">
+              <a:buNone/>
+              <a:defRPr sz="1200" b="1"/>
             </a:lvl7pPr>
-            <a:lvl8pPr marL="4032504" indent="0">
-              <a:buNone/>
-              <a:defRPr sz="2016" b="1"/>
+            <a:lvl8pPr marL="2400300" indent="0">
+              <a:buNone/>
+              <a:defRPr sz="1200" b="1"/>
             </a:lvl8pPr>
-            <a:lvl9pPr marL="4608576" indent="0">
-              <a:buNone/>
-              <a:defRPr sz="2016" b="1"/>
+            <a:lvl9pPr marL="2743200" indent="0">
+              <a:buNone/>
+              <a:defRPr sz="1200" b="1"/>
             </a:lvl9pPr>
           </a:lstStyle>
           <a:p>
@@ -1546,8 +1546,8 @@
         </p:nvSpPr>
         <p:spPr>
           <a:xfrm>
-            <a:off x="6561178" y="3156278"/>
-            <a:ext cx="5509837" cy="4642411"/>
+            <a:off x="3471863" y="3340100"/>
+            <a:ext cx="2915543" cy="4912784"/>
           </a:xfrm>
         </p:spPr>
         <p:txBody>
@@ -1608,7 +1608,7 @@
           <a:p>
             <a:fld id="{0234921A-2271-F649-B94C-D9F2E69CC631}" type="datetimeFigureOut">
               <a:rPr lang="en-US" smtClean="0"/>
-              <a:t>8/7/26</a:t>
+              <a:t>9/8/26</a:t>
             </a:fld>
             <a:endParaRPr lang="en-US"/>
           </a:p>
@@ -1659,7 +1659,7 @@
     </p:spTree>
     <p:extLst>
       <p:ext uri="{BB962C8B-B14F-4D97-AF65-F5344CB8AC3E}">
-        <p14:creationId xmlns:p14="http://schemas.microsoft.com/office/powerpoint/2010/main" val="3530831745"/>
+        <p14:creationId xmlns:p14="http://schemas.microsoft.com/office/powerpoint/2010/main" val="2038524525"/>
       </p:ext>
     </p:extLst>
   </p:cSld>
@@ -1726,7 +1726,7 @@
           <a:p>
             <a:fld id="{0234921A-2271-F649-B94C-D9F2E69CC631}" type="datetimeFigureOut">
               <a:rPr lang="en-US" smtClean="0"/>
-              <a:t>8/7/26</a:t>
+              <a:t>9/8/26</a:t>
             </a:fld>
             <a:endParaRPr lang="en-US"/>
           </a:p>
@@ -1777,7 +1777,7 @@
     </p:spTree>
     <p:extLst>
       <p:ext uri="{BB962C8B-B14F-4D97-AF65-F5344CB8AC3E}">
-        <p14:creationId xmlns:p14="http://schemas.microsoft.com/office/powerpoint/2010/main" val="1631356897"/>
+        <p14:creationId xmlns:p14="http://schemas.microsoft.com/office/powerpoint/2010/main" val="1086585685"/>
       </p:ext>
     </p:extLst>
   </p:cSld>
@@ -1821,7 +1821,7 @@
           <a:p>
             <a:fld id="{0234921A-2271-F649-B94C-D9F2E69CC631}" type="datetimeFigureOut">
               <a:rPr lang="en-US" smtClean="0"/>
-              <a:t>8/7/26</a:t>
+              <a:t>9/8/26</a:t>
             </a:fld>
             <a:endParaRPr lang="en-US"/>
           </a:p>
@@ -1872,7 +1872,7 @@
     </p:spTree>
     <p:extLst>
       <p:ext uri="{BB962C8B-B14F-4D97-AF65-F5344CB8AC3E}">
-        <p14:creationId xmlns:p14="http://schemas.microsoft.com/office/powerpoint/2010/main" val="384678101"/>
+        <p14:creationId xmlns:p14="http://schemas.microsoft.com/office/powerpoint/2010/main" val="3759871730"/>
       </p:ext>
     </p:extLst>
   </p:cSld>
@@ -1911,15 +1911,15 @@
         </p:nvSpPr>
         <p:spPr>
           <a:xfrm>
-            <a:off x="892712" y="576051"/>
-            <a:ext cx="4180050" cy="2016178"/>
+            <a:off x="472381" y="609600"/>
+            <a:ext cx="2211884" cy="2133600"/>
           </a:xfrm>
         </p:spPr>
         <p:txBody>
           <a:bodyPr anchor="b"/>
           <a:lstStyle>
             <a:lvl1pPr>
-              <a:defRPr sz="4032"/>
+              <a:defRPr sz="2400"/>
             </a:lvl1pPr>
           </a:lstStyle>
           <a:p>
@@ -1943,39 +1943,39 @@
         </p:nvSpPr>
         <p:spPr>
           <a:xfrm>
-            <a:off x="5509837" y="1244112"/>
-            <a:ext cx="6561177" cy="6140542"/>
+            <a:off x="2915543" y="1316568"/>
+            <a:ext cx="3471863" cy="6498167"/>
           </a:xfrm>
         </p:spPr>
         <p:txBody>
           <a:bodyPr/>
           <a:lstStyle>
             <a:lvl1pPr>
-              <a:defRPr sz="4032"/>
+              <a:defRPr sz="2400"/>
             </a:lvl1pPr>
             <a:lvl2pPr>
-              <a:defRPr sz="3528"/>
+              <a:defRPr sz="2100"/>
             </a:lvl2pPr>
             <a:lvl3pPr>
-              <a:defRPr sz="3024"/>
+              <a:defRPr sz="1800"/>
             </a:lvl3pPr>
             <a:lvl4pPr>
-              <a:defRPr sz="2520"/>
+              <a:defRPr sz="1500"/>
             </a:lvl4pPr>
             <a:lvl5pPr>
-              <a:defRPr sz="2520"/>
+              <a:defRPr sz="1500"/>
             </a:lvl5pPr>
             <a:lvl6pPr>
-              <a:defRPr sz="2520"/>
+              <a:defRPr sz="1500"/>
             </a:lvl6pPr>
             <a:lvl7pPr>
-              <a:defRPr sz="2520"/>
+              <a:defRPr sz="1500"/>
             </a:lvl7pPr>
             <a:lvl8pPr>
-              <a:defRPr sz="2520"/>
+              <a:defRPr sz="1500"/>
             </a:lvl8pPr>
             <a:lvl9pPr>
-              <a:defRPr sz="2520"/>
+              <a:defRPr sz="1500"/>
             </a:lvl9pPr>
           </a:lstStyle>
           <a:p>
@@ -2028,8 +2028,8 @@
         </p:nvSpPr>
         <p:spPr>
           <a:xfrm>
-            <a:off x="892712" y="2592229"/>
-            <a:ext cx="4180050" cy="4802425"/>
+            <a:off x="472381" y="2743200"/>
+            <a:ext cx="2211884" cy="5082117"/>
           </a:xfrm>
         </p:spPr>
         <p:txBody>
@@ -2037,39 +2037,39 @@
           <a:lstStyle>
             <a:lvl1pPr marL="0" indent="0">
               <a:buNone/>
-              <a:defRPr sz="2016"/>
+              <a:defRPr sz="1200"/>
             </a:lvl1pPr>
-            <a:lvl2pPr marL="576072" indent="0">
-              <a:buNone/>
-              <a:defRPr sz="1764"/>
+            <a:lvl2pPr marL="342900" indent="0">
+              <a:buNone/>
+              <a:defRPr sz="1050"/>
             </a:lvl2pPr>
-            <a:lvl3pPr marL="1152144" indent="0">
-              <a:buNone/>
-              <a:defRPr sz="1512"/>
+            <a:lvl3pPr marL="685800" indent="0">
+              <a:buNone/>
+              <a:defRPr sz="900"/>
             </a:lvl3pPr>
-            <a:lvl4pPr marL="1728216" indent="0">
-              <a:buNone/>
-              <a:defRPr sz="1260"/>
+            <a:lvl4pPr marL="1028700" indent="0">
+              <a:buNone/>
+              <a:defRPr sz="750"/>
             </a:lvl4pPr>
-            <a:lvl5pPr marL="2304288" indent="0">
-              <a:buNone/>
-              <a:defRPr sz="1260"/>
+            <a:lvl5pPr marL="1371600" indent="0">
+              <a:buNone/>
+              <a:defRPr sz="750"/>
             </a:lvl5pPr>
-            <a:lvl6pPr marL="2880360" indent="0">
-              <a:buNone/>
-              <a:defRPr sz="1260"/>
+            <a:lvl6pPr marL="1714500" indent="0">
+              <a:buNone/>
+              <a:defRPr sz="750"/>
             </a:lvl6pPr>
-            <a:lvl7pPr marL="3456432" indent="0">
-              <a:buNone/>
-              <a:defRPr sz="1260"/>
+            <a:lvl7pPr marL="2057400" indent="0">
+              <a:buNone/>
+              <a:defRPr sz="750"/>
             </a:lvl7pPr>
-            <a:lvl8pPr marL="4032504" indent="0">
-              <a:buNone/>
-              <a:defRPr sz="1260"/>
+            <a:lvl8pPr marL="2400300" indent="0">
+              <a:buNone/>
+              <a:defRPr sz="750"/>
             </a:lvl8pPr>
-            <a:lvl9pPr marL="4608576" indent="0">
-              <a:buNone/>
-              <a:defRPr sz="1260"/>
+            <a:lvl9pPr marL="2743200" indent="0">
+              <a:buNone/>
+              <a:defRPr sz="750"/>
             </a:lvl9pPr>
           </a:lstStyle>
           <a:p>
@@ -2098,7 +2098,7 @@
           <a:p>
             <a:fld id="{0234921A-2271-F649-B94C-D9F2E69CC631}" type="datetimeFigureOut">
               <a:rPr lang="en-US" smtClean="0"/>
-              <a:t>8/7/26</a:t>
+              <a:t>9/8/26</a:t>
             </a:fld>
             <a:endParaRPr lang="en-US"/>
           </a:p>
@@ -2149,7 +2149,7 @@
     </p:spTree>
     <p:extLst>
       <p:ext uri="{BB962C8B-B14F-4D97-AF65-F5344CB8AC3E}">
-        <p14:creationId xmlns:p14="http://schemas.microsoft.com/office/powerpoint/2010/main" val="1845146963"/>
+        <p14:creationId xmlns:p14="http://schemas.microsoft.com/office/powerpoint/2010/main" val="1365464301"/>
       </p:ext>
     </p:extLst>
   </p:cSld>
@@ -2188,15 +2188,15 @@
         </p:nvSpPr>
         <p:spPr>
           <a:xfrm>
-            <a:off x="892712" y="576051"/>
-            <a:ext cx="4180050" cy="2016178"/>
+            <a:off x="472381" y="609600"/>
+            <a:ext cx="2211884" cy="2133600"/>
           </a:xfrm>
         </p:spPr>
         <p:txBody>
           <a:bodyPr anchor="b"/>
           <a:lstStyle>
             <a:lvl1pPr>
-              <a:defRPr sz="4032"/>
+              <a:defRPr sz="2400"/>
             </a:lvl1pPr>
           </a:lstStyle>
           <a:p>
@@ -2220,8 +2220,8 @@
         </p:nvSpPr>
         <p:spPr>
           <a:xfrm>
-            <a:off x="5509837" y="1244112"/>
-            <a:ext cx="6561177" cy="6140542"/>
+            <a:off x="2915543" y="1316568"/>
+            <a:ext cx="3471863" cy="6498167"/>
           </a:xfrm>
         </p:spPr>
         <p:txBody>
@@ -2229,39 +2229,39 @@
           <a:lstStyle>
             <a:lvl1pPr marL="0" indent="0">
               <a:buNone/>
-              <a:defRPr sz="4032"/>
+              <a:defRPr sz="2400"/>
             </a:lvl1pPr>
-            <a:lvl2pPr marL="576072" indent="0">
-              <a:buNone/>
-              <a:defRPr sz="3528"/>
+            <a:lvl2pPr marL="342900" indent="0">
+              <a:buNone/>
+              <a:defRPr sz="2100"/>
             </a:lvl2pPr>
-            <a:lvl3pPr marL="1152144" indent="0">
-              <a:buNone/>
-              <a:defRPr sz="3024"/>
+            <a:lvl3pPr marL="685800" indent="0">
+              <a:buNone/>
+              <a:defRPr sz="1800"/>
             </a:lvl3pPr>
-            <a:lvl4pPr marL="1728216" indent="0">
-              <a:buNone/>
-              <a:defRPr sz="2520"/>
+            <a:lvl4pPr marL="1028700" indent="0">
+              <a:buNone/>
+              <a:defRPr sz="1500"/>
             </a:lvl4pPr>
-            <a:lvl5pPr marL="2304288" indent="0">
-              <a:buNone/>
-              <a:defRPr sz="2520"/>
+            <a:lvl5pPr marL="1371600" indent="0">
+              <a:buNone/>
+              <a:defRPr sz="1500"/>
             </a:lvl5pPr>
-            <a:lvl6pPr marL="2880360" indent="0">
-              <a:buNone/>
-              <a:defRPr sz="2520"/>
+            <a:lvl6pPr marL="1714500" indent="0">
+              <a:buNone/>
+              <a:defRPr sz="1500"/>
             </a:lvl6pPr>
-            <a:lvl7pPr marL="3456432" indent="0">
-              <a:buNone/>
-              <a:defRPr sz="2520"/>
+            <a:lvl7pPr marL="2057400" indent="0">
+              <a:buNone/>
+              <a:defRPr sz="1500"/>
             </a:lvl7pPr>
-            <a:lvl8pPr marL="4032504" indent="0">
-              <a:buNone/>
-              <a:defRPr sz="2520"/>
+            <a:lvl8pPr marL="2400300" indent="0">
+              <a:buNone/>
+              <a:defRPr sz="1500"/>
             </a:lvl8pPr>
-            <a:lvl9pPr marL="4608576" indent="0">
-              <a:buNone/>
-              <a:defRPr sz="2520"/>
+            <a:lvl9pPr marL="2743200" indent="0">
+              <a:buNone/>
+              <a:defRPr sz="1500"/>
             </a:lvl9pPr>
           </a:lstStyle>
           <a:p>
@@ -2285,8 +2285,8 @@
         </p:nvSpPr>
         <p:spPr>
           <a:xfrm>
-            <a:off x="892712" y="2592229"/>
-            <a:ext cx="4180050" cy="4802425"/>
+            <a:off x="472381" y="2743200"/>
+            <a:ext cx="2211884" cy="5082117"/>
           </a:xfrm>
         </p:spPr>
         <p:txBody>
@@ -2294,39 +2294,39 @@
           <a:lstStyle>
             <a:lvl1pPr marL="0" indent="0">
               <a:buNone/>
-              <a:defRPr sz="2016"/>
+              <a:defRPr sz="1200"/>
             </a:lvl1pPr>
-            <a:lvl2pPr marL="576072" indent="0">
-              <a:buNone/>
-              <a:defRPr sz="1764"/>
+            <a:lvl2pPr marL="342900" indent="0">
+              <a:buNone/>
+              <a:defRPr sz="1050"/>
             </a:lvl2pPr>
-            <a:lvl3pPr marL="1152144" indent="0">
-              <a:buNone/>
-              <a:defRPr sz="1512"/>
+            <a:lvl3pPr marL="685800" indent="0">
+              <a:buNone/>
+              <a:defRPr sz="900"/>
             </a:lvl3pPr>
-            <a:lvl4pPr marL="1728216" indent="0">
-              <a:buNone/>
-              <a:defRPr sz="1260"/>
+            <a:lvl4pPr marL="1028700" indent="0">
+              <a:buNone/>
+              <a:defRPr sz="750"/>
             </a:lvl4pPr>
-            <a:lvl5pPr marL="2304288" indent="0">
-              <a:buNone/>
-              <a:defRPr sz="1260"/>
+            <a:lvl5pPr marL="1371600" indent="0">
+              <a:buNone/>
+              <a:defRPr sz="750"/>
             </a:lvl5pPr>
-            <a:lvl6pPr marL="2880360" indent="0">
-              <a:buNone/>
-              <a:defRPr sz="1260"/>
+            <a:lvl6pPr marL="1714500" indent="0">
+              <a:buNone/>
+              <a:defRPr sz="750"/>
             </a:lvl6pPr>
-            <a:lvl7pPr marL="3456432" indent="0">
-              <a:buNone/>
-              <a:defRPr sz="1260"/>
+            <a:lvl7pPr marL="2057400" indent="0">
+              <a:buNone/>
+              <a:defRPr sz="750"/>
             </a:lvl7pPr>
-            <a:lvl8pPr marL="4032504" indent="0">
-              <a:buNone/>
-              <a:defRPr sz="1260"/>
+            <a:lvl8pPr marL="2400300" indent="0">
+              <a:buNone/>
+              <a:defRPr sz="750"/>
             </a:lvl8pPr>
-            <a:lvl9pPr marL="4608576" indent="0">
-              <a:buNone/>
-              <a:defRPr sz="1260"/>
+            <a:lvl9pPr marL="2743200" indent="0">
+              <a:buNone/>
+              <a:defRPr sz="750"/>
             </a:lvl9pPr>
           </a:lstStyle>
           <a:p>
@@ -2355,7 +2355,7 @@
           <a:p>
             <a:fld id="{0234921A-2271-F649-B94C-D9F2E69CC631}" type="datetimeFigureOut">
               <a:rPr lang="en-US" smtClean="0"/>
-              <a:t>8/7/26</a:t>
+              <a:t>9/8/26</a:t>
             </a:fld>
             <a:endParaRPr lang="en-US"/>
           </a:p>
@@ -2406,7 +2406,7 @@
     </p:spTree>
     <p:extLst>
       <p:ext uri="{BB962C8B-B14F-4D97-AF65-F5344CB8AC3E}">
-        <p14:creationId xmlns:p14="http://schemas.microsoft.com/office/powerpoint/2010/main" val="2394910052"/>
+        <p14:creationId xmlns:p14="http://schemas.microsoft.com/office/powerpoint/2010/main" val="1401227630"/>
       </p:ext>
     </p:extLst>
   </p:cSld>
@@ -2450,8 +2450,8 @@
         </p:nvSpPr>
         <p:spPr>
           <a:xfrm>
-            <a:off x="891024" y="460043"/>
-            <a:ext cx="11178302" cy="1670148"/>
+            <a:off x="471488" y="486835"/>
+            <a:ext cx="5915025" cy="1767417"/>
           </a:xfrm>
           <a:prstGeom prst="rect">
             <a:avLst/>
@@ -2483,8 +2483,8 @@
         </p:nvSpPr>
         <p:spPr>
           <a:xfrm>
-            <a:off x="891024" y="2300203"/>
-            <a:ext cx="11178302" cy="5482485"/>
+            <a:off x="471488" y="2434167"/>
+            <a:ext cx="5915025" cy="5801784"/>
           </a:xfrm>
           <a:prstGeom prst="rect">
             <a:avLst/>
@@ -2545,8 +2545,8 @@
         </p:nvSpPr>
         <p:spPr>
           <a:xfrm>
-            <a:off x="891024" y="8008709"/>
-            <a:ext cx="2916079" cy="460041"/>
+            <a:off x="471487" y="8475136"/>
+            <a:ext cx="1543050" cy="486833"/>
           </a:xfrm>
           <a:prstGeom prst="rect">
             <a:avLst/>
@@ -2556,7 +2556,7 @@
           <a:bodyPr vert="horz" lIns="91440" tIns="45720" rIns="91440" bIns="45720" rtlCol="0" anchor="ctr"/>
           <a:lstStyle>
             <a:lvl1pPr algn="l">
-              <a:defRPr sz="1512">
+              <a:defRPr sz="900">
                 <a:solidFill>
                   <a:schemeClr val="tx1">
                     <a:tint val="82000"/>
@@ -2568,7 +2568,7 @@
           <a:p>
             <a:fld id="{0234921A-2271-F649-B94C-D9F2E69CC631}" type="datetimeFigureOut">
               <a:rPr lang="en-US" smtClean="0"/>
-              <a:t>8/7/26</a:t>
+              <a:t>9/8/26</a:t>
             </a:fld>
             <a:endParaRPr lang="en-US"/>
           </a:p>
@@ -2586,8 +2586,8 @@
         </p:nvSpPr>
         <p:spPr>
           <a:xfrm>
-            <a:off x="4293116" y="8008709"/>
-            <a:ext cx="4374118" cy="460041"/>
+            <a:off x="2271713" y="8475136"/>
+            <a:ext cx="2314575" cy="486833"/>
           </a:xfrm>
           <a:prstGeom prst="rect">
             <a:avLst/>
@@ -2597,7 +2597,7 @@
           <a:bodyPr vert="horz" lIns="91440" tIns="45720" rIns="91440" bIns="45720" rtlCol="0" anchor="ctr"/>
           <a:lstStyle>
             <a:lvl1pPr algn="ctr">
-              <a:defRPr sz="1512">
+              <a:defRPr sz="900">
                 <a:solidFill>
                   <a:schemeClr val="tx1">
                     <a:tint val="82000"/>
@@ -2623,8 +2623,8 @@
         </p:nvSpPr>
         <p:spPr>
           <a:xfrm>
-            <a:off x="9153247" y="8008709"/>
-            <a:ext cx="2916079" cy="460041"/>
+            <a:off x="4843463" y="8475136"/>
+            <a:ext cx="1543050" cy="486833"/>
           </a:xfrm>
           <a:prstGeom prst="rect">
             <a:avLst/>
@@ -2634,7 +2634,7 @@
           <a:bodyPr vert="horz" lIns="91440" tIns="45720" rIns="91440" bIns="45720" rtlCol="0" anchor="ctr"/>
           <a:lstStyle>
             <a:lvl1pPr algn="r">
-              <a:defRPr sz="1512">
+              <a:defRPr sz="900">
                 <a:solidFill>
                   <a:schemeClr val="tx1">
                     <a:tint val="82000"/>
@@ -2655,27 +2655,27 @@
     </p:spTree>
     <p:extLst>
       <p:ext uri="{BB962C8B-B14F-4D97-AF65-F5344CB8AC3E}">
-        <p14:creationId xmlns:p14="http://schemas.microsoft.com/office/powerpoint/2010/main" val="706348731"/>
+        <p14:creationId xmlns:p14="http://schemas.microsoft.com/office/powerpoint/2010/main" val="1820461620"/>
       </p:ext>
     </p:extLst>
   </p:cSld>
   <p:clrMap bg1="lt1" tx1="dk1" bg2="lt2" tx2="dk2" accent1="accent1" accent2="accent2" accent3="accent3" accent4="accent4" accent5="accent5" accent6="accent6" hlink="hlink" folHlink="folHlink"/>
   <p:sldLayoutIdLst>
-    <p:sldLayoutId id="2147483721" r:id="rId1"/>
-    <p:sldLayoutId id="2147483722" r:id="rId2"/>
-    <p:sldLayoutId id="2147483723" r:id="rId3"/>
-    <p:sldLayoutId id="2147483724" r:id="rId4"/>
-    <p:sldLayoutId id="2147483725" r:id="rId5"/>
-    <p:sldLayoutId id="2147483726" r:id="rId6"/>
-    <p:sldLayoutId id="2147483727" r:id="rId7"/>
-    <p:sldLayoutId id="2147483728" r:id="rId8"/>
-    <p:sldLayoutId id="2147483729" r:id="rId9"/>
-    <p:sldLayoutId id="2147483730" r:id="rId10"/>
-    <p:sldLayoutId id="2147483731" r:id="rId11"/>
+    <p:sldLayoutId id="2147483733" r:id="rId1"/>
+    <p:sldLayoutId id="2147483734" r:id="rId2"/>
+    <p:sldLayoutId id="2147483735" r:id="rId3"/>
+    <p:sldLayoutId id="2147483736" r:id="rId4"/>
+    <p:sldLayoutId id="2147483737" r:id="rId5"/>
+    <p:sldLayoutId id="2147483738" r:id="rId6"/>
+    <p:sldLayoutId id="2147483739" r:id="rId7"/>
+    <p:sldLayoutId id="2147483740" r:id="rId8"/>
+    <p:sldLayoutId id="2147483741" r:id="rId9"/>
+    <p:sldLayoutId id="2147483742" r:id="rId10"/>
+    <p:sldLayoutId id="2147483743" r:id="rId11"/>
   </p:sldLayoutIdLst>
   <p:txStyles>
     <p:titleStyle>
-      <a:lvl1pPr algn="l" defTabSz="1152144" rtl="0" eaLnBrk="1" latinLnBrk="0" hangingPunct="1">
+      <a:lvl1pPr algn="l" defTabSz="685800" rtl="0" eaLnBrk="1" latinLnBrk="0" hangingPunct="1">
         <a:lnSpc>
           <a:spcPct val="90000"/>
         </a:lnSpc>
@@ -2683,7 +2683,7 @@
           <a:spcPct val="0"/>
         </a:spcBef>
         <a:buNone/>
-        <a:defRPr sz="5544" kern="1200">
+        <a:defRPr sz="3300" kern="1200">
           <a:solidFill>
             <a:schemeClr val="tx1"/>
           </a:solidFill>
@@ -2694,16 +2694,16 @@
       </a:lvl1pPr>
     </p:titleStyle>
     <p:bodyStyle>
-      <a:lvl1pPr marL="288036" indent="-288036" algn="l" defTabSz="1152144" rtl="0" eaLnBrk="1" latinLnBrk="0" hangingPunct="1">
+      <a:lvl1pPr marL="171450" indent="-171450" algn="l" defTabSz="685800" rtl="0" eaLnBrk="1" latinLnBrk="0" hangingPunct="1">
         <a:lnSpc>
           <a:spcPct val="90000"/>
         </a:lnSpc>
         <a:spcBef>
-          <a:spcPts val="1260"/>
+          <a:spcPts val="750"/>
         </a:spcBef>
         <a:buFont typeface="Arial" panose="020B0604020202020204" pitchFamily="34" charset="0"/>
         <a:buChar char="•"/>
-        <a:defRPr sz="3528" kern="1200">
+        <a:defRPr sz="2100" kern="1200">
           <a:solidFill>
             <a:schemeClr val="tx1"/>
           </a:solidFill>
@@ -2712,16 +2712,16 @@
           <a:cs typeface="+mn-cs"/>
         </a:defRPr>
       </a:lvl1pPr>
-      <a:lvl2pPr marL="864108" indent="-288036" algn="l" defTabSz="1152144" rtl="0" eaLnBrk="1" latinLnBrk="0" hangingPunct="1">
+      <a:lvl2pPr marL="514350" indent="-171450" algn="l" defTabSz="685800" rtl="0" eaLnBrk="1" latinLnBrk="0" hangingPunct="1">
         <a:lnSpc>
           <a:spcPct val="90000"/>
         </a:lnSpc>
         <a:spcBef>
-          <a:spcPts val="630"/>
+          <a:spcPts val="375"/>
         </a:spcBef>
         <a:buFont typeface="Arial" panose="020B0604020202020204" pitchFamily="34" charset="0"/>
         <a:buChar char="•"/>
-        <a:defRPr sz="3024" kern="1200">
+        <a:defRPr sz="1800" kern="1200">
           <a:solidFill>
             <a:schemeClr val="tx1"/>
           </a:solidFill>
@@ -2730,16 +2730,16 @@
           <a:cs typeface="+mn-cs"/>
         </a:defRPr>
       </a:lvl2pPr>
-      <a:lvl3pPr marL="1440180" indent="-288036" algn="l" defTabSz="1152144" rtl="0" eaLnBrk="1" latinLnBrk="0" hangingPunct="1">
+      <a:lvl3pPr marL="857250" indent="-171450" algn="l" defTabSz="685800" rtl="0" eaLnBrk="1" latinLnBrk="0" hangingPunct="1">
         <a:lnSpc>
           <a:spcPct val="90000"/>
         </a:lnSpc>
         <a:spcBef>
-          <a:spcPts val="630"/>
+          <a:spcPts val="375"/>
         </a:spcBef>
         <a:buFont typeface="Arial" panose="020B0604020202020204" pitchFamily="34" charset="0"/>
         <a:buChar char="•"/>
-        <a:defRPr sz="2520" kern="1200">
+        <a:defRPr sz="1500" kern="1200">
           <a:solidFill>
             <a:schemeClr val="tx1"/>
           </a:solidFill>
@@ -2748,16 +2748,16 @@
           <a:cs typeface="+mn-cs"/>
         </a:defRPr>
       </a:lvl3pPr>
-      <a:lvl4pPr marL="2016252" indent="-288036" algn="l" defTabSz="1152144" rtl="0" eaLnBrk="1" latinLnBrk="0" hangingPunct="1">
+      <a:lvl4pPr marL="1200150" indent="-171450" algn="l" defTabSz="685800" rtl="0" eaLnBrk="1" latinLnBrk="0" hangingPunct="1">
         <a:lnSpc>
           <a:spcPct val="90000"/>
         </a:lnSpc>
         <a:spcBef>
-          <a:spcPts val="630"/>
+          <a:spcPts val="375"/>
         </a:spcBef>
         <a:buFont typeface="Arial" panose="020B0604020202020204" pitchFamily="34" charset="0"/>
         <a:buChar char="•"/>
-        <a:defRPr sz="2268" kern="1200">
+        <a:defRPr sz="1350" kern="1200">
           <a:solidFill>
             <a:schemeClr val="tx1"/>
           </a:solidFill>
@@ -2766,16 +2766,16 @@
           <a:cs typeface="+mn-cs"/>
         </a:defRPr>
       </a:lvl4pPr>
-      <a:lvl5pPr marL="2592324" indent="-288036" algn="l" defTabSz="1152144" rtl="0" eaLnBrk="1" latinLnBrk="0" hangingPunct="1">
+      <a:lvl5pPr marL="1543050" indent="-171450" algn="l" defTabSz="685800" rtl="0" eaLnBrk="1" latinLnBrk="0" hangingPunct="1">
         <a:lnSpc>
           <a:spcPct val="90000"/>
         </a:lnSpc>
         <a:spcBef>
-          <a:spcPts val="630"/>
+          <a:spcPts val="375"/>
         </a:spcBef>
         <a:buFont typeface="Arial" panose="020B0604020202020204" pitchFamily="34" charset="0"/>
         <a:buChar char="•"/>
-        <a:defRPr sz="2268" kern="1200">
+        <a:defRPr sz="1350" kern="1200">
           <a:solidFill>
             <a:schemeClr val="tx1"/>
           </a:solidFill>
@@ -2784,16 +2784,16 @@
           <a:cs typeface="+mn-cs"/>
         </a:defRPr>
       </a:lvl5pPr>
-      <a:lvl6pPr marL="3168396" indent="-288036" algn="l" defTabSz="1152144" rtl="0" eaLnBrk="1" latinLnBrk="0" hangingPunct="1">
+      <a:lvl6pPr marL="1885950" indent="-171450" algn="l" defTabSz="685800" rtl="0" eaLnBrk="1" latinLnBrk="0" hangingPunct="1">
         <a:lnSpc>
           <a:spcPct val="90000"/>
         </a:lnSpc>
         <a:spcBef>
-          <a:spcPts val="630"/>
+          <a:spcPts val="375"/>
         </a:spcBef>
         <a:buFont typeface="Arial" panose="020B0604020202020204" pitchFamily="34" charset="0"/>
         <a:buChar char="•"/>
-        <a:defRPr sz="2268" kern="1200">
+        <a:defRPr sz="1350" kern="1200">
           <a:solidFill>
             <a:schemeClr val="tx1"/>
           </a:solidFill>
@@ -2802,16 +2802,16 @@
           <a:cs typeface="+mn-cs"/>
         </a:defRPr>
       </a:lvl6pPr>
-      <a:lvl7pPr marL="3744468" indent="-288036" algn="l" defTabSz="1152144" rtl="0" eaLnBrk="1" latinLnBrk="0" hangingPunct="1">
+      <a:lvl7pPr marL="2228850" indent="-171450" algn="l" defTabSz="685800" rtl="0" eaLnBrk="1" latinLnBrk="0" hangingPunct="1">
         <a:lnSpc>
           <a:spcPct val="90000"/>
         </a:lnSpc>
         <a:spcBef>
-          <a:spcPts val="630"/>
+          <a:spcPts val="375"/>
         </a:spcBef>
         <a:buFont typeface="Arial" panose="020B0604020202020204" pitchFamily="34" charset="0"/>
         <a:buChar char="•"/>
-        <a:defRPr sz="2268" kern="1200">
+        <a:defRPr sz="1350" kern="1200">
           <a:solidFill>
             <a:schemeClr val="tx1"/>
           </a:solidFill>
@@ -2820,16 +2820,16 @@
           <a:cs typeface="+mn-cs"/>
         </a:defRPr>
       </a:lvl7pPr>
-      <a:lvl8pPr marL="4320540" indent="-288036" algn="l" defTabSz="1152144" rtl="0" eaLnBrk="1" latinLnBrk="0" hangingPunct="1">
+      <a:lvl8pPr marL="2571750" indent="-171450" algn="l" defTabSz="685800" rtl="0" eaLnBrk="1" latinLnBrk="0" hangingPunct="1">
         <a:lnSpc>
           <a:spcPct val="90000"/>
         </a:lnSpc>
         <a:spcBef>
-          <a:spcPts val="630"/>
+          <a:spcPts val="375"/>
         </a:spcBef>
         <a:buFont typeface="Arial" panose="020B0604020202020204" pitchFamily="34" charset="0"/>
         <a:buChar char="•"/>
-        <a:defRPr sz="2268" kern="1200">
+        <a:defRPr sz="1350" kern="1200">
           <a:solidFill>
             <a:schemeClr val="tx1"/>
           </a:solidFill>
@@ -2838,16 +2838,16 @@
           <a:cs typeface="+mn-cs"/>
         </a:defRPr>
       </a:lvl8pPr>
-      <a:lvl9pPr marL="4896612" indent="-288036" algn="l" defTabSz="1152144" rtl="0" eaLnBrk="1" latinLnBrk="0" hangingPunct="1">
+      <a:lvl9pPr marL="2914650" indent="-171450" algn="l" defTabSz="685800" rtl="0" eaLnBrk="1" latinLnBrk="0" hangingPunct="1">
         <a:lnSpc>
           <a:spcPct val="90000"/>
         </a:lnSpc>
         <a:spcBef>
-          <a:spcPts val="630"/>
+          <a:spcPts val="375"/>
         </a:spcBef>
         <a:buFont typeface="Arial" panose="020B0604020202020204" pitchFamily="34" charset="0"/>
         <a:buChar char="•"/>
-        <a:defRPr sz="2268" kern="1200">
+        <a:defRPr sz="1350" kern="1200">
           <a:solidFill>
             <a:schemeClr val="tx1"/>
           </a:solidFill>
@@ -2861,8 +2861,8 @@
       <a:defPPr>
         <a:defRPr lang="en-US"/>
       </a:defPPr>
-      <a:lvl1pPr marL="0" algn="l" defTabSz="1152144" rtl="0" eaLnBrk="1" latinLnBrk="0" hangingPunct="1">
-        <a:defRPr sz="2268" kern="1200">
+      <a:lvl1pPr marL="0" algn="l" defTabSz="685800" rtl="0" eaLnBrk="1" latinLnBrk="0" hangingPunct="1">
+        <a:defRPr sz="1350" kern="1200">
           <a:solidFill>
             <a:schemeClr val="tx1"/>
           </a:solidFill>
@@ -2871,8 +2871,8 @@
           <a:cs typeface="+mn-cs"/>
         </a:defRPr>
       </a:lvl1pPr>
-      <a:lvl2pPr marL="576072" algn="l" defTabSz="1152144" rtl="0" eaLnBrk="1" latinLnBrk="0" hangingPunct="1">
-        <a:defRPr sz="2268" kern="1200">
+      <a:lvl2pPr marL="342900" algn="l" defTabSz="685800" rtl="0" eaLnBrk="1" latinLnBrk="0" hangingPunct="1">
+        <a:defRPr sz="1350" kern="1200">
           <a:solidFill>
             <a:schemeClr val="tx1"/>
           </a:solidFill>
@@ -2881,8 +2881,8 @@
           <a:cs typeface="+mn-cs"/>
         </a:defRPr>
       </a:lvl2pPr>
-      <a:lvl3pPr marL="1152144" algn="l" defTabSz="1152144" rtl="0" eaLnBrk="1" latinLnBrk="0" hangingPunct="1">
-        <a:defRPr sz="2268" kern="1200">
+      <a:lvl3pPr marL="685800" algn="l" defTabSz="685800" rtl="0" eaLnBrk="1" latinLnBrk="0" hangingPunct="1">
+        <a:defRPr sz="1350" kern="1200">
           <a:solidFill>
             <a:schemeClr val="tx1"/>
           </a:solidFill>
@@ -2891,8 +2891,8 @@
           <a:cs typeface="+mn-cs"/>
         </a:defRPr>
       </a:lvl3pPr>
-      <a:lvl4pPr marL="1728216" algn="l" defTabSz="1152144" rtl="0" eaLnBrk="1" latinLnBrk="0" hangingPunct="1">
-        <a:defRPr sz="2268" kern="1200">
+      <a:lvl4pPr marL="1028700" algn="l" defTabSz="685800" rtl="0" eaLnBrk="1" latinLnBrk="0" hangingPunct="1">
+        <a:defRPr sz="1350" kern="1200">
           <a:solidFill>
             <a:schemeClr val="tx1"/>
           </a:solidFill>
@@ -2901,8 +2901,8 @@
           <a:cs typeface="+mn-cs"/>
         </a:defRPr>
       </a:lvl4pPr>
-      <a:lvl5pPr marL="2304288" algn="l" defTabSz="1152144" rtl="0" eaLnBrk="1" latinLnBrk="0" hangingPunct="1">
-        <a:defRPr sz="2268" kern="1200">
+      <a:lvl5pPr marL="1371600" algn="l" defTabSz="685800" rtl="0" eaLnBrk="1" latinLnBrk="0" hangingPunct="1">
+        <a:defRPr sz="1350" kern="1200">
           <a:solidFill>
             <a:schemeClr val="tx1"/>
           </a:solidFill>
@@ -2911,8 +2911,8 @@
           <a:cs typeface="+mn-cs"/>
         </a:defRPr>
       </a:lvl5pPr>
-      <a:lvl6pPr marL="2880360" algn="l" defTabSz="1152144" rtl="0" eaLnBrk="1" latinLnBrk="0" hangingPunct="1">
-        <a:defRPr sz="2268" kern="1200">
+      <a:lvl6pPr marL="1714500" algn="l" defTabSz="685800" rtl="0" eaLnBrk="1" latinLnBrk="0" hangingPunct="1">
+        <a:defRPr sz="1350" kern="1200">
           <a:solidFill>
             <a:schemeClr val="tx1"/>
           </a:solidFill>
@@ -2921,8 +2921,8 @@
           <a:cs typeface="+mn-cs"/>
         </a:defRPr>
       </a:lvl6pPr>
-      <a:lvl7pPr marL="3456432" algn="l" defTabSz="1152144" rtl="0" eaLnBrk="1" latinLnBrk="0" hangingPunct="1">
-        <a:defRPr sz="2268" kern="1200">
+      <a:lvl7pPr marL="2057400" algn="l" defTabSz="685800" rtl="0" eaLnBrk="1" latinLnBrk="0" hangingPunct="1">
+        <a:defRPr sz="1350" kern="1200">
           <a:solidFill>
             <a:schemeClr val="tx1"/>
           </a:solidFill>
@@ -2931,8 +2931,8 @@
           <a:cs typeface="+mn-cs"/>
         </a:defRPr>
       </a:lvl7pPr>
-      <a:lvl8pPr marL="4032504" algn="l" defTabSz="1152144" rtl="0" eaLnBrk="1" latinLnBrk="0" hangingPunct="1">
-        <a:defRPr sz="2268" kern="1200">
+      <a:lvl8pPr marL="2400300" algn="l" defTabSz="685800" rtl="0" eaLnBrk="1" latinLnBrk="0" hangingPunct="1">
+        <a:defRPr sz="1350" kern="1200">
           <a:solidFill>
             <a:schemeClr val="tx1"/>
           </a:solidFill>
@@ -2941,8 +2941,8 @@
           <a:cs typeface="+mn-cs"/>
         </a:defRPr>
       </a:lvl8pPr>
-      <a:lvl9pPr marL="4608576" algn="l" defTabSz="1152144" rtl="0" eaLnBrk="1" latinLnBrk="0" hangingPunct="1">
-        <a:defRPr sz="2268" kern="1200">
+      <a:lvl9pPr marL="2743200" algn="l" defTabSz="685800" rtl="0" eaLnBrk="1" latinLnBrk="0" hangingPunct="1">
+        <a:defRPr sz="1350" kern="1200">
           <a:solidFill>
             <a:schemeClr val="tx1"/>
           </a:solidFill>
@@ -2975,10 +2975,10 @@
       </p:grpSpPr>
       <p:sp>
         <p:nvSpPr>
-          <p:cNvPr id="14" name="Rectangle 13">
+          <p:cNvPr id="32" name="Rectangle 31">
             <a:extLst>
               <a:ext uri="{FF2B5EF4-FFF2-40B4-BE49-F238E27FC236}">
-                <a16:creationId xmlns:a16="http://schemas.microsoft.com/office/drawing/2014/main" id="{49301E68-2658-FC28-9ED9-D6061D4528E1}"/>
+                <a16:creationId xmlns:a16="http://schemas.microsoft.com/office/drawing/2014/main" id="{59D6B595-FEDD-6972-3FF7-B6570BA50955}"/>
               </a:ext>
             </a:extLst>
           </p:cNvPr>
@@ -2987,8 +2987,8 @@
         </p:nvSpPr>
         <p:spPr>
           <a:xfrm>
-            <a:off x="645459" y="472738"/>
-            <a:ext cx="11833412" cy="2337697"/>
+            <a:off x="-17889" y="472573"/>
+            <a:ext cx="6875889" cy="2337697"/>
           </a:xfrm>
           <a:prstGeom prst="rect">
             <a:avLst/>
@@ -3024,10 +3024,10 @@
       </p:sp>
       <p:pic>
         <p:nvPicPr>
-          <p:cNvPr id="2" name="Picture 1">
+          <p:cNvPr id="33" name="Picture 32">
             <a:extLst>
               <a:ext uri="{FF2B5EF4-FFF2-40B4-BE49-F238E27FC236}">
-                <a16:creationId xmlns:a16="http://schemas.microsoft.com/office/drawing/2014/main" id="{106D20F2-029E-DCFC-22C3-D28BB1D03C9D}"/>
+                <a16:creationId xmlns:a16="http://schemas.microsoft.com/office/drawing/2014/main" id="{2FFD272C-2F4A-8795-3978-F0262BAE1FB2}"/>
               </a:ext>
             </a:extLst>
           </p:cNvPr>
@@ -3044,8 +3044,8 @@
         </p:blipFill>
         <p:spPr>
           <a:xfrm>
-            <a:off x="283714" y="3088114"/>
-            <a:ext cx="4244546" cy="2829697"/>
+            <a:off x="51718" y="5248730"/>
+            <a:ext cx="2263342" cy="1508895"/>
           </a:xfrm>
           <a:prstGeom prst="rect">
             <a:avLst/>
@@ -3054,10 +3054,10 @@
       </p:pic>
       <p:pic>
         <p:nvPicPr>
-          <p:cNvPr id="3" name="Picture 2">
+          <p:cNvPr id="34" name="Picture 33">
             <a:extLst>
               <a:ext uri="{FF2B5EF4-FFF2-40B4-BE49-F238E27FC236}">
-                <a16:creationId xmlns:a16="http://schemas.microsoft.com/office/drawing/2014/main" id="{520AB600-93FB-DCD6-2AD8-6FFF6C580DDA}"/>
+                <a16:creationId xmlns:a16="http://schemas.microsoft.com/office/drawing/2014/main" id="{769FE343-96B7-D434-0429-C30A03C2EEBA}"/>
               </a:ext>
             </a:extLst>
           </p:cNvPr>
@@ -3074,8 +3074,8 @@
         </p:blipFill>
         <p:spPr>
           <a:xfrm>
-            <a:off x="4613731" y="3032531"/>
-            <a:ext cx="4244546" cy="2829697"/>
+            <a:off x="2315060" y="5258218"/>
+            <a:ext cx="2263343" cy="1508895"/>
           </a:xfrm>
           <a:prstGeom prst="rect">
             <a:avLst/>
@@ -3084,10 +3084,10 @@
       </p:pic>
       <p:pic>
         <p:nvPicPr>
-          <p:cNvPr id="4" name="Picture 3">
+          <p:cNvPr id="35" name="Picture 34">
             <a:extLst>
               <a:ext uri="{FF2B5EF4-FFF2-40B4-BE49-F238E27FC236}">
-                <a16:creationId xmlns:a16="http://schemas.microsoft.com/office/drawing/2014/main" id="{58282DE1-B4F2-5BA8-4C69-9CA0E7916BDF}"/>
+                <a16:creationId xmlns:a16="http://schemas.microsoft.com/office/drawing/2014/main" id="{4C8E19A7-61E0-E87A-1783-9DF8924ACB3C}"/>
               </a:ext>
             </a:extLst>
           </p:cNvPr>
@@ -3104,8 +3104,8 @@
         </p:blipFill>
         <p:spPr>
           <a:xfrm>
-            <a:off x="8801296" y="3088114"/>
-            <a:ext cx="4244546" cy="2829697"/>
+            <a:off x="4659556" y="5300838"/>
+            <a:ext cx="2263343" cy="1508895"/>
           </a:xfrm>
           <a:prstGeom prst="rect">
             <a:avLst/>
@@ -3114,10 +3114,10 @@
       </p:pic>
       <p:pic>
         <p:nvPicPr>
-          <p:cNvPr id="5" name="Picture 4">
+          <p:cNvPr id="36" name="Picture 35">
             <a:extLst>
               <a:ext uri="{FF2B5EF4-FFF2-40B4-BE49-F238E27FC236}">
-                <a16:creationId xmlns:a16="http://schemas.microsoft.com/office/drawing/2014/main" id="{A9A55AB3-D076-2483-B832-4A77F7CAB00C}"/>
+                <a16:creationId xmlns:a16="http://schemas.microsoft.com/office/drawing/2014/main" id="{85B161CD-0BA3-DEE6-DE77-33B6688B2EB3}"/>
               </a:ext>
             </a:extLst>
           </p:cNvPr>
@@ -3134,8 +3134,8 @@
         </p:blipFill>
         <p:spPr>
           <a:xfrm>
-            <a:off x="312204" y="5811066"/>
-            <a:ext cx="4244546" cy="2829697"/>
+            <a:off x="63116" y="6642846"/>
+            <a:ext cx="2263343" cy="1508895"/>
           </a:xfrm>
           <a:prstGeom prst="rect">
             <a:avLst/>
@@ -3144,10 +3144,10 @@
       </p:pic>
       <p:pic>
         <p:nvPicPr>
-          <p:cNvPr id="6" name="Picture 5">
+          <p:cNvPr id="37" name="Picture 36">
             <a:extLst>
               <a:ext uri="{FF2B5EF4-FFF2-40B4-BE49-F238E27FC236}">
-                <a16:creationId xmlns:a16="http://schemas.microsoft.com/office/drawing/2014/main" id="{322755DE-40EC-46E2-6F43-00D4DAF66F29}"/>
+                <a16:creationId xmlns:a16="http://schemas.microsoft.com/office/drawing/2014/main" id="{B003B5DF-8C2D-2980-4B55-6C5AAA102ACD}"/>
               </a:ext>
             </a:extLst>
           </p:cNvPr>
@@ -3164,170 +3164,191 @@
         </p:blipFill>
         <p:spPr>
           <a:xfrm>
-            <a:off x="4613731" y="5811065"/>
-            <a:ext cx="4244546" cy="2829697"/>
+            <a:off x="2315060" y="6642846"/>
+            <a:ext cx="2263343" cy="1508895"/>
           </a:xfrm>
           <a:prstGeom prst="rect">
             <a:avLst/>
           </a:prstGeom>
         </p:spPr>
       </p:pic>
-      <p:pic>
-        <p:nvPicPr>
-          <p:cNvPr id="7" name="Picture 6" descr="A diagram of a line and a line&#10;&#10;AI-generated content may be incorrect.">
+      <p:grpSp>
+        <p:nvGrpSpPr>
+          <p:cNvPr id="47" name="Group 46">
             <a:extLst>
               <a:ext uri="{FF2B5EF4-FFF2-40B4-BE49-F238E27FC236}">
-                <a16:creationId xmlns:a16="http://schemas.microsoft.com/office/drawing/2014/main" id="{8C3ED990-5567-7F3C-6167-016C1DA1BF6D}"/>
+                <a16:creationId xmlns:a16="http://schemas.microsoft.com/office/drawing/2014/main" id="{59701657-C862-AE98-2A37-2964465CA553}"/>
               </a:ext>
             </a:extLst>
           </p:cNvPr>
-          <p:cNvPicPr>
-            <a:picLocks noChangeAspect="1"/>
-          </p:cNvPicPr>
+          <p:cNvGrpSpPr/>
           <p:nvPr/>
-        </p:nvPicPr>
-        <p:blipFill>
-          <a:blip r:embed="rId7"/>
-          <a:stretch>
-            <a:fillRect/>
-          </a:stretch>
-        </p:blipFill>
-        <p:spPr>
+        </p:nvGrpSpPr>
+        <p:grpSpPr>
           <a:xfrm>
-            <a:off x="1315144" y="503035"/>
-            <a:ext cx="1079500" cy="1079500"/>
+            <a:off x="63116" y="602769"/>
+            <a:ext cx="6205203" cy="1144066"/>
+            <a:chOff x="598764" y="472573"/>
+            <a:chExt cx="6205203" cy="1144066"/>
           </a:xfrm>
-          <a:prstGeom prst="rect">
-            <a:avLst/>
-          </a:prstGeom>
-        </p:spPr>
-      </p:pic>
-      <p:pic>
-        <p:nvPicPr>
-          <p:cNvPr id="8" name="Picture 7" descr="A diagram of a line with arrows&#10;&#10;AI-generated content may be incorrect.">
+        </p:grpSpPr>
+        <p:pic>
+          <p:nvPicPr>
+            <p:cNvPr id="38" name="Picture 37" descr="A diagram of a line and a line&#10;&#10;AI-generated content may be incorrect.">
+              <a:extLst>
+                <a:ext uri="{FF2B5EF4-FFF2-40B4-BE49-F238E27FC236}">
+                  <a16:creationId xmlns:a16="http://schemas.microsoft.com/office/drawing/2014/main" id="{5663BBC1-9944-BADD-479C-D3D6BC0779FE}"/>
+                </a:ext>
+              </a:extLst>
+            </p:cNvPr>
+            <p:cNvPicPr>
+              <a:picLocks noChangeAspect="1"/>
+            </p:cNvPicPr>
+            <p:nvPr/>
+          </p:nvPicPr>
+          <p:blipFill>
+            <a:blip r:embed="rId7"/>
+            <a:stretch>
+              <a:fillRect/>
+            </a:stretch>
+          </p:blipFill>
+          <p:spPr>
+            <a:xfrm>
+              <a:off x="598764" y="537139"/>
+              <a:ext cx="1079500" cy="1079500"/>
+            </a:xfrm>
+            <a:prstGeom prst="rect">
+              <a:avLst/>
+            </a:prstGeom>
+          </p:spPr>
+        </p:pic>
+        <p:pic>
+          <p:nvPicPr>
+            <p:cNvPr id="39" name="Picture 38" descr="A diagram of a line with arrows&#10;&#10;AI-generated content may be incorrect.">
+              <a:extLst>
+                <a:ext uri="{FF2B5EF4-FFF2-40B4-BE49-F238E27FC236}">
+                  <a16:creationId xmlns:a16="http://schemas.microsoft.com/office/drawing/2014/main" id="{7D0BD0E4-2745-2486-E59C-AC1A7466046D}"/>
+                </a:ext>
+              </a:extLst>
+            </p:cNvPr>
+            <p:cNvPicPr>
+              <a:picLocks noChangeAspect="1"/>
+            </p:cNvPicPr>
+            <p:nvPr/>
+          </p:nvPicPr>
+          <p:blipFill>
+            <a:blip r:embed="rId8"/>
+            <a:stretch>
+              <a:fillRect/>
+            </a:stretch>
+          </p:blipFill>
+          <p:spPr>
+            <a:xfrm>
+              <a:off x="1912814" y="537139"/>
+              <a:ext cx="1079500" cy="1079500"/>
+            </a:xfrm>
+            <a:prstGeom prst="rect">
+              <a:avLst/>
+            </a:prstGeom>
+          </p:spPr>
+        </p:pic>
+        <p:pic>
+          <p:nvPicPr>
+            <p:cNvPr id="40" name="Picture 39" descr="A diagram of a line with arrows&#10;&#10;AI-generated content may be incorrect.">
+              <a:extLst>
+                <a:ext uri="{FF2B5EF4-FFF2-40B4-BE49-F238E27FC236}">
+                  <a16:creationId xmlns:a16="http://schemas.microsoft.com/office/drawing/2014/main" id="{4C168C57-B3DC-7685-662D-C272E3BB37DF}"/>
+                </a:ext>
+              </a:extLst>
+            </p:cNvPr>
+            <p:cNvPicPr>
+              <a:picLocks noChangeAspect="1"/>
+            </p:cNvPicPr>
+            <p:nvPr/>
+          </p:nvPicPr>
+          <p:blipFill>
+            <a:blip r:embed="rId9"/>
+            <a:stretch>
+              <a:fillRect/>
+            </a:stretch>
+          </p:blipFill>
+          <p:spPr>
+            <a:xfrm>
+              <a:off x="3183365" y="518289"/>
+              <a:ext cx="1079500" cy="1079500"/>
+            </a:xfrm>
+            <a:prstGeom prst="rect">
+              <a:avLst/>
+            </a:prstGeom>
+          </p:spPr>
+        </p:pic>
+        <p:pic>
+          <p:nvPicPr>
+            <p:cNvPr id="41" name="Picture 40" descr="A diagram of a square with arrows&#10;&#10;AI-generated content may be incorrect.">
+              <a:extLst>
+                <a:ext uri="{FF2B5EF4-FFF2-40B4-BE49-F238E27FC236}">
+                  <a16:creationId xmlns:a16="http://schemas.microsoft.com/office/drawing/2014/main" id="{B25003F4-DBBE-1A1D-2B31-C33AA7AF5619}"/>
+                </a:ext>
+              </a:extLst>
+            </p:cNvPr>
+            <p:cNvPicPr>
+              <a:picLocks noChangeAspect="1"/>
+            </p:cNvPicPr>
+            <p:nvPr/>
+          </p:nvPicPr>
+          <p:blipFill>
+            <a:blip r:embed="rId10"/>
+            <a:stretch>
+              <a:fillRect/>
+            </a:stretch>
+          </p:blipFill>
+          <p:spPr>
+            <a:xfrm>
+              <a:off x="4453916" y="479300"/>
+              <a:ext cx="1079500" cy="1079500"/>
+            </a:xfrm>
+            <a:prstGeom prst="rect">
+              <a:avLst/>
+            </a:prstGeom>
+          </p:spPr>
+        </p:pic>
+        <p:pic>
+          <p:nvPicPr>
+            <p:cNvPr id="42" name="Picture 41" descr="A diagram of a line with arrows&#10;&#10;AI-generated content may be incorrect.">
+              <a:extLst>
+                <a:ext uri="{FF2B5EF4-FFF2-40B4-BE49-F238E27FC236}">
+                  <a16:creationId xmlns:a16="http://schemas.microsoft.com/office/drawing/2014/main" id="{222B32F2-25C8-851B-4FB2-F30C6BF6BFC6}"/>
+                </a:ext>
+              </a:extLst>
+            </p:cNvPr>
+            <p:cNvPicPr>
+              <a:picLocks noChangeAspect="1"/>
+            </p:cNvPicPr>
+            <p:nvPr/>
+          </p:nvPicPr>
+          <p:blipFill>
+            <a:blip r:embed="rId11"/>
+            <a:stretch>
+              <a:fillRect/>
+            </a:stretch>
+          </p:blipFill>
+          <p:spPr>
+            <a:xfrm>
+              <a:off x="5724467" y="472573"/>
+              <a:ext cx="1079500" cy="1079500"/>
+            </a:xfrm>
+            <a:prstGeom prst="rect">
+              <a:avLst/>
+            </a:prstGeom>
+          </p:spPr>
+        </p:pic>
+      </p:grpSp>
+      <p:sp>
+        <p:nvSpPr>
+          <p:cNvPr id="43" name="TextBox 42">
             <a:extLst>
               <a:ext uri="{FF2B5EF4-FFF2-40B4-BE49-F238E27FC236}">
-                <a16:creationId xmlns:a16="http://schemas.microsoft.com/office/drawing/2014/main" id="{D099AF8A-124C-4A43-5966-BF4CEBE4EECA}"/>
-              </a:ext>
-            </a:extLst>
-          </p:cNvPr>
-          <p:cNvPicPr>
-            <a:picLocks noChangeAspect="1"/>
-          </p:cNvPicPr>
-          <p:nvPr/>
-        </p:nvPicPr>
-        <p:blipFill>
-          <a:blip r:embed="rId8"/>
-          <a:stretch>
-            <a:fillRect/>
-          </a:stretch>
-        </p:blipFill>
-        <p:spPr>
-          <a:xfrm>
-            <a:off x="2835190" y="499076"/>
-            <a:ext cx="1079500" cy="1079500"/>
-          </a:xfrm>
-          <a:prstGeom prst="rect">
-            <a:avLst/>
-          </a:prstGeom>
-        </p:spPr>
-      </p:pic>
-      <p:pic>
-        <p:nvPicPr>
-          <p:cNvPr id="9" name="Picture 8" descr="A diagram of a line with arrows&#10;&#10;AI-generated content may be incorrect.">
-            <a:extLst>
-              <a:ext uri="{FF2B5EF4-FFF2-40B4-BE49-F238E27FC236}">
-                <a16:creationId xmlns:a16="http://schemas.microsoft.com/office/drawing/2014/main" id="{8355A04D-36E1-D59D-C042-1EEB57D5B306}"/>
-              </a:ext>
-            </a:extLst>
-          </p:cNvPr>
-          <p:cNvPicPr>
-            <a:picLocks noChangeAspect="1"/>
-          </p:cNvPicPr>
-          <p:nvPr/>
-        </p:nvPicPr>
-        <p:blipFill>
-          <a:blip r:embed="rId9"/>
-          <a:stretch>
-            <a:fillRect/>
-          </a:stretch>
-        </p:blipFill>
-        <p:spPr>
-          <a:xfrm>
-            <a:off x="4641824" y="499076"/>
-            <a:ext cx="1079500" cy="1079500"/>
-          </a:xfrm>
-          <a:prstGeom prst="rect">
-            <a:avLst/>
-          </a:prstGeom>
-        </p:spPr>
-      </p:pic>
-      <p:pic>
-        <p:nvPicPr>
-          <p:cNvPr id="10" name="Picture 9" descr="A diagram of a square with arrows&#10;&#10;AI-generated content may be incorrect.">
-            <a:extLst>
-              <a:ext uri="{FF2B5EF4-FFF2-40B4-BE49-F238E27FC236}">
-                <a16:creationId xmlns:a16="http://schemas.microsoft.com/office/drawing/2014/main" id="{E243F042-E1F9-8571-3369-C2788C5EFBAE}"/>
-              </a:ext>
-            </a:extLst>
-          </p:cNvPr>
-          <p:cNvPicPr>
-            <a:picLocks noChangeAspect="1"/>
-          </p:cNvPicPr>
-          <p:nvPr/>
-        </p:nvPicPr>
-        <p:blipFill>
-          <a:blip r:embed="rId10"/>
-          <a:stretch>
-            <a:fillRect/>
-          </a:stretch>
-        </p:blipFill>
-        <p:spPr>
-          <a:xfrm>
-            <a:off x="6448458" y="499076"/>
-            <a:ext cx="1079500" cy="1079500"/>
-          </a:xfrm>
-          <a:prstGeom prst="rect">
-            <a:avLst/>
-          </a:prstGeom>
-        </p:spPr>
-      </p:pic>
-      <p:pic>
-        <p:nvPicPr>
-          <p:cNvPr id="11" name="Picture 10" descr="A diagram of a line with arrows&#10;&#10;AI-generated content may be incorrect.">
-            <a:extLst>
-              <a:ext uri="{FF2B5EF4-FFF2-40B4-BE49-F238E27FC236}">
-                <a16:creationId xmlns:a16="http://schemas.microsoft.com/office/drawing/2014/main" id="{F0220976-C054-57B3-B203-A33D55E7E2DE}"/>
-              </a:ext>
-            </a:extLst>
-          </p:cNvPr>
-          <p:cNvPicPr>
-            <a:picLocks noChangeAspect="1"/>
-          </p:cNvPicPr>
-          <p:nvPr/>
-        </p:nvPicPr>
-        <p:blipFill>
-          <a:blip r:embed="rId11"/>
-          <a:stretch>
-            <a:fillRect/>
-          </a:stretch>
-        </p:blipFill>
-        <p:spPr>
-          <a:xfrm>
-            <a:off x="8255092" y="499076"/>
-            <a:ext cx="1079500" cy="1079500"/>
-          </a:xfrm>
-          <a:prstGeom prst="rect">
-            <a:avLst/>
-          </a:prstGeom>
-        </p:spPr>
-      </p:pic>
-      <p:sp>
-        <p:nvSpPr>
-          <p:cNvPr id="13" name="TextBox 12">
-            <a:extLst>
-              <a:ext uri="{FF2B5EF4-FFF2-40B4-BE49-F238E27FC236}">
-                <a16:creationId xmlns:a16="http://schemas.microsoft.com/office/drawing/2014/main" id="{6E411B07-FD69-DE7E-6D2B-5375FD1890EB}"/>
+                <a16:creationId xmlns:a16="http://schemas.microsoft.com/office/drawing/2014/main" id="{064035D3-7CED-8FC8-178F-F7E4BE8FC013}"/>
               </a:ext>
             </a:extLst>
           </p:cNvPr>
@@ -3336,8 +3357,8 @@
         </p:nvSpPr>
         <p:spPr>
           <a:xfrm>
-            <a:off x="874597" y="1592023"/>
-            <a:ext cx="11232302" cy="1384995"/>
+            <a:off x="51718" y="1877452"/>
+            <a:ext cx="11232302" cy="1107996"/>
           </a:xfrm>
           <a:prstGeom prst="rect">
             <a:avLst/>
@@ -3350,159 +3371,144 @@
           </a:bodyPr>
           <a:lstStyle/>
           <a:p>
-            <a:pPr marL="285750" lvl="2" indent="-285750">
-              <a:buFont typeface="Arial" panose="020B0604020202020204" pitchFamily="34" charset="0"/>
-              <a:buChar char="•"/>
-            </a:pPr>
-            <a:r>
-              <a:rPr lang="en-CA" sz="1400" b="1" dirty="0"/>
+            <a:pPr marL="0" lvl="2"/>
+            <a:r>
+              <a:rPr lang="en-CA" sz="1100" b="1" dirty="0"/>
               <a:t>Category 1</a:t>
             </a:r>
             <a:r>
-              <a:rPr lang="en-CA" sz="1400" dirty="0"/>
+              <a:rPr lang="en-CA" sz="1100" dirty="0"/>
               <a:t>: tumour growth </a:t>
             </a:r>
             <a:r>
-              <a:rPr lang="en-CA" sz="1400" b="1" dirty="0"/>
+              <a:rPr lang="en-CA" sz="1100" b="1" dirty="0"/>
               <a:t>similar to control</a:t>
             </a:r>
             <a:r>
-              <a:rPr lang="en-CA" sz="1400" dirty="0"/>
+              <a:rPr lang="en-CA" sz="1100" dirty="0"/>
               <a:t>.</a:t>
             </a:r>
           </a:p>
           <a:p>
-            <a:pPr marL="285750" lvl="2" indent="-285750">
-              <a:buFont typeface="Arial" panose="020B0604020202020204" pitchFamily="34" charset="0"/>
-              <a:buChar char="•"/>
-            </a:pPr>
-            <a:r>
-              <a:rPr lang="en-CA" sz="1400" b="1" dirty="0"/>
+            <a:pPr marL="0" lvl="2"/>
+            <a:r>
+              <a:rPr lang="en-CA" sz="1100" b="1" dirty="0"/>
               <a:t>Category 2</a:t>
             </a:r>
             <a:r>
-              <a:rPr lang="en-CA" sz="1400" dirty="0"/>
+              <a:rPr lang="en-CA" sz="1100" dirty="0"/>
               <a:t>: tumour growth is </a:t>
             </a:r>
             <a:r>
-              <a:rPr lang="en-CA" sz="1400" b="1" dirty="0"/>
+              <a:rPr lang="en-CA" sz="1100" b="1" dirty="0"/>
               <a:t>inhibited compared to control</a:t>
             </a:r>
             <a:r>
-              <a:rPr lang="en-CA" sz="1400" dirty="0"/>
+              <a:rPr lang="en-CA" sz="1100" dirty="0"/>
               <a:t>, but tumour is still </a:t>
             </a:r>
             <a:r>
-              <a:rPr lang="en-CA" sz="1400" b="1" dirty="0"/>
+              <a:rPr lang="en-CA" sz="1100" b="1" dirty="0"/>
               <a:t>enlarging</a:t>
             </a:r>
             <a:r>
-              <a:rPr lang="en-CA" sz="1400" dirty="0"/>
+              <a:rPr lang="en-CA" sz="1100" dirty="0"/>
               <a:t> compared to time 0.</a:t>
             </a:r>
           </a:p>
           <a:p>
-            <a:pPr marL="285750" lvl="2" indent="-285750">
-              <a:buFont typeface="Arial" panose="020B0604020202020204" pitchFamily="34" charset="0"/>
-              <a:buChar char="•"/>
-            </a:pPr>
-            <a:r>
-              <a:rPr lang="en-CA" sz="1400" b="1" dirty="0"/>
+            <a:pPr marL="0" lvl="2"/>
+            <a:r>
+              <a:rPr lang="en-CA" sz="1100" b="1" dirty="0"/>
               <a:t>Category 3</a:t>
             </a:r>
             <a:r>
-              <a:rPr lang="en-CA" sz="1400" dirty="0"/>
+              <a:rPr lang="en-CA" sz="1100" dirty="0"/>
               <a:t>: tumour growth is </a:t>
             </a:r>
             <a:r>
-              <a:rPr lang="en-CA" sz="1400" b="1" dirty="0"/>
+              <a:rPr lang="en-CA" sz="1100" b="1" dirty="0"/>
               <a:t>inhibited compared to control</a:t>
             </a:r>
             <a:r>
-              <a:rPr lang="en-CA" sz="1400" dirty="0"/>
+              <a:rPr lang="en-CA" sz="1100" dirty="0"/>
               <a:t>, and tumour volume stays </a:t>
             </a:r>
             <a:r>
-              <a:rPr lang="en-CA" sz="1400" b="1" dirty="0"/>
+              <a:rPr lang="en-CA" sz="1100" b="1" dirty="0"/>
               <a:t>stable</a:t>
             </a:r>
             <a:r>
-              <a:rPr lang="en-CA" sz="1400" dirty="0"/>
+              <a:rPr lang="en-CA" sz="1100" dirty="0"/>
               <a:t>.</a:t>
             </a:r>
           </a:p>
           <a:p>
-            <a:pPr marL="285750" lvl="2" indent="-285750">
-              <a:buFont typeface="Arial" panose="020B0604020202020204" pitchFamily="34" charset="0"/>
-              <a:buChar char="•"/>
-            </a:pPr>
-            <a:r>
-              <a:rPr lang="en-CA" sz="1400" b="1" dirty="0"/>
+            <a:pPr marL="0" lvl="2"/>
+            <a:r>
+              <a:rPr lang="en-CA" sz="1100" b="1" dirty="0"/>
               <a:t>Category 4</a:t>
             </a:r>
             <a:r>
-              <a:rPr lang="en-CA" sz="1400" dirty="0"/>
+              <a:rPr lang="en-CA" sz="1100" dirty="0"/>
               <a:t>: tumour growth is </a:t>
             </a:r>
             <a:r>
-              <a:rPr lang="en-CA" sz="1400" b="1" dirty="0"/>
+              <a:rPr lang="en-CA" sz="1100" b="1" dirty="0"/>
               <a:t>inhibited compared to control</a:t>
             </a:r>
             <a:r>
-              <a:rPr lang="en-CA" sz="1400" dirty="0"/>
+              <a:rPr lang="en-CA" sz="1100" dirty="0"/>
               <a:t>, and tumour volume is </a:t>
             </a:r>
             <a:r>
-              <a:rPr lang="en-CA" sz="1400" b="1" dirty="0"/>
+              <a:rPr lang="en-CA" sz="1100" b="1" dirty="0"/>
               <a:t>shrinking</a:t>
             </a:r>
             <a:r>
-              <a:rPr lang="en-CA" sz="1400" dirty="0"/>
+              <a:rPr lang="en-CA" sz="1100" dirty="0"/>
               <a:t>.</a:t>
             </a:r>
           </a:p>
           <a:p>
-            <a:pPr marL="285750" lvl="2" indent="-285750">
-              <a:buFont typeface="Arial" panose="020B0604020202020204" pitchFamily="34" charset="0"/>
-              <a:buChar char="•"/>
-            </a:pPr>
-            <a:r>
-              <a:rPr lang="en-CA" sz="1400" b="1" dirty="0"/>
+            <a:pPr marL="0" lvl="2"/>
+            <a:r>
+              <a:rPr lang="en-CA" sz="1100" b="1" dirty="0"/>
               <a:t>Category 5</a:t>
             </a:r>
             <a:r>
-              <a:rPr lang="en-CA" sz="1400" dirty="0"/>
+              <a:rPr lang="en-CA" sz="1100" dirty="0"/>
               <a:t>: tumour growth is </a:t>
             </a:r>
             <a:r>
-              <a:rPr lang="en-CA" sz="1400" b="1" dirty="0"/>
+              <a:rPr lang="en-CA" sz="1100" b="1" dirty="0"/>
               <a:t>inhibited compared to control</a:t>
             </a:r>
             <a:r>
-              <a:rPr lang="en-CA" sz="1400" dirty="0"/>
+              <a:rPr lang="en-CA" sz="1100" dirty="0"/>
               <a:t>, and tumour </a:t>
             </a:r>
             <a:r>
-              <a:rPr lang="en-CA" sz="1400" b="1" dirty="0"/>
+              <a:rPr lang="en-CA" sz="1100" b="1" dirty="0"/>
               <a:t>disappeared</a:t>
             </a:r>
             <a:r>
-              <a:rPr lang="en-CA" sz="1400" dirty="0"/>
+              <a:rPr lang="en-CA" sz="1100" dirty="0"/>
               <a:t> during treatment.</a:t>
             </a:r>
             <a:br>
-              <a:rPr lang="en-CA" sz="1400" dirty="0"/>
+              <a:rPr lang="en-CA" sz="1100" dirty="0"/>
             </a:br>
-            <a:endParaRPr lang="en-US" sz="1400" dirty="0"/>
-          </a:p>
-        </p:txBody>
-      </p:sp>
-      <p:sp>
-        <p:nvSpPr>
-          <p:cNvPr id="15" name="TextBox 14">
+            <a:endParaRPr lang="en-US" sz="1100" dirty="0"/>
+          </a:p>
+        </p:txBody>
+      </p:sp>
+      <p:sp>
+        <p:nvSpPr>
+          <p:cNvPr id="44" name="TextBox 43">
             <a:extLst>
               <a:ext uri="{FF2B5EF4-FFF2-40B4-BE49-F238E27FC236}">
-                <a16:creationId xmlns:a16="http://schemas.microsoft.com/office/drawing/2014/main" id="{B5381927-DCEA-91BA-B0D1-9518DE6D9AC6}"/>
+                <a16:creationId xmlns:a16="http://schemas.microsoft.com/office/drawing/2014/main" id="{A3DA15C7-87E7-D27C-2016-E443C860FAAF}"/>
               </a:ext>
             </a:extLst>
           </p:cNvPr>
@@ -3511,7 +3517,7 @@
         </p:nvSpPr>
         <p:spPr>
           <a:xfrm>
-            <a:off x="103436" y="3031498"/>
+            <a:off x="63116" y="5073552"/>
             <a:ext cx="645459" cy="369332"/>
           </a:xfrm>
           <a:prstGeom prst="rect">
@@ -3527,17 +3533,17 @@
           <a:p>
             <a:r>
               <a:rPr lang="en-US" dirty="0"/>
-              <a:t>b</a:t>
-            </a:r>
-          </a:p>
-        </p:txBody>
-      </p:sp>
-      <p:sp>
-        <p:nvSpPr>
-          <p:cNvPr id="16" name="TextBox 15">
+              <a:t>c</a:t>
+            </a:r>
+          </a:p>
+        </p:txBody>
+      </p:sp>
+      <p:sp>
+        <p:nvSpPr>
+          <p:cNvPr id="45" name="TextBox 44">
             <a:extLst>
               <a:ext uri="{FF2B5EF4-FFF2-40B4-BE49-F238E27FC236}">
-                <a16:creationId xmlns:a16="http://schemas.microsoft.com/office/drawing/2014/main" id="{6C4B2921-2C22-BC2E-39D8-F901E91E7B0A}"/>
+                <a16:creationId xmlns:a16="http://schemas.microsoft.com/office/drawing/2014/main" id="{0FCC7381-CD9B-53E4-B5CC-A144492FEA72}"/>
               </a:ext>
             </a:extLst>
           </p:cNvPr>
@@ -3569,10 +3575,10 @@
       </p:sp>
       <p:sp>
         <p:nvSpPr>
-          <p:cNvPr id="17" name="TextBox 16">
+          <p:cNvPr id="46" name="TextBox 45">
             <a:extLst>
               <a:ext uri="{FF2B5EF4-FFF2-40B4-BE49-F238E27FC236}">
-                <a16:creationId xmlns:a16="http://schemas.microsoft.com/office/drawing/2014/main" id="{7A9C7928-EA86-7768-97ED-E355E65B01FE}"/>
+                <a16:creationId xmlns:a16="http://schemas.microsoft.com/office/drawing/2014/main" id="{392FB957-4558-61DD-3EE3-35DE4441E5A2}"/>
               </a:ext>
             </a:extLst>
           </p:cNvPr>
@@ -3581,8 +3587,8 @@
         </p:nvSpPr>
         <p:spPr>
           <a:xfrm>
-            <a:off x="748895" y="107576"/>
-            <a:ext cx="9134693" cy="369332"/>
+            <a:off x="877484" y="205344"/>
+            <a:ext cx="9134693" cy="276999"/>
           </a:xfrm>
           <a:prstGeom prst="rect">
             <a:avLst/>
@@ -3596,18 +3602,981 @@
           <a:lstStyle/>
           <a:p>
             <a:r>
-              <a:rPr lang="en-US"/>
-              <a:t>Drug sensitivity categorization criteria </a:t>
-            </a:r>
+              <a:rPr lang="en-US" sz="1200" dirty="0"/>
+              <a:t>Drug sensitivity categorization criteria provided to panel of experts </a:t>
+            </a:r>
+          </a:p>
+        </p:txBody>
+      </p:sp>
+      <p:sp>
+        <p:nvSpPr>
+          <p:cNvPr id="48" name="TextBox 47">
+            <a:extLst>
+              <a:ext uri="{FF2B5EF4-FFF2-40B4-BE49-F238E27FC236}">
+                <a16:creationId xmlns:a16="http://schemas.microsoft.com/office/drawing/2014/main" id="{095A47D1-BF2A-FC0B-06EE-ED58D52DC9DF}"/>
+              </a:ext>
+            </a:extLst>
+          </p:cNvPr>
+          <p:cNvSpPr txBox="1"/>
+          <p:nvPr/>
+        </p:nvSpPr>
+        <p:spPr>
+          <a:xfrm>
+            <a:off x="-42593" y="2870380"/>
+            <a:ext cx="645459" cy="369332"/>
+          </a:xfrm>
+          <a:prstGeom prst="rect">
+            <a:avLst/>
+          </a:prstGeom>
+          <a:noFill/>
+        </p:spPr>
+        <p:txBody>
+          <a:bodyPr wrap="square" rtlCol="0">
+            <a:spAutoFit/>
+          </a:bodyPr>
+          <a:lstStyle/>
+          <a:p>
             <a:r>
               <a:rPr lang="en-US" dirty="0"/>
-              <a:t>p</a:t>
-            </a:r>
-            <a:r>
-              <a:rPr lang="en-US"/>
-              <a:t>rovided to panel of experts </a:t>
-            </a:r>
-            <a:endParaRPr lang="en-US" dirty="0"/>
+              <a:t>b</a:t>
+            </a:r>
+          </a:p>
+        </p:txBody>
+      </p:sp>
+      <p:graphicFrame>
+        <p:nvGraphicFramePr>
+          <p:cNvPr id="49" name="Table 48">
+            <a:extLst>
+              <a:ext uri="{FF2B5EF4-FFF2-40B4-BE49-F238E27FC236}">
+                <a16:creationId xmlns:a16="http://schemas.microsoft.com/office/drawing/2014/main" id="{C9324BBA-4C77-6DA7-5E95-2E6A2C95DF16}"/>
+              </a:ext>
+            </a:extLst>
+          </p:cNvPr>
+          <p:cNvGraphicFramePr>
+            <a:graphicFrameLocks noGrp="1"/>
+          </p:cNvGraphicFramePr>
+          <p:nvPr>
+            <p:extLst>
+              <p:ext uri="{D42A27DB-BD31-4B8C-83A1-F6EECF244321}">
+                <p14:modId xmlns:p14="http://schemas.microsoft.com/office/powerpoint/2010/main" val="131984250"/>
+              </p:ext>
+            </p:extLst>
+          </p:nvPr>
+        </p:nvGraphicFramePr>
+        <p:xfrm>
+          <a:off x="500642" y="3545329"/>
+          <a:ext cx="5838825" cy="1390650"/>
+        </p:xfrm>
+        <a:graphic>
+          <a:graphicData uri="http://schemas.openxmlformats.org/drawingml/2006/table">
+            <a:tbl>
+              <a:tblPr>
+                <a:tableStyleId>{5C22544A-7EE6-4342-B048-85BDC9FD1C3A}</a:tableStyleId>
+              </a:tblPr>
+              <a:tblGrid>
+                <a:gridCol w="1076325">
+                  <a:extLst>
+                    <a:ext uri="{9D8B030D-6E8A-4147-A177-3AD203B41FA5}">
+                      <a16:colId xmlns:a16="http://schemas.microsoft.com/office/drawing/2014/main" val="3786986377"/>
+                    </a:ext>
+                  </a:extLst>
+                </a:gridCol>
+                <a:gridCol w="790575">
+                  <a:extLst>
+                    <a:ext uri="{9D8B030D-6E8A-4147-A177-3AD203B41FA5}">
+                      <a16:colId xmlns:a16="http://schemas.microsoft.com/office/drawing/2014/main" val="3387928180"/>
+                    </a:ext>
+                  </a:extLst>
+                </a:gridCol>
+                <a:gridCol w="847725">
+                  <a:extLst>
+                    <a:ext uri="{9D8B030D-6E8A-4147-A177-3AD203B41FA5}">
+                      <a16:colId xmlns:a16="http://schemas.microsoft.com/office/drawing/2014/main" val="3597018781"/>
+                    </a:ext>
+                  </a:extLst>
+                </a:gridCol>
+                <a:gridCol w="790575">
+                  <a:extLst>
+                    <a:ext uri="{9D8B030D-6E8A-4147-A177-3AD203B41FA5}">
+                      <a16:colId xmlns:a16="http://schemas.microsoft.com/office/drawing/2014/main" val="2678992680"/>
+                    </a:ext>
+                  </a:extLst>
+                </a:gridCol>
+                <a:gridCol w="800100">
+                  <a:extLst>
+                    <a:ext uri="{9D8B030D-6E8A-4147-A177-3AD203B41FA5}">
+                      <a16:colId xmlns:a16="http://schemas.microsoft.com/office/drawing/2014/main" val="2893791960"/>
+                    </a:ext>
+                  </a:extLst>
+                </a:gridCol>
+                <a:gridCol w="847725">
+                  <a:extLst>
+                    <a:ext uri="{9D8B030D-6E8A-4147-A177-3AD203B41FA5}">
+                      <a16:colId xmlns:a16="http://schemas.microsoft.com/office/drawing/2014/main" val="2336869789"/>
+                    </a:ext>
+                  </a:extLst>
+                </a:gridCol>
+                <a:gridCol w="685800">
+                  <a:extLst>
+                    <a:ext uri="{9D8B030D-6E8A-4147-A177-3AD203B41FA5}">
+                      <a16:colId xmlns:a16="http://schemas.microsoft.com/office/drawing/2014/main" val="2972452092"/>
+                    </a:ext>
+                  </a:extLst>
+                </a:gridCol>
+              </a:tblGrid>
+              <a:tr h="254792">
+                <a:tc>
+                  <a:txBody>
+                    <a:bodyPr/>
+                    <a:lstStyle/>
+                    <a:p>
+                      <a:pPr fontAlgn="t">
+                        <a:buNone/>
+                      </a:pPr>
+                      <a:r>
+                        <a:rPr lang="en-CA" sz="1200">
+                          <a:effectLst/>
+                        </a:rPr>
+                        <a:t> </a:t>
+                      </a:r>
+                    </a:p>
+                  </a:txBody>
+                  <a:tcPr marL="95250" marR="95250" marT="47625" marB="47625"/>
+                </a:tc>
+                <a:tc>
+                  <a:txBody>
+                    <a:bodyPr/>
+                    <a:lstStyle/>
+                    <a:p>
+                      <a:pPr algn="ctr" rtl="0" fontAlgn="t">
+                        <a:buNone/>
+                      </a:pPr>
+                      <a:r>
+                        <a:rPr lang="en-CA" sz="1200" u="none" strike="noStrike">
+                          <a:effectLst/>
+                        </a:rPr>
+                        <a:t>Cat_1</a:t>
+                      </a:r>
+                      <a:endParaRPr lang="en-CA" sz="1200">
+                        <a:effectLst/>
+                      </a:endParaRPr>
+                    </a:p>
+                  </a:txBody>
+                  <a:tcPr marL="95250" marR="95250" marT="47625" marB="47625"/>
+                </a:tc>
+                <a:tc>
+                  <a:txBody>
+                    <a:bodyPr/>
+                    <a:lstStyle/>
+                    <a:p>
+                      <a:pPr algn="ctr" rtl="0" fontAlgn="t">
+                        <a:buNone/>
+                      </a:pPr>
+                      <a:r>
+                        <a:rPr lang="en-CA" sz="1200" u="none" strike="noStrike">
+                          <a:effectLst/>
+                        </a:rPr>
+                        <a:t>Cat_2</a:t>
+                      </a:r>
+                      <a:endParaRPr lang="en-CA" sz="1200">
+                        <a:effectLst/>
+                      </a:endParaRPr>
+                    </a:p>
+                  </a:txBody>
+                  <a:tcPr marL="95250" marR="95250" marT="47625" marB="47625"/>
+                </a:tc>
+                <a:tc>
+                  <a:txBody>
+                    <a:bodyPr/>
+                    <a:lstStyle/>
+                    <a:p>
+                      <a:pPr algn="ctr" rtl="0" fontAlgn="t">
+                        <a:buNone/>
+                      </a:pPr>
+                      <a:r>
+                        <a:rPr lang="en-CA" sz="1200" u="none" strike="noStrike" dirty="0">
+                          <a:effectLst/>
+                        </a:rPr>
+                        <a:t>Cat_3</a:t>
+                      </a:r>
+                      <a:endParaRPr lang="en-CA" sz="1200" dirty="0">
+                        <a:effectLst/>
+                      </a:endParaRPr>
+                    </a:p>
+                  </a:txBody>
+                  <a:tcPr marL="95250" marR="95250" marT="47625" marB="47625"/>
+                </a:tc>
+                <a:tc>
+                  <a:txBody>
+                    <a:bodyPr/>
+                    <a:lstStyle/>
+                    <a:p>
+                      <a:pPr algn="ctr" rtl="0" fontAlgn="t">
+                        <a:buNone/>
+                      </a:pPr>
+                      <a:r>
+                        <a:rPr lang="en-CA" sz="1200" u="none" strike="noStrike">
+                          <a:effectLst/>
+                        </a:rPr>
+                        <a:t>Cat_4</a:t>
+                      </a:r>
+                      <a:endParaRPr lang="en-CA" sz="1200">
+                        <a:effectLst/>
+                      </a:endParaRPr>
+                    </a:p>
+                  </a:txBody>
+                  <a:tcPr marL="95250" marR="95250" marT="47625" marB="47625"/>
+                </a:tc>
+                <a:tc>
+                  <a:txBody>
+                    <a:bodyPr/>
+                    <a:lstStyle/>
+                    <a:p>
+                      <a:pPr algn="ctr" rtl="0" fontAlgn="t">
+                        <a:buNone/>
+                      </a:pPr>
+                      <a:r>
+                        <a:rPr lang="en-CA" sz="1200" u="none" strike="noStrike">
+                          <a:effectLst/>
+                        </a:rPr>
+                        <a:t>Cat_5</a:t>
+                      </a:r>
+                      <a:endParaRPr lang="en-CA" sz="1200">
+                        <a:effectLst/>
+                      </a:endParaRPr>
+                    </a:p>
+                  </a:txBody>
+                  <a:tcPr marL="95250" marR="95250" marT="47625" marB="47625"/>
+                </a:tc>
+                <a:tc>
+                  <a:txBody>
+                    <a:bodyPr/>
+                    <a:lstStyle/>
+                    <a:p>
+                      <a:pPr algn="ctr" rtl="0" fontAlgn="t">
+                        <a:buNone/>
+                      </a:pPr>
+                      <a:r>
+                        <a:rPr lang="en-CA" sz="1200" u="none" strike="noStrike" dirty="0">
+                          <a:effectLst/>
+                        </a:rPr>
+                        <a:t>Total</a:t>
+                      </a:r>
+                      <a:endParaRPr lang="en-CA" sz="1200" dirty="0">
+                        <a:effectLst/>
+                      </a:endParaRPr>
+                    </a:p>
+                  </a:txBody>
+                  <a:tcPr marL="95250" marR="95250" marT="47625" marB="47625"/>
+                </a:tc>
+                <a:extLst>
+                  <a:ext uri="{0D108BD9-81ED-4DB2-BD59-A6C34878D82A}">
+                    <a16:rowId xmlns:a16="http://schemas.microsoft.com/office/drawing/2014/main" val="383417880"/>
+                  </a:ext>
+                </a:extLst>
+              </a:tr>
+              <a:tr h="254792">
+                <a:tc>
+                  <a:txBody>
+                    <a:bodyPr/>
+                    <a:lstStyle/>
+                    <a:p>
+                      <a:pPr rtl="0" fontAlgn="t">
+                        <a:buNone/>
+                      </a:pPr>
+                      <a:r>
+                        <a:rPr lang="en-CA" sz="1200" u="none" strike="noStrike" dirty="0">
+                          <a:effectLst/>
+                        </a:rPr>
+                        <a:t>Expert 1</a:t>
+                      </a:r>
+                      <a:endParaRPr lang="en-CA" sz="1200" dirty="0">
+                        <a:effectLst/>
+                      </a:endParaRPr>
+                    </a:p>
+                  </a:txBody>
+                  <a:tcPr marL="95250" marR="95250" marT="47625" marB="47625"/>
+                </a:tc>
+                <a:tc>
+                  <a:txBody>
+                    <a:bodyPr/>
+                    <a:lstStyle/>
+                    <a:p>
+                      <a:pPr algn="ctr" rtl="0" fontAlgn="t">
+                        <a:buNone/>
+                      </a:pPr>
+                      <a:r>
+                        <a:rPr lang="en-CA" sz="1200" u="none" strike="noStrike">
+                          <a:effectLst/>
+                        </a:rPr>
+                        <a:t>233</a:t>
+                      </a:r>
+                      <a:endParaRPr lang="en-CA" sz="1200">
+                        <a:effectLst/>
+                      </a:endParaRPr>
+                    </a:p>
+                  </a:txBody>
+                  <a:tcPr marL="95250" marR="95250" marT="47625" marB="47625"/>
+                </a:tc>
+                <a:tc>
+                  <a:txBody>
+                    <a:bodyPr/>
+                    <a:lstStyle/>
+                    <a:p>
+                      <a:pPr algn="ctr" rtl="0" fontAlgn="t">
+                        <a:buNone/>
+                      </a:pPr>
+                      <a:r>
+                        <a:rPr lang="en-CA" sz="1200" u="none" strike="noStrike">
+                          <a:effectLst/>
+                        </a:rPr>
+                        <a:t>435</a:t>
+                      </a:r>
+                      <a:endParaRPr lang="en-CA" sz="1200">
+                        <a:effectLst/>
+                      </a:endParaRPr>
+                    </a:p>
+                  </a:txBody>
+                  <a:tcPr marL="95250" marR="95250" marT="47625" marB="47625"/>
+                </a:tc>
+                <a:tc>
+                  <a:txBody>
+                    <a:bodyPr/>
+                    <a:lstStyle/>
+                    <a:p>
+                      <a:pPr algn="ctr" rtl="0" fontAlgn="t">
+                        <a:buNone/>
+                      </a:pPr>
+                      <a:r>
+                        <a:rPr lang="en-CA" sz="1200" u="none" strike="noStrike">
+                          <a:effectLst/>
+                        </a:rPr>
+                        <a:t>282</a:t>
+                      </a:r>
+                      <a:endParaRPr lang="en-CA" sz="1200">
+                        <a:effectLst/>
+                      </a:endParaRPr>
+                    </a:p>
+                  </a:txBody>
+                  <a:tcPr marL="95250" marR="95250" marT="47625" marB="47625"/>
+                </a:tc>
+                <a:tc>
+                  <a:txBody>
+                    <a:bodyPr/>
+                    <a:lstStyle/>
+                    <a:p>
+                      <a:pPr algn="ctr" rtl="0" fontAlgn="t">
+                        <a:buNone/>
+                      </a:pPr>
+                      <a:r>
+                        <a:rPr lang="en-CA" sz="1200" u="none" strike="noStrike">
+                          <a:effectLst/>
+                        </a:rPr>
+                        <a:t>250</a:t>
+                      </a:r>
+                      <a:endParaRPr lang="en-CA" sz="1200">
+                        <a:effectLst/>
+                      </a:endParaRPr>
+                    </a:p>
+                  </a:txBody>
+                  <a:tcPr marL="95250" marR="95250" marT="47625" marB="47625"/>
+                </a:tc>
+                <a:tc>
+                  <a:txBody>
+                    <a:bodyPr/>
+                    <a:lstStyle/>
+                    <a:p>
+                      <a:pPr algn="ctr" rtl="0" fontAlgn="t">
+                        <a:buNone/>
+                      </a:pPr>
+                      <a:r>
+                        <a:rPr lang="en-CA" sz="1200" u="none" strike="noStrike">
+                          <a:effectLst/>
+                        </a:rPr>
+                        <a:t>100</a:t>
+                      </a:r>
+                      <a:endParaRPr lang="en-CA" sz="1200">
+                        <a:effectLst/>
+                      </a:endParaRPr>
+                    </a:p>
+                  </a:txBody>
+                  <a:tcPr marL="95250" marR="95250" marT="47625" marB="47625"/>
+                </a:tc>
+                <a:tc>
+                  <a:txBody>
+                    <a:bodyPr/>
+                    <a:lstStyle/>
+                    <a:p>
+                      <a:pPr algn="ctr" rtl="0" fontAlgn="t">
+                        <a:buNone/>
+                      </a:pPr>
+                      <a:r>
+                        <a:rPr lang="en-CA" sz="1200" u="none" strike="noStrike" dirty="0">
+                          <a:effectLst/>
+                        </a:rPr>
+                        <a:t>1300</a:t>
+                      </a:r>
+                      <a:endParaRPr lang="en-CA" sz="1200" dirty="0">
+                        <a:effectLst/>
+                      </a:endParaRPr>
+                    </a:p>
+                  </a:txBody>
+                  <a:tcPr marL="95250" marR="95250" marT="47625" marB="47625"/>
+                </a:tc>
+                <a:extLst>
+                  <a:ext uri="{0D108BD9-81ED-4DB2-BD59-A6C34878D82A}">
+                    <a16:rowId xmlns:a16="http://schemas.microsoft.com/office/drawing/2014/main" val="1272847083"/>
+                  </a:ext>
+                </a:extLst>
+              </a:tr>
+              <a:tr h="254792">
+                <a:tc>
+                  <a:txBody>
+                    <a:bodyPr/>
+                    <a:lstStyle/>
+                    <a:p>
+                      <a:pPr rtl="0" fontAlgn="t">
+                        <a:buNone/>
+                      </a:pPr>
+                      <a:r>
+                        <a:rPr lang="en-CA" sz="1200" u="none" strike="noStrike">
+                          <a:effectLst/>
+                        </a:rPr>
+                        <a:t>Expert 2</a:t>
+                      </a:r>
+                      <a:endParaRPr lang="en-CA" sz="1200">
+                        <a:effectLst/>
+                      </a:endParaRPr>
+                    </a:p>
+                  </a:txBody>
+                  <a:tcPr marL="95250" marR="95250" marT="47625" marB="47625"/>
+                </a:tc>
+                <a:tc>
+                  <a:txBody>
+                    <a:bodyPr/>
+                    <a:lstStyle/>
+                    <a:p>
+                      <a:pPr algn="ctr" rtl="0" fontAlgn="t">
+                        <a:buNone/>
+                      </a:pPr>
+                      <a:r>
+                        <a:rPr lang="en-CA" sz="1200" u="none" strike="noStrike" dirty="0">
+                          <a:effectLst/>
+                        </a:rPr>
+                        <a:t>255</a:t>
+                      </a:r>
+                      <a:endParaRPr lang="en-CA" sz="1200" dirty="0">
+                        <a:effectLst/>
+                      </a:endParaRPr>
+                    </a:p>
+                  </a:txBody>
+                  <a:tcPr marL="95250" marR="95250" marT="47625" marB="47625"/>
+                </a:tc>
+                <a:tc>
+                  <a:txBody>
+                    <a:bodyPr/>
+                    <a:lstStyle/>
+                    <a:p>
+                      <a:pPr algn="ctr" rtl="0" fontAlgn="t">
+                        <a:buNone/>
+                      </a:pPr>
+                      <a:r>
+                        <a:rPr lang="en-CA" sz="1200" u="none" strike="noStrike">
+                          <a:effectLst/>
+                        </a:rPr>
+                        <a:t>423</a:t>
+                      </a:r>
+                      <a:endParaRPr lang="en-CA" sz="1200">
+                        <a:effectLst/>
+                      </a:endParaRPr>
+                    </a:p>
+                  </a:txBody>
+                  <a:tcPr marL="95250" marR="95250" marT="47625" marB="47625"/>
+                </a:tc>
+                <a:tc>
+                  <a:txBody>
+                    <a:bodyPr/>
+                    <a:lstStyle/>
+                    <a:p>
+                      <a:pPr algn="ctr" rtl="0" fontAlgn="t">
+                        <a:buNone/>
+                      </a:pPr>
+                      <a:r>
+                        <a:rPr lang="en-CA" sz="1200" u="none" strike="noStrike">
+                          <a:effectLst/>
+                        </a:rPr>
+                        <a:t>362</a:t>
+                      </a:r>
+                      <a:endParaRPr lang="en-CA" sz="1200">
+                        <a:effectLst/>
+                      </a:endParaRPr>
+                    </a:p>
+                  </a:txBody>
+                  <a:tcPr marL="95250" marR="95250" marT="47625" marB="47625"/>
+                </a:tc>
+                <a:tc>
+                  <a:txBody>
+                    <a:bodyPr/>
+                    <a:lstStyle/>
+                    <a:p>
+                      <a:pPr algn="ctr" rtl="0" fontAlgn="t">
+                        <a:buNone/>
+                      </a:pPr>
+                      <a:r>
+                        <a:rPr lang="en-CA" sz="1200" u="none" strike="noStrike">
+                          <a:effectLst/>
+                        </a:rPr>
+                        <a:t>233</a:t>
+                      </a:r>
+                      <a:endParaRPr lang="en-CA" sz="1200">
+                        <a:effectLst/>
+                      </a:endParaRPr>
+                    </a:p>
+                  </a:txBody>
+                  <a:tcPr marL="95250" marR="95250" marT="47625" marB="47625"/>
+                </a:tc>
+                <a:tc>
+                  <a:txBody>
+                    <a:bodyPr/>
+                    <a:lstStyle/>
+                    <a:p>
+                      <a:pPr algn="ctr" rtl="0" fontAlgn="t">
+                        <a:buNone/>
+                      </a:pPr>
+                      <a:r>
+                        <a:rPr lang="en-CA" sz="1200" u="none" strike="noStrike">
+                          <a:effectLst/>
+                        </a:rPr>
+                        <a:t>24</a:t>
+                      </a:r>
+                      <a:endParaRPr lang="en-CA" sz="1200">
+                        <a:effectLst/>
+                      </a:endParaRPr>
+                    </a:p>
+                  </a:txBody>
+                  <a:tcPr marL="95250" marR="95250" marT="47625" marB="47625"/>
+                </a:tc>
+                <a:tc>
+                  <a:txBody>
+                    <a:bodyPr/>
+                    <a:lstStyle/>
+                    <a:p>
+                      <a:pPr algn="ctr" rtl="0" fontAlgn="t">
+                        <a:buNone/>
+                      </a:pPr>
+                      <a:r>
+                        <a:rPr lang="en-CA" sz="1200" u="none" strike="noStrike">
+                          <a:effectLst/>
+                        </a:rPr>
+                        <a:t>1300</a:t>
+                      </a:r>
+                      <a:endParaRPr lang="en-CA" sz="1200">
+                        <a:effectLst/>
+                      </a:endParaRPr>
+                    </a:p>
+                  </a:txBody>
+                  <a:tcPr marL="95250" marR="95250" marT="47625" marB="47625"/>
+                </a:tc>
+                <a:extLst>
+                  <a:ext uri="{0D108BD9-81ED-4DB2-BD59-A6C34878D82A}">
+                    <a16:rowId xmlns:a16="http://schemas.microsoft.com/office/drawing/2014/main" val="2821578875"/>
+                  </a:ext>
+                </a:extLst>
+              </a:tr>
+              <a:tr h="254792">
+                <a:tc>
+                  <a:txBody>
+                    <a:bodyPr/>
+                    <a:lstStyle/>
+                    <a:p>
+                      <a:pPr rtl="0" fontAlgn="t">
+                        <a:buNone/>
+                      </a:pPr>
+                      <a:r>
+                        <a:rPr lang="en-CA" sz="1200" u="none" strike="noStrike">
+                          <a:effectLst/>
+                        </a:rPr>
+                        <a:t>Expert 3</a:t>
+                      </a:r>
+                      <a:endParaRPr lang="en-CA" sz="1200">
+                        <a:effectLst/>
+                      </a:endParaRPr>
+                    </a:p>
+                  </a:txBody>
+                  <a:tcPr marL="95250" marR="95250" marT="47625" marB="47625"/>
+                </a:tc>
+                <a:tc>
+                  <a:txBody>
+                    <a:bodyPr/>
+                    <a:lstStyle/>
+                    <a:p>
+                      <a:pPr algn="ctr" rtl="0" fontAlgn="t">
+                        <a:buNone/>
+                      </a:pPr>
+                      <a:r>
+                        <a:rPr lang="en-CA" sz="1200" u="none" strike="noStrike">
+                          <a:effectLst/>
+                        </a:rPr>
+                        <a:t>387</a:t>
+                      </a:r>
+                      <a:endParaRPr lang="en-CA" sz="1200">
+                        <a:effectLst/>
+                      </a:endParaRPr>
+                    </a:p>
+                  </a:txBody>
+                  <a:tcPr marL="95250" marR="95250" marT="47625" marB="47625"/>
+                </a:tc>
+                <a:tc>
+                  <a:txBody>
+                    <a:bodyPr/>
+                    <a:lstStyle/>
+                    <a:p>
+                      <a:pPr algn="ctr" rtl="0" fontAlgn="t">
+                        <a:buNone/>
+                      </a:pPr>
+                      <a:r>
+                        <a:rPr lang="en-CA" sz="1200" u="none" strike="noStrike">
+                          <a:effectLst/>
+                        </a:rPr>
+                        <a:t>289</a:t>
+                      </a:r>
+                      <a:endParaRPr lang="en-CA" sz="1200">
+                        <a:effectLst/>
+                      </a:endParaRPr>
+                    </a:p>
+                  </a:txBody>
+                  <a:tcPr marL="95250" marR="95250" marT="47625" marB="47625"/>
+                </a:tc>
+                <a:tc>
+                  <a:txBody>
+                    <a:bodyPr/>
+                    <a:lstStyle/>
+                    <a:p>
+                      <a:pPr algn="ctr" rtl="0" fontAlgn="t">
+                        <a:buNone/>
+                      </a:pPr>
+                      <a:r>
+                        <a:rPr lang="en-CA" sz="1200" u="none" strike="noStrike">
+                          <a:effectLst/>
+                        </a:rPr>
+                        <a:t>300</a:t>
+                      </a:r>
+                      <a:endParaRPr lang="en-CA" sz="1200">
+                        <a:effectLst/>
+                      </a:endParaRPr>
+                    </a:p>
+                  </a:txBody>
+                  <a:tcPr marL="95250" marR="95250" marT="47625" marB="47625"/>
+                </a:tc>
+                <a:tc>
+                  <a:txBody>
+                    <a:bodyPr/>
+                    <a:lstStyle/>
+                    <a:p>
+                      <a:pPr algn="ctr" rtl="0" fontAlgn="t">
+                        <a:buNone/>
+                      </a:pPr>
+                      <a:r>
+                        <a:rPr lang="en-CA" sz="1200" u="none" strike="noStrike">
+                          <a:effectLst/>
+                        </a:rPr>
+                        <a:t>174</a:t>
+                      </a:r>
+                      <a:endParaRPr lang="en-CA" sz="1200">
+                        <a:effectLst/>
+                      </a:endParaRPr>
+                    </a:p>
+                  </a:txBody>
+                  <a:tcPr marL="95250" marR="95250" marT="47625" marB="47625"/>
+                </a:tc>
+                <a:tc>
+                  <a:txBody>
+                    <a:bodyPr/>
+                    <a:lstStyle/>
+                    <a:p>
+                      <a:pPr algn="ctr" rtl="0" fontAlgn="t">
+                        <a:buNone/>
+                      </a:pPr>
+                      <a:r>
+                        <a:rPr lang="en-CA" sz="1200" u="none" strike="noStrike">
+                          <a:effectLst/>
+                        </a:rPr>
+                        <a:t>139</a:t>
+                      </a:r>
+                      <a:endParaRPr lang="en-CA" sz="1200">
+                        <a:effectLst/>
+                      </a:endParaRPr>
+                    </a:p>
+                  </a:txBody>
+                  <a:tcPr marL="95250" marR="95250" marT="47625" marB="47625"/>
+                </a:tc>
+                <a:tc>
+                  <a:txBody>
+                    <a:bodyPr/>
+                    <a:lstStyle/>
+                    <a:p>
+                      <a:pPr algn="ctr" rtl="0" fontAlgn="t">
+                        <a:buNone/>
+                      </a:pPr>
+                      <a:r>
+                        <a:rPr lang="en-CA" sz="1200" u="none" strike="noStrike">
+                          <a:effectLst/>
+                        </a:rPr>
+                        <a:t>1300</a:t>
+                      </a:r>
+                      <a:endParaRPr lang="en-CA" sz="1200">
+                        <a:effectLst/>
+                      </a:endParaRPr>
+                    </a:p>
+                  </a:txBody>
+                  <a:tcPr marL="95250" marR="95250" marT="47625" marB="47625"/>
+                </a:tc>
+                <a:extLst>
+                  <a:ext uri="{0D108BD9-81ED-4DB2-BD59-A6C34878D82A}">
+                    <a16:rowId xmlns:a16="http://schemas.microsoft.com/office/drawing/2014/main" val="2701244322"/>
+                  </a:ext>
+                </a:extLst>
+              </a:tr>
+              <a:tr h="254792">
+                <a:tc>
+                  <a:txBody>
+                    <a:bodyPr/>
+                    <a:lstStyle/>
+                    <a:p>
+                      <a:pPr rtl="0" fontAlgn="t">
+                        <a:buNone/>
+                      </a:pPr>
+                      <a:r>
+                        <a:rPr lang="en-CA" sz="1200" u="none" strike="noStrike">
+                          <a:effectLst/>
+                        </a:rPr>
+                        <a:t>Consensus</a:t>
+                      </a:r>
+                      <a:endParaRPr lang="en-CA" sz="1200">
+                        <a:effectLst/>
+                      </a:endParaRPr>
+                    </a:p>
+                  </a:txBody>
+                  <a:tcPr marL="95250" marR="95250" marT="47625" marB="47625"/>
+                </a:tc>
+                <a:tc>
+                  <a:txBody>
+                    <a:bodyPr/>
+                    <a:lstStyle/>
+                    <a:p>
+                      <a:pPr algn="ctr" rtl="0" fontAlgn="t">
+                        <a:buNone/>
+                      </a:pPr>
+                      <a:r>
+                        <a:rPr lang="en-CA" sz="1200" u="none" strike="noStrike">
+                          <a:effectLst/>
+                        </a:rPr>
+                        <a:t>305</a:t>
+                      </a:r>
+                      <a:endParaRPr lang="en-CA" sz="1200">
+                        <a:effectLst/>
+                      </a:endParaRPr>
+                    </a:p>
+                  </a:txBody>
+                  <a:tcPr marL="95250" marR="95250" marT="47625" marB="47625"/>
+                </a:tc>
+                <a:tc>
+                  <a:txBody>
+                    <a:bodyPr/>
+                    <a:lstStyle/>
+                    <a:p>
+                      <a:pPr algn="ctr" rtl="0" fontAlgn="t">
+                        <a:buNone/>
+                      </a:pPr>
+                      <a:r>
+                        <a:rPr lang="en-CA" sz="1200" u="none" strike="noStrike">
+                          <a:effectLst/>
+                        </a:rPr>
+                        <a:t>359</a:t>
+                      </a:r>
+                      <a:endParaRPr lang="en-CA" sz="1200">
+                        <a:effectLst/>
+                      </a:endParaRPr>
+                    </a:p>
+                  </a:txBody>
+                  <a:tcPr marL="95250" marR="95250" marT="47625" marB="47625"/>
+                </a:tc>
+                <a:tc>
+                  <a:txBody>
+                    <a:bodyPr/>
+                    <a:lstStyle/>
+                    <a:p>
+                      <a:pPr algn="ctr" rtl="0" fontAlgn="t">
+                        <a:buNone/>
+                      </a:pPr>
+                      <a:r>
+                        <a:rPr lang="en-CA" sz="1200" u="none" strike="noStrike" dirty="0">
+                          <a:effectLst/>
+                        </a:rPr>
+                        <a:t>299</a:t>
+                      </a:r>
+                      <a:endParaRPr lang="en-CA" sz="1200" dirty="0">
+                        <a:effectLst/>
+                      </a:endParaRPr>
+                    </a:p>
+                  </a:txBody>
+                  <a:tcPr marL="95250" marR="95250" marT="47625" marB="47625"/>
+                </a:tc>
+                <a:tc>
+                  <a:txBody>
+                    <a:bodyPr/>
+                    <a:lstStyle/>
+                    <a:p>
+                      <a:pPr algn="ctr" rtl="0" fontAlgn="t">
+                        <a:buNone/>
+                      </a:pPr>
+                      <a:r>
+                        <a:rPr lang="en-CA" sz="1200" u="none" strike="noStrike">
+                          <a:effectLst/>
+                        </a:rPr>
+                        <a:t>213</a:t>
+                      </a:r>
+                      <a:endParaRPr lang="en-CA" sz="1200">
+                        <a:effectLst/>
+                      </a:endParaRPr>
+                    </a:p>
+                  </a:txBody>
+                  <a:tcPr marL="95250" marR="95250" marT="47625" marB="47625"/>
+                </a:tc>
+                <a:tc>
+                  <a:txBody>
+                    <a:bodyPr/>
+                    <a:lstStyle/>
+                    <a:p>
+                      <a:pPr algn="ctr" rtl="0" fontAlgn="t">
+                        <a:buNone/>
+                      </a:pPr>
+                      <a:r>
+                        <a:rPr lang="en-CA" sz="1200" u="none" strike="noStrike">
+                          <a:effectLst/>
+                        </a:rPr>
+                        <a:t>91</a:t>
+                      </a:r>
+                      <a:endParaRPr lang="en-CA" sz="1200">
+                        <a:effectLst/>
+                      </a:endParaRPr>
+                    </a:p>
+                  </a:txBody>
+                  <a:tcPr marL="95250" marR="95250" marT="47625" marB="47625"/>
+                </a:tc>
+                <a:tc>
+                  <a:txBody>
+                    <a:bodyPr/>
+                    <a:lstStyle/>
+                    <a:p>
+                      <a:pPr algn="ctr" rtl="0" fontAlgn="t">
+                        <a:buNone/>
+                      </a:pPr>
+                      <a:r>
+                        <a:rPr lang="en-CA" sz="1200" u="none" strike="noStrike" dirty="0">
+                          <a:effectLst/>
+                        </a:rPr>
+                        <a:t>1267</a:t>
+                      </a:r>
+                      <a:endParaRPr lang="en-CA" sz="1200" dirty="0">
+                        <a:effectLst/>
+                      </a:endParaRPr>
+                    </a:p>
+                  </a:txBody>
+                  <a:tcPr marL="95250" marR="95250" marT="47625" marB="47625"/>
+                </a:tc>
+                <a:extLst>
+                  <a:ext uri="{0D108BD9-81ED-4DB2-BD59-A6C34878D82A}">
+                    <a16:rowId xmlns:a16="http://schemas.microsoft.com/office/drawing/2014/main" val="1725633743"/>
+                  </a:ext>
+                </a:extLst>
+              </a:tr>
+            </a:tbl>
+          </a:graphicData>
+        </a:graphic>
+      </p:graphicFrame>
+      <p:sp>
+        <p:nvSpPr>
+          <p:cNvPr id="54" name="Right Triangle 53">
+            <a:extLst>
+              <a:ext uri="{FF2B5EF4-FFF2-40B4-BE49-F238E27FC236}">
+                <a16:creationId xmlns:a16="http://schemas.microsoft.com/office/drawing/2014/main" id="{759CBD75-2EC9-32E6-F328-4BA9AAA7846C}"/>
+              </a:ext>
+            </a:extLst>
+          </p:cNvPr>
+          <p:cNvSpPr/>
+          <p:nvPr/>
+        </p:nvSpPr>
+        <p:spPr>
+          <a:xfrm flipH="1">
+            <a:off x="1657349" y="3055046"/>
+            <a:ext cx="3986213" cy="359667"/>
+          </a:xfrm>
+          <a:prstGeom prst="rtTriangle">
+            <a:avLst/>
+          </a:prstGeom>
+        </p:spPr>
+        <p:style>
+          <a:lnRef idx="2">
+            <a:schemeClr val="accent1">
+              <a:shade val="15000"/>
+            </a:schemeClr>
+          </a:lnRef>
+          <a:fillRef idx="1">
+            <a:schemeClr val="accent1"/>
+          </a:fillRef>
+          <a:effectRef idx="0">
+            <a:schemeClr val="accent1"/>
+          </a:effectRef>
+          <a:fontRef idx="minor">
+            <a:schemeClr val="lt1"/>
+          </a:fontRef>
+        </p:style>
+        <p:txBody>
+          <a:bodyPr rtlCol="0" anchor="ctr"/>
+          <a:lstStyle/>
+          <a:p>
+            <a:pPr algn="r"/>
+            <a:endParaRPr lang="en-US" sz="1200" dirty="0"/>
+          </a:p>
+        </p:txBody>
+      </p:sp>
+      <p:sp>
+        <p:nvSpPr>
+          <p:cNvPr id="55" name="TextBox 54">
+            <a:extLst>
+              <a:ext uri="{FF2B5EF4-FFF2-40B4-BE49-F238E27FC236}">
+                <a16:creationId xmlns:a16="http://schemas.microsoft.com/office/drawing/2014/main" id="{97611B14-0A52-BC49-2251-A842DEDFE865}"/>
+              </a:ext>
+            </a:extLst>
+          </p:cNvPr>
+          <p:cNvSpPr txBox="1"/>
+          <p:nvPr/>
+        </p:nvSpPr>
+        <p:spPr>
+          <a:xfrm>
+            <a:off x="4382159" y="3141177"/>
+            <a:ext cx="2125345" cy="276999"/>
+          </a:xfrm>
+          <a:prstGeom prst="rect">
+            <a:avLst/>
+          </a:prstGeom>
+          <a:noFill/>
+        </p:spPr>
+        <p:txBody>
+          <a:bodyPr wrap="square" rtlCol="0">
+            <a:spAutoFit/>
+          </a:bodyPr>
+          <a:lstStyle/>
+          <a:p>
+            <a:r>
+              <a:rPr lang="en-US" sz="1200" dirty="0">
+                <a:solidFill>
+                  <a:schemeClr val="bg1"/>
+                </a:solidFill>
+              </a:rPr>
+              <a:t>Drug Sensitivity</a:t>
+            </a:r>
           </a:p>
         </p:txBody>
       </p:sp>
